--- a/materials/AI_lecture_script.pptx
+++ b/materials/AI_lecture_script.pptx
@@ -15,6 +15,14 @@
     <p:sldId id="263" r:id="rId15"/>
     <p:sldId id="264" r:id="rId16"/>
     <p:sldId id="265" r:id="rId17"/>
+    <p:sldId id="266" r:id="rId18"/>
+    <p:sldId id="267" r:id="rId19"/>
+    <p:sldId id="268" r:id="rId20"/>
+    <p:sldId id="269" r:id="rId21"/>
+    <p:sldId id="270" r:id="rId22"/>
+    <p:sldId id="271" r:id="rId23"/>
+    <p:sldId id="272" r:id="rId24"/>
+    <p:sldId id="273" r:id="rId25"/>
   </p:sldIdLst>
   <p:sldSz cx="12191695" cy="6858000" type="screen4x3"/>
   <p:notesSz cx="6858000" cy="9144000"/>
@@ -511,7 +519,7 @@
           <a:lstStyle/>
           <a:p>
             <a:r>
-              <a:t>안녕하세요, 선생님. 오늘은 생성형 AI를 수업과 학교 업무에 어떻게 활용할 수 있는지 함께 실습해 보는 시간입니다. AI가 낯설어도 괜찮습니다. 오늘 배운 내용은 강의 후에도 따라할 수 있는 실습 가이드 페이지 링크로 드릴 예정입니다.</a:t>
+              <a:t>안녕하세요. 오늘은 생성형 AI를 수업과 학교 업무에 활용하는 실습 연수입니다. 강의 후에도 따라할 수 있는 가이드 페이지 링크를 드립니다.</a:t>
             </a:r>
           </a:p>
         </p:txBody>
@@ -581,7 +589,567 @@
           <a:lstStyle/>
           <a:p>
             <a:r>
-              <a:t>마지막으로 꼭 기억해 주실 세 가지입니다. 개인정보는 절대 입력하지 마시고, AI가 알려준 내용은 반드시 확인하신 뒤 사용하세요. AI는 선생님을 대체하는 것이 아니라 업무를 돕는 파트너입니다. 오늘 드린 실습 가이드 링크를 저장해 두시면 언제든 다시 따라하실 수 있습니다. 질문 있으신 선생님 편하게 말씀해 주세요. 감사합니다.</a:t>
+              <a:t>부서 업무에 맞는 프롬프트를 골라 바로 시도해 보세요.</a:t>
+            </a:r>
+          </a:p>
+        </p:txBody>
+      </p:sp>
+      <p:sp>
+        <p:nvSpPr>
+          <p:cNvPr id="4" name="Slide Number Placeholder 3"/>
+          <p:cNvSpPr>
+            <a:spLocks noGrp="1"/>
+          </p:cNvSpPr>
+          <p:nvPr>
+            <p:ph type="sldNum" idx="5" sz="quarter"/>
+          </p:nvPr>
+        </p:nvSpPr>
+        <p:spPr/>
+      </p:sp>
+    </p:spTree>
+  </p:cSld>
+  <p:clrMapOvr>
+    <a:masterClrMapping/>
+  </p:clrMapOvr>
+</p:notes>
+</file>
+
+<file path=ppt/notesSlides/notesSlide11.xml><?xml version="1.0" encoding="utf-8"?>
+<p:notes xmlns:a="http://schemas.openxmlformats.org/drawingml/2006/main" xmlns:p="http://schemas.openxmlformats.org/presentationml/2006/main" xmlns:r="http://schemas.openxmlformats.org/officeDocument/2006/relationships">
+  <p:cSld>
+    <p:spTree>
+      <p:nvGrpSpPr>
+        <p:cNvPr id="1" name=""/>
+        <p:cNvGrpSpPr/>
+        <p:nvPr/>
+      </p:nvGrpSpPr>
+      <p:grpSpPr>
+        <a:xfrm>
+          <a:off x="0" y="0"/>
+          <a:ext cx="0" cy="0"/>
+          <a:chOff x="0" y="0"/>
+          <a:chExt cx="0" cy="0"/>
+        </a:xfrm>
+      </p:grpSpPr>
+      <p:sp>
+        <p:nvSpPr>
+          <p:cNvPr id="2" name="Slide Image Placeholder 1"/>
+          <p:cNvSpPr>
+            <a:spLocks noGrp="1"/>
+          </p:cNvSpPr>
+          <p:nvPr>
+            <p:ph type="sldImg" idx="2"/>
+          </p:nvPr>
+        </p:nvSpPr>
+        <p:spPr/>
+      </p:sp>
+      <p:sp>
+        <p:nvSpPr>
+          <p:cNvPr id="3" name="Notes Placeholder 2"/>
+          <p:cNvSpPr>
+            <a:spLocks noGrp="1"/>
+          </p:cNvSpPr>
+          <p:nvPr>
+            <p:ph type="body" idx="3" sz="quarter"/>
+          </p:nvPr>
+        </p:nvSpPr>
+        <p:spPr/>
+        <p:txBody>
+          <a:bodyPr/>
+          <a:lstStyle/>
+          <a:p>
+            <a:r>
+              <a:t>담임 업무에서 가정통신문과 학급 활동 아이디어에 AI를 활용해 보세요.</a:t>
+            </a:r>
+          </a:p>
+        </p:txBody>
+      </p:sp>
+      <p:sp>
+        <p:nvSpPr>
+          <p:cNvPr id="4" name="Slide Number Placeholder 3"/>
+          <p:cNvSpPr>
+            <a:spLocks noGrp="1"/>
+          </p:cNvSpPr>
+          <p:nvPr>
+            <p:ph type="sldNum" idx="5" sz="quarter"/>
+          </p:nvPr>
+        </p:nvSpPr>
+        <p:spPr/>
+      </p:sp>
+    </p:spTree>
+  </p:cSld>
+  <p:clrMapOvr>
+    <a:masterClrMapping/>
+  </p:clrMapOvr>
+</p:notes>
+</file>
+
+<file path=ppt/notesSlides/notesSlide12.xml><?xml version="1.0" encoding="utf-8"?>
+<p:notes xmlns:a="http://schemas.openxmlformats.org/drawingml/2006/main" xmlns:p="http://schemas.openxmlformats.org/presentationml/2006/main" xmlns:r="http://schemas.openxmlformats.org/officeDocument/2006/relationships">
+  <p:cSld>
+    <p:spTree>
+      <p:nvGrpSpPr>
+        <p:cNvPr id="1" name=""/>
+        <p:cNvGrpSpPr/>
+        <p:nvPr/>
+      </p:nvGrpSpPr>
+      <p:grpSpPr>
+        <a:xfrm>
+          <a:off x="0" y="0"/>
+          <a:ext cx="0" cy="0"/>
+          <a:chOff x="0" y="0"/>
+          <a:chExt cx="0" cy="0"/>
+        </a:xfrm>
+      </p:grpSpPr>
+      <p:sp>
+        <p:nvSpPr>
+          <p:cNvPr id="2" name="Slide Image Placeholder 1"/>
+          <p:cNvSpPr>
+            <a:spLocks noGrp="1"/>
+          </p:cNvSpPr>
+          <p:nvPr>
+            <p:ph type="sldImg" idx="2"/>
+          </p:nvPr>
+        </p:nvSpPr>
+        <p:spPr/>
+      </p:sp>
+      <p:sp>
+        <p:nvSpPr>
+          <p:cNvPr id="3" name="Notes Placeholder 2"/>
+          <p:cNvSpPr>
+            <a:spLocks noGrp="1"/>
+          </p:cNvSpPr>
+          <p:nvPr>
+            <p:ph type="body" idx="3" sz="quarter"/>
+          </p:nvPr>
+        </p:nvSpPr>
+        <p:spPr/>
+        <p:txBody>
+          <a:bodyPr/>
+          <a:lstStyle/>
+          <a:p>
+            <a:r>
+              <a:t>@기능으로 실시간 정보를 연동합니다. Gems는 가이드에 시나리오 링크가 있습니다.</a:t>
+            </a:r>
+          </a:p>
+        </p:txBody>
+      </p:sp>
+      <p:sp>
+        <p:nvSpPr>
+          <p:cNvPr id="4" name="Slide Number Placeholder 3"/>
+          <p:cNvSpPr>
+            <a:spLocks noGrp="1"/>
+          </p:cNvSpPr>
+          <p:nvPr>
+            <p:ph type="sldNum" idx="5" sz="quarter"/>
+          </p:nvPr>
+        </p:nvSpPr>
+        <p:spPr/>
+      </p:sp>
+    </p:spTree>
+  </p:cSld>
+  <p:clrMapOvr>
+    <a:masterClrMapping/>
+  </p:clrMapOvr>
+</p:notes>
+</file>
+
+<file path=ppt/notesSlides/notesSlide13.xml><?xml version="1.0" encoding="utf-8"?>
+<p:notes xmlns:a="http://schemas.openxmlformats.org/drawingml/2006/main" xmlns:p="http://schemas.openxmlformats.org/presentationml/2006/main" xmlns:r="http://schemas.openxmlformats.org/officeDocument/2006/relationships">
+  <p:cSld>
+    <p:spTree>
+      <p:nvGrpSpPr>
+        <p:cNvPr id="1" name=""/>
+        <p:cNvGrpSpPr/>
+        <p:nvPr/>
+      </p:nvGrpSpPr>
+      <p:grpSpPr>
+        <a:xfrm>
+          <a:off x="0" y="0"/>
+          <a:ext cx="0" cy="0"/>
+          <a:chOff x="0" y="0"/>
+          <a:chExt cx="0" cy="0"/>
+        </a:xfrm>
+      </p:grpSpPr>
+      <p:sp>
+        <p:nvSpPr>
+          <p:cNvPr id="2" name="Slide Image Placeholder 1"/>
+          <p:cNvSpPr>
+            <a:spLocks noGrp="1"/>
+          </p:cNvSpPr>
+          <p:nvPr>
+            <p:ph type="sldImg" idx="2"/>
+          </p:nvPr>
+        </p:nvSpPr>
+        <p:spPr/>
+      </p:sp>
+      <p:sp>
+        <p:nvSpPr>
+          <p:cNvPr id="3" name="Notes Placeholder 2"/>
+          <p:cNvSpPr>
+            <a:spLocks noGrp="1"/>
+          </p:cNvSpPr>
+          <p:nvPr>
+            <p:ph type="body" idx="3" sz="quarter"/>
+          </p:nvPr>
+        </p:nvSpPr>
+        <p:spPr/>
+        <p:txBody>
+          <a:bodyPr/>
+          <a:lstStyle/>
+          <a:p>
+            <a:r>
+              <a:t>Forms Gemini는 최초 1회 영어 설정이 필요합니다. 한글 결과는 프롬프트 끝에 Please output all text in Korean.을 붙이세요.</a:t>
+            </a:r>
+          </a:p>
+        </p:txBody>
+      </p:sp>
+      <p:sp>
+        <p:nvSpPr>
+          <p:cNvPr id="4" name="Slide Number Placeholder 3"/>
+          <p:cNvSpPr>
+            <a:spLocks noGrp="1"/>
+          </p:cNvSpPr>
+          <p:nvPr>
+            <p:ph type="sldNum" idx="5" sz="quarter"/>
+          </p:nvPr>
+        </p:nvSpPr>
+        <p:spPr/>
+      </p:sp>
+    </p:spTree>
+  </p:cSld>
+  <p:clrMapOvr>
+    <a:masterClrMapping/>
+  </p:clrMapOvr>
+</p:notes>
+</file>
+
+<file path=ppt/notesSlides/notesSlide14.xml><?xml version="1.0" encoding="utf-8"?>
+<p:notes xmlns:a="http://schemas.openxmlformats.org/drawingml/2006/main" xmlns:p="http://schemas.openxmlformats.org/presentationml/2006/main" xmlns:r="http://schemas.openxmlformats.org/officeDocument/2006/relationships">
+  <p:cSld>
+    <p:spTree>
+      <p:nvGrpSpPr>
+        <p:cNvPr id="1" name=""/>
+        <p:cNvGrpSpPr/>
+        <p:nvPr/>
+      </p:nvGrpSpPr>
+      <p:grpSpPr>
+        <a:xfrm>
+          <a:off x="0" y="0"/>
+          <a:ext cx="0" cy="0"/>
+          <a:chOff x="0" y="0"/>
+          <a:chExt cx="0" cy="0"/>
+        </a:xfrm>
+      </p:grpSpPr>
+      <p:sp>
+        <p:nvSpPr>
+          <p:cNvPr id="2" name="Slide Image Placeholder 1"/>
+          <p:cNvSpPr>
+            <a:spLocks noGrp="1"/>
+          </p:cNvSpPr>
+          <p:nvPr>
+            <p:ph type="sldImg" idx="2"/>
+          </p:nvPr>
+        </p:nvSpPr>
+        <p:spPr/>
+      </p:sp>
+      <p:sp>
+        <p:nvSpPr>
+          <p:cNvPr id="3" name="Notes Placeholder 2"/>
+          <p:cNvSpPr>
+            <a:spLocks noGrp="1"/>
+          </p:cNvSpPr>
+          <p:nvPr>
+            <p:ph type="body" idx="3" sz="quarter"/>
+          </p:nvPr>
+        </p:nvSpPr>
+        <p:spPr/>
+        <p:txBody>
+          <a:bodyPr/>
+          <a:lstStyle/>
+          <a:p>
+            <a:r>
+              <a:t>Gemini로 내용 구성 → 슬라이드 제미나이 패널에서 이미지·슬라이드 생성 → 발표 스크립트까지 7단계입니다.</a:t>
+            </a:r>
+          </a:p>
+        </p:txBody>
+      </p:sp>
+      <p:sp>
+        <p:nvSpPr>
+          <p:cNvPr id="4" name="Slide Number Placeholder 3"/>
+          <p:cNvSpPr>
+            <a:spLocks noGrp="1"/>
+          </p:cNvSpPr>
+          <p:nvPr>
+            <p:ph type="sldNum" idx="5" sz="quarter"/>
+          </p:nvPr>
+        </p:nvSpPr>
+        <p:spPr/>
+      </p:sp>
+    </p:spTree>
+  </p:cSld>
+  <p:clrMapOvr>
+    <a:masterClrMapping/>
+  </p:clrMapOvr>
+</p:notes>
+</file>
+
+<file path=ppt/notesSlides/notesSlide15.xml><?xml version="1.0" encoding="utf-8"?>
+<p:notes xmlns:a="http://schemas.openxmlformats.org/drawingml/2006/main" xmlns:p="http://schemas.openxmlformats.org/presentationml/2006/main" xmlns:r="http://schemas.openxmlformats.org/officeDocument/2006/relationships">
+  <p:cSld>
+    <p:spTree>
+      <p:nvGrpSpPr>
+        <p:cNvPr id="1" name=""/>
+        <p:cNvGrpSpPr/>
+        <p:nvPr/>
+      </p:nvGrpSpPr>
+      <p:grpSpPr>
+        <a:xfrm>
+          <a:off x="0" y="0"/>
+          <a:ext cx="0" cy="0"/>
+          <a:chOff x="0" y="0"/>
+          <a:chExt cx="0" cy="0"/>
+        </a:xfrm>
+      </p:grpSpPr>
+      <p:sp>
+        <p:nvSpPr>
+          <p:cNvPr id="2" name="Slide Image Placeholder 1"/>
+          <p:cNvSpPr>
+            <a:spLocks noGrp="1"/>
+          </p:cNvSpPr>
+          <p:nvPr>
+            <p:ph type="sldImg" idx="2"/>
+          </p:nvPr>
+        </p:nvSpPr>
+        <p:spPr/>
+      </p:sp>
+      <p:sp>
+        <p:nvSpPr>
+          <p:cNvPr id="3" name="Notes Placeholder 2"/>
+          <p:cNvSpPr>
+            <a:spLocks noGrp="1"/>
+          </p:cNvSpPr>
+          <p:nvPr>
+            <p:ph type="body" idx="3" sz="quarter"/>
+          </p:nvPr>
+        </p:nvSpPr>
+        <p:spPr/>
+        <p:txBody>
+          <a:bodyPr/>
+          <a:lstStyle/>
+          <a:p>
+            <a:r>
+              <a:t>함수 없이 자연어로 데이터 분석, 클래스룸에서 맞춤 피드백 초안을 받을 수 있습니다.</a:t>
+            </a:r>
+          </a:p>
+        </p:txBody>
+      </p:sp>
+      <p:sp>
+        <p:nvSpPr>
+          <p:cNvPr id="4" name="Slide Number Placeholder 3"/>
+          <p:cNvSpPr>
+            <a:spLocks noGrp="1"/>
+          </p:cNvSpPr>
+          <p:nvPr>
+            <p:ph type="sldNum" idx="5" sz="quarter"/>
+          </p:nvPr>
+        </p:nvSpPr>
+        <p:spPr/>
+      </p:sp>
+    </p:spTree>
+  </p:cSld>
+  <p:clrMapOvr>
+    <a:masterClrMapping/>
+  </p:clrMapOvr>
+</p:notes>
+</file>
+
+<file path=ppt/notesSlides/notesSlide16.xml><?xml version="1.0" encoding="utf-8"?>
+<p:notes xmlns:a="http://schemas.openxmlformats.org/drawingml/2006/main" xmlns:p="http://schemas.openxmlformats.org/presentationml/2006/main" xmlns:r="http://schemas.openxmlformats.org/officeDocument/2006/relationships">
+  <p:cSld>
+    <p:spTree>
+      <p:nvGrpSpPr>
+        <p:cNvPr id="1" name=""/>
+        <p:cNvGrpSpPr/>
+        <p:nvPr/>
+      </p:nvGrpSpPr>
+      <p:grpSpPr>
+        <a:xfrm>
+          <a:off x="0" y="0"/>
+          <a:ext cx="0" cy="0"/>
+          <a:chOff x="0" y="0"/>
+          <a:chExt cx="0" cy="0"/>
+        </a:xfrm>
+      </p:grpSpPr>
+      <p:sp>
+        <p:nvSpPr>
+          <p:cNvPr id="2" name="Slide Image Placeholder 1"/>
+          <p:cNvSpPr>
+            <a:spLocks noGrp="1"/>
+          </p:cNvSpPr>
+          <p:nvPr>
+            <p:ph type="sldImg" idx="2"/>
+          </p:nvPr>
+        </p:nvSpPr>
+        <p:spPr/>
+      </p:sp>
+      <p:sp>
+        <p:nvSpPr>
+          <p:cNvPr id="3" name="Notes Placeholder 2"/>
+          <p:cNvSpPr>
+            <a:spLocks noGrp="1"/>
+          </p:cNvSpPr>
+          <p:nvPr>
+            <p:ph type="body" idx="3" sz="quarter"/>
+          </p:nvPr>
+        </p:nvSpPr>
+        <p:spPr/>
+        <p:txBody>
+          <a:bodyPr/>
+          <a:lstStyle/>
+          <a:p>
+            <a:r>
+              <a:t>방학에 수업을 설계할 때 과목명과 역량만 바꿔서 활용하세요.</a:t>
+            </a:r>
+          </a:p>
+        </p:txBody>
+      </p:sp>
+      <p:sp>
+        <p:nvSpPr>
+          <p:cNvPr id="4" name="Slide Number Placeholder 3"/>
+          <p:cNvSpPr>
+            <a:spLocks noGrp="1"/>
+          </p:cNvSpPr>
+          <p:nvPr>
+            <p:ph type="sldNum" idx="5" sz="quarter"/>
+          </p:nvPr>
+        </p:nvSpPr>
+        <p:spPr/>
+      </p:sp>
+    </p:spTree>
+  </p:cSld>
+  <p:clrMapOvr>
+    <a:masterClrMapping/>
+  </p:clrMapOvr>
+</p:notes>
+</file>
+
+<file path=ppt/notesSlides/notesSlide17.xml><?xml version="1.0" encoding="utf-8"?>
+<p:notes xmlns:a="http://schemas.openxmlformats.org/drawingml/2006/main" xmlns:p="http://schemas.openxmlformats.org/presentationml/2006/main" xmlns:r="http://schemas.openxmlformats.org/officeDocument/2006/relationships">
+  <p:cSld>
+    <p:spTree>
+      <p:nvGrpSpPr>
+        <p:cNvPr id="1" name=""/>
+        <p:cNvGrpSpPr/>
+        <p:nvPr/>
+      </p:nvGrpSpPr>
+      <p:grpSpPr>
+        <a:xfrm>
+          <a:off x="0" y="0"/>
+          <a:ext cx="0" cy="0"/>
+          <a:chOff x="0" y="0"/>
+          <a:chExt cx="0" cy="0"/>
+        </a:xfrm>
+      </p:grpSpPr>
+      <p:sp>
+        <p:nvSpPr>
+          <p:cNvPr id="2" name="Slide Image Placeholder 1"/>
+          <p:cNvSpPr>
+            <a:spLocks noGrp="1"/>
+          </p:cNvSpPr>
+          <p:nvPr>
+            <p:ph type="sldImg" idx="2"/>
+          </p:nvPr>
+        </p:nvSpPr>
+        <p:spPr/>
+      </p:sp>
+      <p:sp>
+        <p:nvSpPr>
+          <p:cNvPr id="3" name="Notes Placeholder 2"/>
+          <p:cNvSpPr>
+            <a:spLocks noGrp="1"/>
+          </p:cNvSpPr>
+          <p:nvPr>
+            <p:ph type="body" idx="3" sz="quarter"/>
+          </p:nvPr>
+        </p:nvSpPr>
+        <p:spPr/>
+        <p:txBody>
+          <a:bodyPr/>
+          <a:lstStyle/>
+          <a:p>
+            <a:r>
+              <a:t>강의 후 가장 많은 질문이 '이럴 때 뭘 쓰나요?'입니다. 이 슬라이드를 북마크해 두세요.</a:t>
+            </a:r>
+          </a:p>
+        </p:txBody>
+      </p:sp>
+      <p:sp>
+        <p:nvSpPr>
+          <p:cNvPr id="4" name="Slide Number Placeholder 3"/>
+          <p:cNvSpPr>
+            <a:spLocks noGrp="1"/>
+          </p:cNvSpPr>
+          <p:nvPr>
+            <p:ph type="sldNum" idx="5" sz="quarter"/>
+          </p:nvPr>
+        </p:nvSpPr>
+        <p:spPr/>
+      </p:sp>
+    </p:spTree>
+  </p:cSld>
+  <p:clrMapOvr>
+    <a:masterClrMapping/>
+  </p:clrMapOvr>
+</p:notes>
+</file>
+
+<file path=ppt/notesSlides/notesSlide18.xml><?xml version="1.0" encoding="utf-8"?>
+<p:notes xmlns:a="http://schemas.openxmlformats.org/drawingml/2006/main" xmlns:p="http://schemas.openxmlformats.org/presentationml/2006/main" xmlns:r="http://schemas.openxmlformats.org/officeDocument/2006/relationships">
+  <p:cSld>
+    <p:spTree>
+      <p:nvGrpSpPr>
+        <p:cNvPr id="1" name=""/>
+        <p:cNvGrpSpPr/>
+        <p:nvPr/>
+      </p:nvGrpSpPr>
+      <p:grpSpPr>
+        <a:xfrm>
+          <a:off x="0" y="0"/>
+          <a:ext cx="0" cy="0"/>
+          <a:chOff x="0" y="0"/>
+          <a:chExt cx="0" cy="0"/>
+        </a:xfrm>
+      </p:grpSpPr>
+      <p:sp>
+        <p:nvSpPr>
+          <p:cNvPr id="2" name="Slide Image Placeholder 1"/>
+          <p:cNvSpPr>
+            <a:spLocks noGrp="1"/>
+          </p:cNvSpPr>
+          <p:nvPr>
+            <p:ph type="sldImg" idx="2"/>
+          </p:nvPr>
+        </p:nvSpPr>
+        <p:spPr/>
+      </p:sp>
+      <p:sp>
+        <p:nvSpPr>
+          <p:cNvPr id="3" name="Notes Placeholder 2"/>
+          <p:cNvSpPr>
+            <a:spLocks noGrp="1"/>
+          </p:cNvSpPr>
+          <p:nvPr>
+            <p:ph type="body" idx="3" sz="quarter"/>
+          </p:nvPr>
+        </p:nvSpPr>
+        <p:spPr/>
+        <p:txBody>
+          <a:bodyPr/>
+          <a:lstStyle/>
+          <a:p>
+            <a:r>
+              <a:t>개인정보 보호, 사실 확인, 최종 판단 세 가지를 꼭 기억해 주세요. 실습 가이드 링크를 공유합니다. Q&amp;A</a:t>
             </a:r>
           </a:p>
         </p:txBody>
@@ -651,7 +1219,7 @@
           <a:lstStyle/>
           <a:p>
             <a:r>
-              <a:t>오늘 50분 동안 네 가지 도구를 다룹니다. 먼저 광주아이온에 접속하는 방법부터 시작하고, NotebookLM으로 학교 문서 기반 업무를, Gemini로 글쓰기·자료 제작을, 마지막에는 '이럴 때 뭘 쓰지?' 고민될 때 보는 상황별 가이드를 안내드리겠습니다.</a:t>
+              <a:t>50분 로드맵을 보시면서 오늘 흐름을 안내합니다. 아이온 → NotebookLM → 업무 활용 → Gemini → 마무리 순입니다.</a:t>
             </a:r>
           </a:p>
         </p:txBody>
@@ -721,7 +1289,7 @@
           <a:lstStyle/>
           <a:p>
             <a:r>
-              <a:t>실습 전에 세 가지만 기억해 주세요. 첫째, 광주아이온에 로그인합니다. 둘째, 오늘 드리는 가이드 페이지에서 [복사] 버튼을 누르면 예시 문장이 복사됩니다. 셋째, AI가 만든 결과는 반드시 선생님께서 확인하고 수정한 뒤 사용하세요. 지금부터 화면을 함께 보시면서 따라해 주시면 됩니다.</a:t>
+              <a:t>AI가 낯설어도 3단계만 기억하세요. 로그인 → 복사 → 확인·수정. 지금부터 함께 따라해 봅시다.</a:t>
             </a:r>
           </a:p>
         </p:txBody>
@@ -791,7 +1359,7 @@
           <a:lstStyle/>
           <a:p>
             <a:r>
-              <a:t>광주아이온은 선생님 아이디 하나로 모든 에듀테크가 연결되는 통합 플랫폼입니다. 지금 함께 aion.gen.go.kr에 접속해 보겠습니다. 로그인 후 메인 화면에서 Gemini와 NotebookLM 위젯을 찾아 클릭해 보세요. 우측 [나의 화면 구성하기]로 자주 쓰는 위젯을 앞에 배치할 수 있습니다.</a:t>
+              <a:t>aion.gen.go.kr에 함께 접속합니다. SSO로 한 번 로그인하면 Gemini, NotebookLM, 클래스룸이 연결됩니다.</a:t>
             </a:r>
           </a:p>
         </p:txBody>
@@ -861,7 +1429,7 @@
           <a:lstStyle/>
           <a:p>
             <a:r>
-              <a:t>NotebookLM은 선생님이 올린 문서만을 기반으로 답변합니다. 학교 규정 PDF, 학사일정, 학생 활동 보고서를 소스로 올리면 '현장체험학습 마감일이 언제야?', '이 학생 세특 초안 써줘'처럼 질문할 수 있습니다. 지금 가이드의 프롬프트 [복사] 버튼을 눌러 하나씩 실습해 보겠습니다.</a:t>
+              <a:t>학습 분석 대시보드로 학생들의 학습 패턴을 확인할 수 있습니다. 수행평가 설계 시 참고 자료로 활용하세요.</a:t>
             </a:r>
           </a:p>
         </p:txBody>
@@ -931,7 +1499,7 @@
           <a:lstStyle/>
           <a:p>
             <a:r>
-              <a:t>부서와 담임 업무별로 활용 예시를 준비했습니다. 교무기획부 선생님은 학사일정 표 정리, 담임 선생님은 학부모 안내문 초안에 활용하시면 좋습니다. 가이드 페이지에서 본인 업무에 가까운 프롬프트를 골라 [복사]한 뒤 Gemini나 NotebookLM에 붙여 넣어 보세요.</a:t>
+              <a:t>NotebookLM은 선생님이 올린 문서만 기반으로 답합니다. notebooklm.google.com에서 새 노트를 만들어 봅시다.</a:t>
             </a:r>
           </a:p>
         </p:txBody>
@@ -1001,7 +1569,7 @@
           <a:lstStyle/>
           <a:p>
             <a:r>
-              <a:t>Gemini는 새로운 글과 자료를 만드는 데 강합니다. @Google 지도로 수학여행 동선을, Forms Gemini로 설문을 자동 생성할 수 있습니다. 슬라이드는 Gemini로 내용을 구성한 뒤, 구글 슬라이드의 제미나이 패널에서 이미지와 슬라이드를 만드는 7단계 프로세스를 따르시면 됩니다. Forms는 최초 1회 영어 설정이 필요합니다.</a:t>
+              <a:t>학교 규정 PDF를 올리고 프롬프트를 복사해 질문해 보세요. 가이드 페이지 [복사] 버튼을 활용합니다.</a:t>
             </a:r>
           </a:p>
         </p:txBody>
@@ -1071,7 +1639,7 @@
           <a:lstStyle/>
           <a:p>
             <a:r>
-              <a:t>워크스페이스+ 기능을 조금 더 살펴보겠습니다. 스프레드시트에서 복잡한 함수 없이 자연어로 성적 데이터를 분석할 수 있고, 클래스룸에서 학생 과제에 대한 피드백 초안을 받을 수 있습니다. 방학에 수업을 설계하실 때 2022 개정 교육과정 프롬프트도 활용해 보세요.</a:t>
+              <a:t>세특 시즌에 학생별 노트를 만들어 두면 매우 유용합니다. 반드시 선생님 관찰을 더해 주세요.</a:t>
             </a:r>
           </a:p>
         </p:txBody>
@@ -1141,7 +1709,7 @@
           <a:lstStyle/>
           <a:p>
             <a:r>
-              <a:t>강의가 끝난 뒤 가장 많이 받는 질문이 '이럴 때 뭘 써야 하나요?'입니다. 간단히 말하면, 학교 문서를 기반으로 답이 필요하면 NotebookLM, 새로운 글이나 자료를 만들 때는 Gemini를 쓰시면 됩니다. 가이드 페이지 맨 아래 [상황별 활용]에 표로 정리해 두었으니 북마크해 두세요.</a:t>
+              <a:t>성취기준 PDF와 작년 평가계획을 소스로 올리면 새 학년도 초안을 빠르게 만들 수 있습니다.</a:t>
             </a:r>
           </a:p>
         </p:txBody>
@@ -4143,7 +4711,7 @@
     <p:bg>
       <p:bgPr>
         <a:solidFill>
-          <a:srgbClr val="1E40AF"/>
+          <a:srgbClr val="F0F9FF"/>
         </a:solidFill>
         <a:effectLst/>
       </p:bgPr>
@@ -4163,8 +4731,51 @@
         </p:nvSpPr>
         <p:spPr>
           <a:xfrm>
-            <a:off x="0" y="6217920"/>
-            <a:ext cx="12191695" cy="137160"/>
+            <a:off x="0" y="0"/>
+            <a:ext cx="12191695" cy="91440"/>
+          </a:xfrm>
+          <a:prstGeom prst="rect">
+            <a:avLst/>
+          </a:prstGeom>
+          <a:solidFill>
+            <a:srgbClr val="3B82F6"/>
+          </a:solidFill>
+          <a:ln>
+            <a:noFill/>
+          </a:ln>
+        </p:spPr>
+        <p:style>
+          <a:lnRef idx="1">
+            <a:schemeClr val="accent1"/>
+          </a:lnRef>
+          <a:fillRef idx="3">
+            <a:schemeClr val="accent1"/>
+          </a:fillRef>
+          <a:effectRef idx="2">
+            <a:schemeClr val="accent1"/>
+          </a:effectRef>
+          <a:fontRef idx="minor">
+            <a:schemeClr val="lt1"/>
+          </a:fontRef>
+        </p:style>
+        <p:txBody>
+          <a:bodyPr rtlCol="0" anchor="ctr"/>
+          <a:lstStyle/>
+          <a:p>
+            <a:pPr algn="ctr"/>
+          </a:p>
+        </p:txBody>
+      </p:sp>
+      <p:sp>
+        <p:nvSpPr>
+          <p:cNvPr id="3" name="Rectangle 2"/>
+          <p:cNvSpPr/>
+          <p:nvPr/>
+        </p:nvSpPr>
+        <p:spPr>
+          <a:xfrm>
+            <a:off x="0" y="6720840"/>
+            <a:ext cx="12191695" cy="73152"/>
           </a:xfrm>
           <a:prstGeom prst="rect">
             <a:avLst/>
@@ -4200,13 +4811,13 @@
       </p:sp>
       <p:sp>
         <p:nvSpPr>
-          <p:cNvPr id="3" name="TextBox 2"/>
+          <p:cNvPr id="4" name="TextBox 3"/>
           <p:cNvSpPr txBox="1"/>
           <p:nvPr/>
         </p:nvSpPr>
         <p:spPr>
           <a:xfrm>
-            <a:off x="731520" y="1645920"/>
+            <a:off x="731520" y="1828800"/>
             <a:ext cx="10515600" cy="1097280"/>
           </a:xfrm>
           <a:prstGeom prst="rect">
@@ -4221,9 +4832,9 @@
           <a:lstStyle/>
           <a:p>
             <a:pPr algn="ctr">
-              <a:defRPr sz="4000" b="1">
-                <a:solidFill>
-                  <a:srgbClr val="FFFFFF"/>
+              <a:defRPr sz="4800" b="1">
+                <a:solidFill>
+                  <a:srgbClr val="1E40AF"/>
                 </a:solidFill>
               </a:defRPr>
             </a:pPr>
@@ -4235,14 +4846,14 @@
       </p:sp>
       <p:sp>
         <p:nvSpPr>
-          <p:cNvPr id="4" name="TextBox 3"/>
+          <p:cNvPr id="5" name="TextBox 4"/>
           <p:cNvSpPr txBox="1"/>
           <p:nvPr/>
         </p:nvSpPr>
         <p:spPr>
           <a:xfrm>
-            <a:off x="731520" y="2926080"/>
-            <a:ext cx="10515600" cy="731520"/>
+            <a:off x="731520" y="3017520"/>
+            <a:ext cx="10515600" cy="640080"/>
           </a:xfrm>
           <a:prstGeom prst="rect">
             <a:avLst/>
@@ -4256,9 +4867,9 @@
           <a:lstStyle/>
           <a:p>
             <a:pPr algn="ctr">
-              <a:defRPr sz="2200" b="0">
-                <a:solidFill>
-                  <a:srgbClr val="BFDBFE"/>
+              <a:defRPr sz="2600" b="0">
+                <a:solidFill>
+                  <a:srgbClr val="334155"/>
                 </a:solidFill>
               </a:defRPr>
             </a:pPr>
@@ -4270,13 +4881,13 @@
       </p:sp>
       <p:sp>
         <p:nvSpPr>
-          <p:cNvPr id="5" name="TextBox 4"/>
+          <p:cNvPr id="6" name="TextBox 5"/>
           <p:cNvSpPr txBox="1"/>
           <p:nvPr/>
         </p:nvSpPr>
         <p:spPr>
           <a:xfrm>
-            <a:off x="1371600" y="4114800"/>
+            <a:off x="1371600" y="3931920"/>
             <a:ext cx="9144000" cy="1371600"/>
           </a:xfrm>
           <a:prstGeom prst="rect">
@@ -4292,11 +4903,11 @@
           <a:p>
             <a:pPr algn="ctr">
               <a:spcAft>
-                <a:spcPts val="1200"/>
+                <a:spcPts val="600"/>
               </a:spcAft>
-              <a:defRPr sz="1800" b="0">
-                <a:solidFill>
-                  <a:srgbClr val="E2E8F0"/>
+              <a:defRPr sz="2400" b="0">
+                <a:solidFill>
+                  <a:srgbClr val="334155"/>
                 </a:solidFill>
               </a:defRPr>
             </a:pPr>
@@ -4307,29 +4918,29 @@
           <a:p>
             <a:pPr>
               <a:spcAft>
-                <a:spcPts val="1200"/>
+                <a:spcPts val="600"/>
               </a:spcAft>
-              <a:defRPr sz="1800">
-                <a:solidFill>
-                  <a:srgbClr val="E2E8F0"/>
+              <a:defRPr sz="2400">
+                <a:solidFill>
+                  <a:srgbClr val="334155"/>
                 </a:solidFill>
               </a:defRPr>
             </a:pPr>
             <a:r>
-              <a:t>연수 시간: 50분  |  실습 중심</a:t>
-            </a:r>
-          </a:p>
-        </p:txBody>
-      </p:sp>
-      <p:sp>
-        <p:nvSpPr>
-          <p:cNvPr id="6" name="TextBox 5"/>
+              <a:t>연수 50분  |  실습 가이드 웹페이지 병행</a:t>
+            </a:r>
+          </a:p>
+        </p:txBody>
+      </p:sp>
+      <p:sp>
+        <p:nvSpPr>
+          <p:cNvPr id="7" name="TextBox 6"/>
           <p:cNvSpPr txBox="1"/>
           <p:nvPr/>
         </p:nvSpPr>
         <p:spPr>
           <a:xfrm>
-            <a:off x="11247120" y="6446520"/>
+            <a:off x="11155680" y="6446520"/>
             <a:ext cx="731520" cy="320040"/>
           </a:xfrm>
           <a:prstGeom prst="rect">
@@ -4344,7 +4955,7 @@
           <a:lstStyle/>
           <a:p>
             <a:pPr algn="r">
-              <a:defRPr sz="1100" b="0">
+              <a:defRPr sz="1400" b="0">
                 <a:solidFill>
                   <a:srgbClr val="64748B"/>
                 </a:solidFill>
@@ -4370,7 +4981,7 @@
     <p:bg>
       <p:bgPr>
         <a:solidFill>
-          <a:srgbClr val="0F172A"/>
+          <a:srgbClr val="F8FAFC"/>
         </a:solidFill>
         <a:effectLst/>
       </p:bgPr>
@@ -4390,8 +5001,121 @@
         </p:nvSpPr>
         <p:spPr>
           <a:xfrm>
-            <a:off x="0" y="0"/>
-            <a:ext cx="12191695" cy="109728"/>
+            <a:off x="548640" y="320040"/>
+            <a:ext cx="1280160" cy="384048"/>
+          </a:xfrm>
+          <a:prstGeom prst="rect">
+            <a:avLst/>
+          </a:prstGeom>
+          <a:solidFill>
+            <a:srgbClr val="DBEAFE"/>
+          </a:solidFill>
+          <a:ln>
+            <a:noFill/>
+          </a:ln>
+        </p:spPr>
+        <p:style>
+          <a:lnRef idx="1">
+            <a:schemeClr val="accent1"/>
+          </a:lnRef>
+          <a:fillRef idx="3">
+            <a:schemeClr val="accent1"/>
+          </a:fillRef>
+          <a:effectRef idx="2">
+            <a:schemeClr val="accent1"/>
+          </a:effectRef>
+          <a:fontRef idx="minor">
+            <a:schemeClr val="lt1"/>
+          </a:fontRef>
+        </p:style>
+        <p:txBody>
+          <a:bodyPr rtlCol="0" anchor="ctr"/>
+          <a:lstStyle/>
+          <a:p>
+            <a:pPr algn="ctr"/>
+          </a:p>
+        </p:txBody>
+      </p:sp>
+      <p:sp>
+        <p:nvSpPr>
+          <p:cNvPr id="3" name="TextBox 2"/>
+          <p:cNvSpPr txBox="1"/>
+          <p:nvPr/>
+        </p:nvSpPr>
+        <p:spPr>
+          <a:xfrm>
+            <a:off x="548640" y="292608"/>
+            <a:ext cx="1280160" cy="411480"/>
+          </a:xfrm>
+          <a:prstGeom prst="rect">
+            <a:avLst/>
+          </a:prstGeom>
+          <a:noFill/>
+        </p:spPr>
+        <p:txBody>
+          <a:bodyPr wrap="square">
+            <a:spAutoFit/>
+          </a:bodyPr>
+          <a:lstStyle/>
+          <a:p>
+            <a:pPr algn="ctr">
+              <a:defRPr sz="1600" b="1">
+                <a:solidFill>
+                  <a:srgbClr val="1E40AF"/>
+                </a:solidFill>
+              </a:defRPr>
+            </a:pPr>
+            <a:r>
+              <a:t>[20~32분]</a:t>
+            </a:r>
+          </a:p>
+        </p:txBody>
+      </p:sp>
+      <p:sp>
+        <p:nvSpPr>
+          <p:cNvPr id="4" name="TextBox 3"/>
+          <p:cNvSpPr txBox="1"/>
+          <p:nvPr/>
+        </p:nvSpPr>
+        <p:spPr>
+          <a:xfrm>
+            <a:off x="548640" y="777240"/>
+            <a:ext cx="10972800" cy="731520"/>
+          </a:xfrm>
+          <a:prstGeom prst="rect">
+            <a:avLst/>
+          </a:prstGeom>
+          <a:noFill/>
+        </p:spPr>
+        <p:txBody>
+          <a:bodyPr wrap="square">
+            <a:spAutoFit/>
+          </a:bodyPr>
+          <a:lstStyle/>
+          <a:p>
+            <a:pPr algn="l">
+              <a:defRPr sz="3400" b="1">
+                <a:solidFill>
+                  <a:srgbClr val="1E40AF"/>
+                </a:solidFill>
+              </a:defRPr>
+            </a:pPr>
+            <a:r>
+              <a:t>부서별 업무 맞춤형 AI 활용</a:t>
+            </a:r>
+          </a:p>
+        </p:txBody>
+      </p:sp>
+      <p:sp>
+        <p:nvSpPr>
+          <p:cNvPr id="5" name="Rectangle 4"/>
+          <p:cNvSpPr/>
+          <p:nvPr/>
+        </p:nvSpPr>
+        <p:spPr>
+          <a:xfrm>
+            <a:off x="548640" y="1508760"/>
+            <a:ext cx="2560320" cy="64008"/>
           </a:xfrm>
           <a:prstGeom prst="rect">
             <a:avLst/>
@@ -4427,14 +5151,59 @@
       </p:sp>
       <p:sp>
         <p:nvSpPr>
-          <p:cNvPr id="3" name="TextBox 2"/>
+          <p:cNvPr id="6" name="Rectangle 5"/>
+          <p:cNvSpPr/>
+          <p:nvPr/>
+        </p:nvSpPr>
+        <p:spPr>
+          <a:xfrm>
+            <a:off x="548640" y="1737360"/>
+            <a:ext cx="5486400" cy="4572000"/>
+          </a:xfrm>
+          <a:prstGeom prst="rect">
+            <a:avLst/>
+          </a:prstGeom>
+          <a:solidFill>
+            <a:srgbClr val="FFFFFF"/>
+          </a:solidFill>
+          <a:ln>
+            <a:solidFill>
+              <a:srgbClr val="DBEAFE"/>
+            </a:solidFill>
+          </a:ln>
+        </p:spPr>
+        <p:style>
+          <a:lnRef idx="1">
+            <a:schemeClr val="accent1"/>
+          </a:lnRef>
+          <a:fillRef idx="3">
+            <a:schemeClr val="accent1"/>
+          </a:fillRef>
+          <a:effectRef idx="2">
+            <a:schemeClr val="accent1"/>
+          </a:effectRef>
+          <a:fontRef idx="minor">
+            <a:schemeClr val="lt1"/>
+          </a:fontRef>
+        </p:style>
+        <p:txBody>
+          <a:bodyPr rtlCol="0" anchor="ctr"/>
+          <a:lstStyle/>
+          <a:p>
+            <a:pPr algn="ctr"/>
+          </a:p>
+        </p:txBody>
+      </p:sp>
+      <p:sp>
+        <p:nvSpPr>
+          <p:cNvPr id="7" name="TextBox 6"/>
           <p:cNvSpPr txBox="1"/>
           <p:nvPr/>
         </p:nvSpPr>
         <p:spPr>
           <a:xfrm>
-            <a:off x="731520" y="548640"/>
-            <a:ext cx="10515600" cy="914400"/>
+            <a:off x="731520" y="1874519"/>
+            <a:ext cx="5120640" cy="457200"/>
           </a:xfrm>
           <a:prstGeom prst="rect">
             <a:avLst/>
@@ -4448,28 +5217,132 @@
           <a:lstStyle/>
           <a:p>
             <a:pPr algn="l">
-              <a:defRPr sz="3200" b="1">
-                <a:solidFill>
-                  <a:srgbClr val="93C5FD"/>
+              <a:defRPr sz="2400" b="1">
+                <a:solidFill>
+                  <a:srgbClr val="1E40AF"/>
                 </a:solidFill>
               </a:defRPr>
             </a:pPr>
             <a:r>
-              <a:t>마무리 — AI는 선생님의 파트너</a:t>
-            </a:r>
-          </a:p>
-        </p:txBody>
-      </p:sp>
-      <p:sp>
-        <p:nvSpPr>
-          <p:cNvPr id="4" name="TextBox 3"/>
+              <a:t>📑 교무기획부</a:t>
+            </a:r>
+          </a:p>
+        </p:txBody>
+      </p:sp>
+      <p:sp>
+        <p:nvSpPr>
+          <p:cNvPr id="8" name="Rectangle 7"/>
+          <p:cNvSpPr/>
+          <p:nvPr/>
+        </p:nvSpPr>
+        <p:spPr>
+          <a:xfrm>
+            <a:off x="731520" y="2468880"/>
+            <a:ext cx="5120640" cy="3566160"/>
+          </a:xfrm>
+          <a:prstGeom prst="rect">
+            <a:avLst/>
+          </a:prstGeom>
+          <a:solidFill>
+            <a:srgbClr val="1E293B"/>
+          </a:solidFill>
+          <a:ln>
+            <a:solidFill>
+              <a:srgbClr val="64748B"/>
+            </a:solidFill>
+          </a:ln>
+        </p:spPr>
+        <p:style>
+          <a:lnRef idx="1">
+            <a:schemeClr val="accent1"/>
+          </a:lnRef>
+          <a:fillRef idx="3">
+            <a:schemeClr val="accent1"/>
+          </a:fillRef>
+          <a:effectRef idx="2">
+            <a:schemeClr val="accent1"/>
+          </a:effectRef>
+          <a:fontRef idx="minor">
+            <a:schemeClr val="lt1"/>
+          </a:fontRef>
+        </p:style>
+        <p:txBody>
+          <a:bodyPr rtlCol="0" anchor="ctr" wrap="square" lIns="152400" tIns="127000"/>
+          <a:lstStyle/>
+          <a:p>
+            <a:pPr algn="ctr">
+              <a:defRPr sz="1500">
+                <a:solidFill>
+                  <a:srgbClr val="FFFFFF"/>
+                </a:solidFill>
+                <a:latin typeface="Courier New"/>
+              </a:defRPr>
+            </a:pPr>
+            <a:r>
+              <a:t>- 2025학년도 1학기 학사일정 주요 행사를 월별 표로 정리해줘.</a:t>
+            </a:r>
+            <a:br/>
+            <a:r>
+              <a:t>- 최근 3년 교원평가 보고서를 바탕으로 올해 연수 계획 시사점 3가지 제안해줘.</a:t>
+            </a:r>
+          </a:p>
+        </p:txBody>
+      </p:sp>
+      <p:sp>
+        <p:nvSpPr>
+          <p:cNvPr id="9" name="Rectangle 8"/>
+          <p:cNvSpPr/>
+          <p:nvPr/>
+        </p:nvSpPr>
+        <p:spPr>
+          <a:xfrm>
+            <a:off x="6217920" y="1737360"/>
+            <a:ext cx="5486400" cy="4572000"/>
+          </a:xfrm>
+          <a:prstGeom prst="rect">
+            <a:avLst/>
+          </a:prstGeom>
+          <a:solidFill>
+            <a:srgbClr val="FFFFFF"/>
+          </a:solidFill>
+          <a:ln>
+            <a:solidFill>
+              <a:srgbClr val="F472B6"/>
+            </a:solidFill>
+          </a:ln>
+        </p:spPr>
+        <p:style>
+          <a:lnRef idx="1">
+            <a:schemeClr val="accent1"/>
+          </a:lnRef>
+          <a:fillRef idx="3">
+            <a:schemeClr val="accent1"/>
+          </a:fillRef>
+          <a:effectRef idx="2">
+            <a:schemeClr val="accent1"/>
+          </a:effectRef>
+          <a:fontRef idx="minor">
+            <a:schemeClr val="lt1"/>
+          </a:fontRef>
+        </p:style>
+        <p:txBody>
+          <a:bodyPr rtlCol="0" anchor="ctr"/>
+          <a:lstStyle/>
+          <a:p>
+            <a:pPr algn="ctr"/>
+          </a:p>
+        </p:txBody>
+      </p:sp>
+      <p:sp>
+        <p:nvSpPr>
+          <p:cNvPr id="10" name="TextBox 9"/>
           <p:cNvSpPr txBox="1"/>
           <p:nvPr/>
         </p:nvSpPr>
         <p:spPr>
           <a:xfrm>
-            <a:off x="822960" y="1645920"/>
-            <a:ext cx="10241280" cy="4389120"/>
+            <a:off x="6400800" y="1874519"/>
+            <a:ext cx="5120640" cy="457200"/>
           </a:xfrm>
           <a:prstGeom prst="rect">
             <a:avLst/>
@@ -4483,90 +5356,86 @@
           <a:lstStyle/>
           <a:p>
             <a:pPr algn="l">
-              <a:spcAft>
-                <a:spcPts val="1400"/>
-              </a:spcAft>
-              <a:defRPr sz="1700" b="0">
-                <a:solidFill>
-                  <a:srgbClr val="CBD5E1"/>
+              <a:defRPr sz="2400" b="1">
+                <a:solidFill>
+                  <a:srgbClr val="F472B6"/>
                 </a:solidFill>
               </a:defRPr>
             </a:pPr>
             <a:r>
-              <a:t>🔒 개인정보: 학생 실명·연락처 등 민감 정보는 AI에 입력 금지</a:t>
-            </a:r>
-          </a:p>
-          <a:p>
-            <a:pPr>
-              <a:spcAft>
-                <a:spcPts val="1400"/>
-              </a:spcAft>
-              <a:defRPr sz="1700">
-                <a:solidFill>
-                  <a:srgbClr val="CBD5E1"/>
-                </a:solidFill>
+              <a:t>🔬 교육연구부</a:t>
+            </a:r>
+          </a:p>
+        </p:txBody>
+      </p:sp>
+      <p:sp>
+        <p:nvSpPr>
+          <p:cNvPr id="11" name="Rectangle 10"/>
+          <p:cNvSpPr/>
+          <p:nvPr/>
+        </p:nvSpPr>
+        <p:spPr>
+          <a:xfrm>
+            <a:off x="6400800" y="2468880"/>
+            <a:ext cx="5120640" cy="3566160"/>
+          </a:xfrm>
+          <a:prstGeom prst="rect">
+            <a:avLst/>
+          </a:prstGeom>
+          <a:solidFill>
+            <a:srgbClr val="1E293B"/>
+          </a:solidFill>
+          <a:ln>
+            <a:solidFill>
+              <a:srgbClr val="64748B"/>
+            </a:solidFill>
+          </a:ln>
+        </p:spPr>
+        <p:style>
+          <a:lnRef idx="1">
+            <a:schemeClr val="accent1"/>
+          </a:lnRef>
+          <a:fillRef idx="3">
+            <a:schemeClr val="accent1"/>
+          </a:fillRef>
+          <a:effectRef idx="2">
+            <a:schemeClr val="accent1"/>
+          </a:effectRef>
+          <a:fontRef idx="minor">
+            <a:schemeClr val="lt1"/>
+          </a:fontRef>
+        </p:style>
+        <p:txBody>
+          <a:bodyPr rtlCol="0" anchor="ctr" wrap="square" lIns="152400" tIns="127000"/>
+          <a:lstStyle/>
+          <a:p>
+            <a:pPr algn="ctr">
+              <a:defRPr sz="1500">
+                <a:solidFill>
+                  <a:srgbClr val="FFFFFF"/>
+                </a:solidFill>
+                <a:latin typeface="Courier New"/>
               </a:defRPr>
             </a:pPr>
             <a:r>
-              <a:t>🔍 사실 확인: AI 생성 정보는 반드시 공신력 있는 자료로 재확인</a:t>
-            </a:r>
-          </a:p>
-          <a:p>
-            <a:pPr>
-              <a:spcAft>
-                <a:spcPts val="1400"/>
-              </a:spcAft>
-              <a:defRPr sz="1700">
-                <a:solidFill>
-                  <a:srgbClr val="CBD5E1"/>
-                </a:solidFill>
-              </a:defRPr>
-            </a:pPr>
-            <a:r>
-              <a:t>✅ 최종 판단: 모든 교육적 판단의 책임은 선생님에게 있습니다</a:t>
-            </a:r>
-          </a:p>
-          <a:p>
-            <a:pPr>
-              <a:spcAft>
-                <a:spcPts val="1400"/>
-              </a:spcAft>
-              <a:defRPr sz="1700">
-                <a:solidFill>
-                  <a:srgbClr val="CBD5E1"/>
-                </a:solidFill>
-              </a:defRPr>
-            </a:pPr>
-            <a:r>
-              <a:t>AI는 선생님을 대체하지 않고, 아이들과의 교감에 더 집중하도록 돕습니다</a:t>
-            </a:r>
-          </a:p>
-          <a:p>
-            <a:pPr>
-              <a:spcAft>
-                <a:spcPts val="1400"/>
-              </a:spcAft>
-              <a:defRPr sz="1700">
-                <a:solidFill>
-                  <a:srgbClr val="CBD5E1"/>
-                </a:solidFill>
-              </a:defRPr>
-            </a:pPr>
-            <a:r>
-              <a:t>실습 가이드 링크 공유  →  Q&amp;A</a:t>
-            </a:r>
-          </a:p>
-        </p:txBody>
-      </p:sp>
-      <p:sp>
-        <p:nvSpPr>
-          <p:cNvPr id="5" name="TextBox 4"/>
+              <a:t>- 국어과 1학년 수행평가 '현대시 비평문 쓰기' 루브릭을 만들어줘.</a:t>
+            </a:r>
+            <a:br/>
+            <a:r>
+              <a:t>- 학교평가 보고서 초안을 위해 성과와 개선점 중심 개요를 작성해줘.</a:t>
+            </a:r>
+          </a:p>
+        </p:txBody>
+      </p:sp>
+      <p:sp>
+        <p:nvSpPr>
+          <p:cNvPr id="12" name="TextBox 11"/>
           <p:cNvSpPr txBox="1"/>
           <p:nvPr/>
         </p:nvSpPr>
         <p:spPr>
           <a:xfrm>
-            <a:off x="11247120" y="6446520"/>
+            <a:off x="11155680" y="6446520"/>
             <a:ext cx="731520" cy="320040"/>
           </a:xfrm>
           <a:prstGeom prst="rect">
@@ -4581,7 +5450,7 @@
           <a:lstStyle/>
           <a:p>
             <a:pPr algn="r">
-              <a:defRPr sz="1100" b="0">
+              <a:defRPr sz="1400" b="0">
                 <a:solidFill>
                   <a:srgbClr val="64748B"/>
                 </a:solidFill>
@@ -4589,6 +5458,3357 @@
             </a:pPr>
             <a:r>
               <a:t>10</a:t>
+            </a:r>
+          </a:p>
+        </p:txBody>
+      </p:sp>
+    </p:spTree>
+  </p:cSld>
+  <p:clrMapOvr>
+    <a:masterClrMapping/>
+  </p:clrMapOvr>
+</p:sld>
+</file>
+
+<file path=ppt/slides/slide11.xml><?xml version="1.0" encoding="utf-8"?>
+<p:sld xmlns:a="http://schemas.openxmlformats.org/drawingml/2006/main" xmlns:p="http://schemas.openxmlformats.org/presentationml/2006/main" xmlns:r="http://schemas.openxmlformats.org/officeDocument/2006/relationships">
+  <p:cSld>
+    <p:bg>
+      <p:bgPr>
+        <a:solidFill>
+          <a:srgbClr val="F8FAFC"/>
+        </a:solidFill>
+        <a:effectLst/>
+      </p:bgPr>
+    </p:bg>
+    <p:spTree>
+      <p:nvGrpSpPr>
+        <p:cNvPr id="1" name=""/>
+        <p:cNvGrpSpPr/>
+        <p:nvPr/>
+      </p:nvGrpSpPr>
+      <p:grpSpPr/>
+      <p:sp>
+        <p:nvSpPr>
+          <p:cNvPr id="2" name="Rectangle 1"/>
+          <p:cNvSpPr/>
+          <p:nvPr/>
+        </p:nvSpPr>
+        <p:spPr>
+          <a:xfrm>
+            <a:off x="548640" y="320040"/>
+            <a:ext cx="1280160" cy="384048"/>
+          </a:xfrm>
+          <a:prstGeom prst="rect">
+            <a:avLst/>
+          </a:prstGeom>
+          <a:solidFill>
+            <a:srgbClr val="DBEAFE"/>
+          </a:solidFill>
+          <a:ln>
+            <a:noFill/>
+          </a:ln>
+        </p:spPr>
+        <p:style>
+          <a:lnRef idx="1">
+            <a:schemeClr val="accent1"/>
+          </a:lnRef>
+          <a:fillRef idx="3">
+            <a:schemeClr val="accent1"/>
+          </a:fillRef>
+          <a:effectRef idx="2">
+            <a:schemeClr val="accent1"/>
+          </a:effectRef>
+          <a:fontRef idx="minor">
+            <a:schemeClr val="lt1"/>
+          </a:fontRef>
+        </p:style>
+        <p:txBody>
+          <a:bodyPr rtlCol="0" anchor="ctr"/>
+          <a:lstStyle/>
+          <a:p>
+            <a:pPr algn="ctr"/>
+          </a:p>
+        </p:txBody>
+      </p:sp>
+      <p:sp>
+        <p:nvSpPr>
+          <p:cNvPr id="3" name="TextBox 2"/>
+          <p:cNvSpPr txBox="1"/>
+          <p:nvPr/>
+        </p:nvSpPr>
+        <p:spPr>
+          <a:xfrm>
+            <a:off x="548640" y="292608"/>
+            <a:ext cx="1280160" cy="411480"/>
+          </a:xfrm>
+          <a:prstGeom prst="rect">
+            <a:avLst/>
+          </a:prstGeom>
+          <a:noFill/>
+        </p:spPr>
+        <p:txBody>
+          <a:bodyPr wrap="square">
+            <a:spAutoFit/>
+          </a:bodyPr>
+          <a:lstStyle/>
+          <a:p>
+            <a:pPr algn="ctr">
+              <a:defRPr sz="1600" b="1">
+                <a:solidFill>
+                  <a:srgbClr val="1E40AF"/>
+                </a:solidFill>
+              </a:defRPr>
+            </a:pPr>
+            <a:r>
+              <a:t>[20~32분]</a:t>
+            </a:r>
+          </a:p>
+        </p:txBody>
+      </p:sp>
+      <p:sp>
+        <p:nvSpPr>
+          <p:cNvPr id="4" name="TextBox 3"/>
+          <p:cNvSpPr txBox="1"/>
+          <p:nvPr/>
+        </p:nvSpPr>
+        <p:spPr>
+          <a:xfrm>
+            <a:off x="548640" y="777240"/>
+            <a:ext cx="10972800" cy="731520"/>
+          </a:xfrm>
+          <a:prstGeom prst="rect">
+            <a:avLst/>
+          </a:prstGeom>
+          <a:noFill/>
+        </p:spPr>
+        <p:txBody>
+          <a:bodyPr wrap="square">
+            <a:spAutoFit/>
+          </a:bodyPr>
+          <a:lstStyle/>
+          <a:p>
+            <a:pPr algn="l">
+              <a:defRPr sz="3400" b="1">
+                <a:solidFill>
+                  <a:srgbClr val="1E40AF"/>
+                </a:solidFill>
+              </a:defRPr>
+            </a:pPr>
+            <a:r>
+              <a:t>담임선생님을 위한 AI 치트키</a:t>
+            </a:r>
+          </a:p>
+        </p:txBody>
+      </p:sp>
+      <p:sp>
+        <p:nvSpPr>
+          <p:cNvPr id="5" name="Rectangle 4"/>
+          <p:cNvSpPr/>
+          <p:nvPr/>
+        </p:nvSpPr>
+        <p:spPr>
+          <a:xfrm>
+            <a:off x="548640" y="1508760"/>
+            <a:ext cx="2560320" cy="64008"/>
+          </a:xfrm>
+          <a:prstGeom prst="rect">
+            <a:avLst/>
+          </a:prstGeom>
+          <a:solidFill>
+            <a:srgbClr val="F472B6"/>
+          </a:solidFill>
+          <a:ln>
+            <a:noFill/>
+          </a:ln>
+        </p:spPr>
+        <p:style>
+          <a:lnRef idx="1">
+            <a:schemeClr val="accent1"/>
+          </a:lnRef>
+          <a:fillRef idx="3">
+            <a:schemeClr val="accent1"/>
+          </a:fillRef>
+          <a:effectRef idx="2">
+            <a:schemeClr val="accent1"/>
+          </a:effectRef>
+          <a:fontRef idx="minor">
+            <a:schemeClr val="lt1"/>
+          </a:fontRef>
+        </p:style>
+        <p:txBody>
+          <a:bodyPr rtlCol="0" anchor="ctr"/>
+          <a:lstStyle/>
+          <a:p>
+            <a:pPr algn="ctr"/>
+          </a:p>
+        </p:txBody>
+      </p:sp>
+      <p:sp>
+        <p:nvSpPr>
+          <p:cNvPr id="6" name="Rectangle 5"/>
+          <p:cNvSpPr/>
+          <p:nvPr/>
+        </p:nvSpPr>
+        <p:spPr>
+          <a:xfrm>
+            <a:off x="548640" y="1737360"/>
+            <a:ext cx="5486400" cy="4572000"/>
+          </a:xfrm>
+          <a:prstGeom prst="rect">
+            <a:avLst/>
+          </a:prstGeom>
+          <a:solidFill>
+            <a:srgbClr val="FFFFFF"/>
+          </a:solidFill>
+          <a:ln>
+            <a:solidFill>
+              <a:srgbClr val="DBEAFE"/>
+            </a:solidFill>
+          </a:ln>
+        </p:spPr>
+        <p:style>
+          <a:lnRef idx="1">
+            <a:schemeClr val="accent1"/>
+          </a:lnRef>
+          <a:fillRef idx="3">
+            <a:schemeClr val="accent1"/>
+          </a:fillRef>
+          <a:effectRef idx="2">
+            <a:schemeClr val="accent1"/>
+          </a:effectRef>
+          <a:fontRef idx="minor">
+            <a:schemeClr val="lt1"/>
+          </a:fontRef>
+        </p:style>
+        <p:txBody>
+          <a:bodyPr rtlCol="0" anchor="ctr"/>
+          <a:lstStyle/>
+          <a:p>
+            <a:pPr algn="ctr"/>
+          </a:p>
+        </p:txBody>
+      </p:sp>
+      <p:sp>
+        <p:nvSpPr>
+          <p:cNvPr id="7" name="TextBox 6"/>
+          <p:cNvSpPr txBox="1"/>
+          <p:nvPr/>
+        </p:nvSpPr>
+        <p:spPr>
+          <a:xfrm>
+            <a:off x="731520" y="1874519"/>
+            <a:ext cx="5120640" cy="457200"/>
+          </a:xfrm>
+          <a:prstGeom prst="rect">
+            <a:avLst/>
+          </a:prstGeom>
+          <a:noFill/>
+        </p:spPr>
+        <p:txBody>
+          <a:bodyPr wrap="square">
+            <a:spAutoFit/>
+          </a:bodyPr>
+          <a:lstStyle/>
+          <a:p>
+            <a:pPr algn="l">
+              <a:defRPr sz="2400" b="1">
+                <a:solidFill>
+                  <a:srgbClr val="1E40AF"/>
+                </a:solidFill>
+              </a:defRPr>
+            </a:pPr>
+            <a:r>
+              <a:t>💌 학부모 소통</a:t>
+            </a:r>
+          </a:p>
+        </p:txBody>
+      </p:sp>
+      <p:sp>
+        <p:nvSpPr>
+          <p:cNvPr id="8" name="Rectangle 7"/>
+          <p:cNvSpPr/>
+          <p:nvPr/>
+        </p:nvSpPr>
+        <p:spPr>
+          <a:xfrm>
+            <a:off x="731520" y="2468880"/>
+            <a:ext cx="5120640" cy="3566160"/>
+          </a:xfrm>
+          <a:prstGeom prst="rect">
+            <a:avLst/>
+          </a:prstGeom>
+          <a:solidFill>
+            <a:srgbClr val="1E293B"/>
+          </a:solidFill>
+          <a:ln>
+            <a:solidFill>
+              <a:srgbClr val="64748B"/>
+            </a:solidFill>
+          </a:ln>
+        </p:spPr>
+        <p:style>
+          <a:lnRef idx="1">
+            <a:schemeClr val="accent1"/>
+          </a:lnRef>
+          <a:fillRef idx="3">
+            <a:schemeClr val="accent1"/>
+          </a:fillRef>
+          <a:effectRef idx="2">
+            <a:schemeClr val="accent1"/>
+          </a:effectRef>
+          <a:fontRef idx="minor">
+            <a:schemeClr val="lt1"/>
+          </a:fontRef>
+        </p:style>
+        <p:txBody>
+          <a:bodyPr rtlCol="0" anchor="ctr" wrap="square" lIns="152400" tIns="127000"/>
+          <a:lstStyle/>
+          <a:p>
+            <a:pPr algn="ctr">
+              <a:defRPr sz="1500">
+                <a:solidFill>
+                  <a:srgbClr val="FFFFFF"/>
+                </a:solidFill>
+                <a:latin typeface="Courier New"/>
+              </a:defRPr>
+            </a:pPr>
+            <a:r>
+              <a:t>- 2학기 학부모 상담주간 안내 가정통신문 초안을 친근한 톤으로 작성해줘.</a:t>
+            </a:r>
+            <a:br/>
+            <a:r>
+              <a:t>- 김민준 학생 상담일지를 바탕으로 논의할 점 3가지를 요약해줘.</a:t>
+            </a:r>
+          </a:p>
+        </p:txBody>
+      </p:sp>
+      <p:sp>
+        <p:nvSpPr>
+          <p:cNvPr id="9" name="Rectangle 8"/>
+          <p:cNvSpPr/>
+          <p:nvPr/>
+        </p:nvSpPr>
+        <p:spPr>
+          <a:xfrm>
+            <a:off x="6217920" y="1737360"/>
+            <a:ext cx="5486400" cy="4572000"/>
+          </a:xfrm>
+          <a:prstGeom prst="rect">
+            <a:avLst/>
+          </a:prstGeom>
+          <a:solidFill>
+            <a:srgbClr val="FFFFFF"/>
+          </a:solidFill>
+          <a:ln>
+            <a:solidFill>
+              <a:srgbClr val="F472B6"/>
+            </a:solidFill>
+          </a:ln>
+        </p:spPr>
+        <p:style>
+          <a:lnRef idx="1">
+            <a:schemeClr val="accent1"/>
+          </a:lnRef>
+          <a:fillRef idx="3">
+            <a:schemeClr val="accent1"/>
+          </a:fillRef>
+          <a:effectRef idx="2">
+            <a:schemeClr val="accent1"/>
+          </a:effectRef>
+          <a:fontRef idx="minor">
+            <a:schemeClr val="lt1"/>
+          </a:fontRef>
+        </p:style>
+        <p:txBody>
+          <a:bodyPr rtlCol="0" anchor="ctr"/>
+          <a:lstStyle/>
+          <a:p>
+            <a:pPr algn="ctr"/>
+          </a:p>
+        </p:txBody>
+      </p:sp>
+      <p:sp>
+        <p:nvSpPr>
+          <p:cNvPr id="10" name="TextBox 9"/>
+          <p:cNvSpPr txBox="1"/>
+          <p:nvPr/>
+        </p:nvSpPr>
+        <p:spPr>
+          <a:xfrm>
+            <a:off x="6400800" y="1874519"/>
+            <a:ext cx="5120640" cy="457200"/>
+          </a:xfrm>
+          <a:prstGeom prst="rect">
+            <a:avLst/>
+          </a:prstGeom>
+          <a:noFill/>
+        </p:spPr>
+        <p:txBody>
+          <a:bodyPr wrap="square">
+            <a:spAutoFit/>
+          </a:bodyPr>
+          <a:lstStyle/>
+          <a:p>
+            <a:pPr algn="l">
+              <a:defRPr sz="2400" b="1">
+                <a:solidFill>
+                  <a:srgbClr val="F472B6"/>
+                </a:solidFill>
+              </a:defRPr>
+            </a:pPr>
+            <a:r>
+              <a:t>🎨 학급 특색 활동</a:t>
+            </a:r>
+          </a:p>
+        </p:txBody>
+      </p:sp>
+      <p:sp>
+        <p:nvSpPr>
+          <p:cNvPr id="11" name="Rectangle 10"/>
+          <p:cNvSpPr/>
+          <p:nvPr/>
+        </p:nvSpPr>
+        <p:spPr>
+          <a:xfrm>
+            <a:off x="6400800" y="2468880"/>
+            <a:ext cx="5120640" cy="3566160"/>
+          </a:xfrm>
+          <a:prstGeom prst="rect">
+            <a:avLst/>
+          </a:prstGeom>
+          <a:solidFill>
+            <a:srgbClr val="1E293B"/>
+          </a:solidFill>
+          <a:ln>
+            <a:solidFill>
+              <a:srgbClr val="64748B"/>
+            </a:solidFill>
+          </a:ln>
+        </p:spPr>
+        <p:style>
+          <a:lnRef idx="1">
+            <a:schemeClr val="accent1"/>
+          </a:lnRef>
+          <a:fillRef idx="3">
+            <a:schemeClr val="accent1"/>
+          </a:fillRef>
+          <a:effectRef idx="2">
+            <a:schemeClr val="accent1"/>
+          </a:effectRef>
+          <a:fontRef idx="minor">
+            <a:schemeClr val="lt1"/>
+          </a:fontRef>
+        </p:style>
+        <p:txBody>
+          <a:bodyPr rtlCol="0" anchor="ctr" wrap="square" lIns="152400" tIns="127000"/>
+          <a:lstStyle/>
+          <a:p>
+            <a:pPr algn="ctr">
+              <a:defRPr sz="1500">
+                <a:solidFill>
+                  <a:srgbClr val="FFFFFF"/>
+                </a:solidFill>
+                <a:latin typeface="Courier New"/>
+              </a:defRPr>
+            </a:pPr>
+            <a:r>
+              <a:t>- 우리 반 협동심을 높일 장기 프로젝트 아이디어 5가지를 제안해줘.</a:t>
+            </a:r>
+            <a:br/>
+            <a:r>
+              <a:t>- 작년 우수사례집을 바탕으로 우리 반 맞춤 활동 3가지를 추천해줘.</a:t>
+            </a:r>
+          </a:p>
+        </p:txBody>
+      </p:sp>
+      <p:sp>
+        <p:nvSpPr>
+          <p:cNvPr id="12" name="TextBox 11"/>
+          <p:cNvSpPr txBox="1"/>
+          <p:nvPr/>
+        </p:nvSpPr>
+        <p:spPr>
+          <a:xfrm>
+            <a:off x="11155680" y="6446520"/>
+            <a:ext cx="731520" cy="320040"/>
+          </a:xfrm>
+          <a:prstGeom prst="rect">
+            <a:avLst/>
+          </a:prstGeom>
+          <a:noFill/>
+        </p:spPr>
+        <p:txBody>
+          <a:bodyPr wrap="square">
+            <a:spAutoFit/>
+          </a:bodyPr>
+          <a:lstStyle/>
+          <a:p>
+            <a:pPr algn="r">
+              <a:defRPr sz="1400" b="0">
+                <a:solidFill>
+                  <a:srgbClr val="64748B"/>
+                </a:solidFill>
+              </a:defRPr>
+            </a:pPr>
+            <a:r>
+              <a:t>11</a:t>
+            </a:r>
+          </a:p>
+        </p:txBody>
+      </p:sp>
+    </p:spTree>
+  </p:cSld>
+  <p:clrMapOvr>
+    <a:masterClrMapping/>
+  </p:clrMapOvr>
+</p:sld>
+</file>
+
+<file path=ppt/slides/slide12.xml><?xml version="1.0" encoding="utf-8"?>
+<p:sld xmlns:a="http://schemas.openxmlformats.org/drawingml/2006/main" xmlns:p="http://schemas.openxmlformats.org/presentationml/2006/main" xmlns:r="http://schemas.openxmlformats.org/officeDocument/2006/relationships">
+  <p:cSld>
+    <p:bg>
+      <p:bgPr>
+        <a:solidFill>
+          <a:srgbClr val="FFFFFF"/>
+        </a:solidFill>
+        <a:effectLst/>
+      </p:bgPr>
+    </p:bg>
+    <p:spTree>
+      <p:nvGrpSpPr>
+        <p:cNvPr id="1" name=""/>
+        <p:cNvGrpSpPr/>
+        <p:nvPr/>
+      </p:nvGrpSpPr>
+      <p:grpSpPr/>
+      <p:sp>
+        <p:nvSpPr>
+          <p:cNvPr id="2" name="Rectangle 1"/>
+          <p:cNvSpPr/>
+          <p:nvPr/>
+        </p:nvSpPr>
+        <p:spPr>
+          <a:xfrm>
+            <a:off x="548640" y="320040"/>
+            <a:ext cx="1280160" cy="384048"/>
+          </a:xfrm>
+          <a:prstGeom prst="rect">
+            <a:avLst/>
+          </a:prstGeom>
+          <a:solidFill>
+            <a:srgbClr val="DBEAFE"/>
+          </a:solidFill>
+          <a:ln>
+            <a:noFill/>
+          </a:ln>
+        </p:spPr>
+        <p:style>
+          <a:lnRef idx="1">
+            <a:schemeClr val="accent1"/>
+          </a:lnRef>
+          <a:fillRef idx="3">
+            <a:schemeClr val="accent1"/>
+          </a:fillRef>
+          <a:effectRef idx="2">
+            <a:schemeClr val="accent1"/>
+          </a:effectRef>
+          <a:fontRef idx="minor">
+            <a:schemeClr val="lt1"/>
+          </a:fontRef>
+        </p:style>
+        <p:txBody>
+          <a:bodyPr rtlCol="0" anchor="ctr"/>
+          <a:lstStyle/>
+          <a:p>
+            <a:pPr algn="ctr"/>
+          </a:p>
+        </p:txBody>
+      </p:sp>
+      <p:sp>
+        <p:nvSpPr>
+          <p:cNvPr id="3" name="TextBox 2"/>
+          <p:cNvSpPr txBox="1"/>
+          <p:nvPr/>
+        </p:nvSpPr>
+        <p:spPr>
+          <a:xfrm>
+            <a:off x="548640" y="292608"/>
+            <a:ext cx="1280160" cy="411480"/>
+          </a:xfrm>
+          <a:prstGeom prst="rect">
+            <a:avLst/>
+          </a:prstGeom>
+          <a:noFill/>
+        </p:spPr>
+        <p:txBody>
+          <a:bodyPr wrap="square">
+            <a:spAutoFit/>
+          </a:bodyPr>
+          <a:lstStyle/>
+          <a:p>
+            <a:pPr algn="ctr">
+              <a:defRPr sz="1600" b="1">
+                <a:solidFill>
+                  <a:srgbClr val="1E40AF"/>
+                </a:solidFill>
+              </a:defRPr>
+            </a:pPr>
+            <a:r>
+              <a:t>[32~45분]</a:t>
+            </a:r>
+          </a:p>
+        </p:txBody>
+      </p:sp>
+      <p:sp>
+        <p:nvSpPr>
+          <p:cNvPr id="4" name="TextBox 3"/>
+          <p:cNvSpPr txBox="1"/>
+          <p:nvPr/>
+        </p:nvSpPr>
+        <p:spPr>
+          <a:xfrm>
+            <a:off x="548640" y="777240"/>
+            <a:ext cx="10972800" cy="731520"/>
+          </a:xfrm>
+          <a:prstGeom prst="rect">
+            <a:avLst/>
+          </a:prstGeom>
+          <a:noFill/>
+        </p:spPr>
+        <p:txBody>
+          <a:bodyPr wrap="square">
+            <a:spAutoFit/>
+          </a:bodyPr>
+          <a:lstStyle/>
+          <a:p>
+            <a:pPr algn="l">
+              <a:defRPr sz="3400" b="1">
+                <a:solidFill>
+                  <a:srgbClr val="1E40AF"/>
+                </a:solidFill>
+              </a:defRPr>
+            </a:pPr>
+            <a:r>
+              <a:t>Gemini — @기능 &amp; Gems</a:t>
+            </a:r>
+          </a:p>
+        </p:txBody>
+      </p:sp>
+      <p:sp>
+        <p:nvSpPr>
+          <p:cNvPr id="5" name="Rectangle 4"/>
+          <p:cNvSpPr/>
+          <p:nvPr/>
+        </p:nvSpPr>
+        <p:spPr>
+          <a:xfrm>
+            <a:off x="548640" y="1508760"/>
+            <a:ext cx="2560320" cy="64008"/>
+          </a:xfrm>
+          <a:prstGeom prst="rect">
+            <a:avLst/>
+          </a:prstGeom>
+          <a:solidFill>
+            <a:srgbClr val="F472B6"/>
+          </a:solidFill>
+          <a:ln>
+            <a:noFill/>
+          </a:ln>
+        </p:spPr>
+        <p:style>
+          <a:lnRef idx="1">
+            <a:schemeClr val="accent1"/>
+          </a:lnRef>
+          <a:fillRef idx="3">
+            <a:schemeClr val="accent1"/>
+          </a:fillRef>
+          <a:effectRef idx="2">
+            <a:schemeClr val="accent1"/>
+          </a:effectRef>
+          <a:fontRef idx="minor">
+            <a:schemeClr val="lt1"/>
+          </a:fontRef>
+        </p:style>
+        <p:txBody>
+          <a:bodyPr rtlCol="0" anchor="ctr"/>
+          <a:lstStyle/>
+          <a:p>
+            <a:pPr algn="ctr"/>
+          </a:p>
+        </p:txBody>
+      </p:sp>
+      <p:sp>
+        <p:nvSpPr>
+          <p:cNvPr id="6" name="TextBox 5"/>
+          <p:cNvSpPr txBox="1"/>
+          <p:nvPr/>
+        </p:nvSpPr>
+        <p:spPr>
+          <a:xfrm>
+            <a:off x="731520" y="1737360"/>
+            <a:ext cx="10515600" cy="1097280"/>
+          </a:xfrm>
+          <a:prstGeom prst="rect">
+            <a:avLst/>
+          </a:prstGeom>
+          <a:noFill/>
+        </p:spPr>
+        <p:txBody>
+          <a:bodyPr wrap="square">
+            <a:spAutoFit/>
+          </a:bodyPr>
+          <a:lstStyle/>
+          <a:p>
+            <a:pPr algn="l">
+              <a:spcAft>
+                <a:spcPts val="600"/>
+              </a:spcAft>
+              <a:defRPr sz="2200" b="0">
+                <a:solidFill>
+                  <a:srgbClr val="334155"/>
+                </a:solidFill>
+              </a:defRPr>
+            </a:pPr>
+            <a:r>
+              <a:t>@기능: Gemini 채팅에서 @Google 지도 · @Drive · @YouTube 연동</a:t>
+            </a:r>
+          </a:p>
+          <a:p>
+            <a:pPr>
+              <a:spcAft>
+                <a:spcPts val="600"/>
+              </a:spcAft>
+              <a:defRPr sz="2200">
+                <a:solidFill>
+                  <a:srgbClr val="334155"/>
+                </a:solidFill>
+              </a:defRPr>
+            </a:pPr>
+            <a:r>
+              <a:t>Gems: 자주 쓰는 AI 역할 저장 — 프롬프트 생성기, 양식 생성기</a:t>
+            </a:r>
+          </a:p>
+        </p:txBody>
+      </p:sp>
+      <p:sp>
+        <p:nvSpPr>
+          <p:cNvPr id="7" name="Rectangle 6"/>
+          <p:cNvSpPr/>
+          <p:nvPr/>
+        </p:nvSpPr>
+        <p:spPr>
+          <a:xfrm>
+            <a:off x="548640" y="3657600"/>
+            <a:ext cx="10972800" cy="1828800"/>
+          </a:xfrm>
+          <a:prstGeom prst="rect">
+            <a:avLst/>
+          </a:prstGeom>
+          <a:solidFill>
+            <a:srgbClr val="1E293B"/>
+          </a:solidFill>
+          <a:ln>
+            <a:solidFill>
+              <a:srgbClr val="64748B"/>
+            </a:solidFill>
+          </a:ln>
+        </p:spPr>
+        <p:style>
+          <a:lnRef idx="1">
+            <a:schemeClr val="accent1"/>
+          </a:lnRef>
+          <a:fillRef idx="3">
+            <a:schemeClr val="accent1"/>
+          </a:fillRef>
+          <a:effectRef idx="2">
+            <a:schemeClr val="accent1"/>
+          </a:effectRef>
+          <a:fontRef idx="minor">
+            <a:schemeClr val="lt1"/>
+          </a:fontRef>
+        </p:style>
+        <p:txBody>
+          <a:bodyPr rtlCol="0" anchor="ctr" wrap="square" lIns="152400" tIns="127000"/>
+          <a:lstStyle/>
+          <a:p>
+            <a:pPr algn="ctr">
+              <a:defRPr sz="1600">
+                <a:solidFill>
+                  <a:srgbClr val="FFFFFF"/>
+                </a:solidFill>
+                <a:latin typeface="Courier New"/>
+              </a:defRPr>
+            </a:pPr>
+            <a:r>
+              <a:t>🗺️ @Google 지도 경주 2박3일 수학여행 유적지 중심 동선을 짜줘.</a:t>
+            </a:r>
+            <a:br/>
+            <a:r>
+              <a:t>📂 @Google Drive '2025 평가계획.pdf'를 요약해줘.</a:t>
+            </a:r>
+            <a:br/>
+            <a:r>
+              <a:t>▶️ @YouTube 셰익스피어 '햄릿' 중학생용 영상을 찾아줘.</a:t>
+            </a:r>
+          </a:p>
+        </p:txBody>
+      </p:sp>
+      <p:sp>
+        <p:nvSpPr>
+          <p:cNvPr id="8" name="TextBox 7"/>
+          <p:cNvSpPr txBox="1"/>
+          <p:nvPr/>
+        </p:nvSpPr>
+        <p:spPr>
+          <a:xfrm>
+            <a:off x="11155680" y="6446520"/>
+            <a:ext cx="731520" cy="320040"/>
+          </a:xfrm>
+          <a:prstGeom prst="rect">
+            <a:avLst/>
+          </a:prstGeom>
+          <a:noFill/>
+        </p:spPr>
+        <p:txBody>
+          <a:bodyPr wrap="square">
+            <a:spAutoFit/>
+          </a:bodyPr>
+          <a:lstStyle/>
+          <a:p>
+            <a:pPr algn="r">
+              <a:defRPr sz="1400" b="0">
+                <a:solidFill>
+                  <a:srgbClr val="64748B"/>
+                </a:solidFill>
+              </a:defRPr>
+            </a:pPr>
+            <a:r>
+              <a:t>12</a:t>
+            </a:r>
+          </a:p>
+        </p:txBody>
+      </p:sp>
+    </p:spTree>
+  </p:cSld>
+  <p:clrMapOvr>
+    <a:masterClrMapping/>
+  </p:clrMapOvr>
+</p:sld>
+</file>
+
+<file path=ppt/slides/slide13.xml><?xml version="1.0" encoding="utf-8"?>
+<p:sld xmlns:a="http://schemas.openxmlformats.org/drawingml/2006/main" xmlns:p="http://schemas.openxmlformats.org/presentationml/2006/main" xmlns:r="http://schemas.openxmlformats.org/officeDocument/2006/relationships">
+  <p:cSld>
+    <p:bg>
+      <p:bgPr>
+        <a:solidFill>
+          <a:srgbClr val="FFFFFF"/>
+        </a:solidFill>
+        <a:effectLst/>
+      </p:bgPr>
+    </p:bg>
+    <p:spTree>
+      <p:nvGrpSpPr>
+        <p:cNvPr id="1" name=""/>
+        <p:cNvGrpSpPr/>
+        <p:nvPr/>
+      </p:nvGrpSpPr>
+      <p:grpSpPr/>
+      <p:sp>
+        <p:nvSpPr>
+          <p:cNvPr id="2" name="Rectangle 1"/>
+          <p:cNvSpPr/>
+          <p:nvPr/>
+        </p:nvSpPr>
+        <p:spPr>
+          <a:xfrm>
+            <a:off x="548640" y="320040"/>
+            <a:ext cx="1280160" cy="384048"/>
+          </a:xfrm>
+          <a:prstGeom prst="rect">
+            <a:avLst/>
+          </a:prstGeom>
+          <a:solidFill>
+            <a:srgbClr val="DBEAFE"/>
+          </a:solidFill>
+          <a:ln>
+            <a:noFill/>
+          </a:ln>
+        </p:spPr>
+        <p:style>
+          <a:lnRef idx="1">
+            <a:schemeClr val="accent1"/>
+          </a:lnRef>
+          <a:fillRef idx="3">
+            <a:schemeClr val="accent1"/>
+          </a:fillRef>
+          <a:effectRef idx="2">
+            <a:schemeClr val="accent1"/>
+          </a:effectRef>
+          <a:fontRef idx="minor">
+            <a:schemeClr val="lt1"/>
+          </a:fontRef>
+        </p:style>
+        <p:txBody>
+          <a:bodyPr rtlCol="0" anchor="ctr"/>
+          <a:lstStyle/>
+          <a:p>
+            <a:pPr algn="ctr"/>
+          </a:p>
+        </p:txBody>
+      </p:sp>
+      <p:sp>
+        <p:nvSpPr>
+          <p:cNvPr id="3" name="TextBox 2"/>
+          <p:cNvSpPr txBox="1"/>
+          <p:nvPr/>
+        </p:nvSpPr>
+        <p:spPr>
+          <a:xfrm>
+            <a:off x="548640" y="292608"/>
+            <a:ext cx="1280160" cy="411480"/>
+          </a:xfrm>
+          <a:prstGeom prst="rect">
+            <a:avLst/>
+          </a:prstGeom>
+          <a:noFill/>
+        </p:spPr>
+        <p:txBody>
+          <a:bodyPr wrap="square">
+            <a:spAutoFit/>
+          </a:bodyPr>
+          <a:lstStyle/>
+          <a:p>
+            <a:pPr algn="ctr">
+              <a:defRPr sz="1600" b="1">
+                <a:solidFill>
+                  <a:srgbClr val="1E40AF"/>
+                </a:solidFill>
+              </a:defRPr>
+            </a:pPr>
+            <a:r>
+              <a:t>[32~45분]</a:t>
+            </a:r>
+          </a:p>
+        </p:txBody>
+      </p:sp>
+      <p:sp>
+        <p:nvSpPr>
+          <p:cNvPr id="4" name="TextBox 3"/>
+          <p:cNvSpPr txBox="1"/>
+          <p:nvPr/>
+        </p:nvSpPr>
+        <p:spPr>
+          <a:xfrm>
+            <a:off x="548640" y="777240"/>
+            <a:ext cx="10972800" cy="731520"/>
+          </a:xfrm>
+          <a:prstGeom prst="rect">
+            <a:avLst/>
+          </a:prstGeom>
+          <a:noFill/>
+        </p:spPr>
+        <p:txBody>
+          <a:bodyPr wrap="square">
+            <a:spAutoFit/>
+          </a:bodyPr>
+          <a:lstStyle/>
+          <a:p>
+            <a:pPr algn="l">
+              <a:defRPr sz="3400" b="1">
+                <a:solidFill>
+                  <a:srgbClr val="1E40AF"/>
+                </a:solidFill>
+              </a:defRPr>
+            </a:pPr>
+            <a:r>
+              <a:t>Gemini — Google Forms 설문 자동화</a:t>
+            </a:r>
+          </a:p>
+        </p:txBody>
+      </p:sp>
+      <p:sp>
+        <p:nvSpPr>
+          <p:cNvPr id="5" name="Rectangle 4"/>
+          <p:cNvSpPr/>
+          <p:nvPr/>
+        </p:nvSpPr>
+        <p:spPr>
+          <a:xfrm>
+            <a:off x="548640" y="1508760"/>
+            <a:ext cx="2560320" cy="64008"/>
+          </a:xfrm>
+          <a:prstGeom prst="rect">
+            <a:avLst/>
+          </a:prstGeom>
+          <a:solidFill>
+            <a:srgbClr val="F472B6"/>
+          </a:solidFill>
+          <a:ln>
+            <a:noFill/>
+          </a:ln>
+        </p:spPr>
+        <p:style>
+          <a:lnRef idx="1">
+            <a:schemeClr val="accent1"/>
+          </a:lnRef>
+          <a:fillRef idx="3">
+            <a:schemeClr val="accent1"/>
+          </a:fillRef>
+          <a:effectRef idx="2">
+            <a:schemeClr val="accent1"/>
+          </a:effectRef>
+          <a:fontRef idx="minor">
+            <a:schemeClr val="lt1"/>
+          </a:fontRef>
+        </p:style>
+        <p:txBody>
+          <a:bodyPr rtlCol="0" anchor="ctr"/>
+          <a:lstStyle/>
+          <a:p>
+            <a:pPr algn="ctr"/>
+          </a:p>
+        </p:txBody>
+      </p:sp>
+      <p:sp>
+        <p:nvSpPr>
+          <p:cNvPr id="6" name="Rectangle 5"/>
+          <p:cNvSpPr/>
+          <p:nvPr/>
+        </p:nvSpPr>
+        <p:spPr>
+          <a:xfrm>
+            <a:off x="548640" y="1737360"/>
+            <a:ext cx="3474720" cy="822960"/>
+          </a:xfrm>
+          <a:prstGeom prst="rect">
+            <a:avLst/>
+          </a:prstGeom>
+          <a:solidFill>
+            <a:srgbClr val="DBEAFE"/>
+          </a:solidFill>
+          <a:ln>
+            <a:noFill/>
+          </a:ln>
+        </p:spPr>
+        <p:style>
+          <a:lnRef idx="1">
+            <a:schemeClr val="accent1"/>
+          </a:lnRef>
+          <a:fillRef idx="3">
+            <a:schemeClr val="accent1"/>
+          </a:fillRef>
+          <a:effectRef idx="2">
+            <a:schemeClr val="accent1"/>
+          </a:effectRef>
+          <a:fontRef idx="minor">
+            <a:schemeClr val="lt1"/>
+          </a:fontRef>
+        </p:style>
+        <p:txBody>
+          <a:bodyPr rtlCol="0" anchor="ctr"/>
+          <a:lstStyle/>
+          <a:p>
+            <a:pPr algn="ctr"/>
+          </a:p>
+        </p:txBody>
+      </p:sp>
+      <p:sp>
+        <p:nvSpPr>
+          <p:cNvPr id="7" name="TextBox 6"/>
+          <p:cNvSpPr txBox="1"/>
+          <p:nvPr/>
+        </p:nvSpPr>
+        <p:spPr>
+          <a:xfrm>
+            <a:off x="685800" y="1874520"/>
+            <a:ext cx="3200400" cy="640080"/>
+          </a:xfrm>
+          <a:prstGeom prst="rect">
+            <a:avLst/>
+          </a:prstGeom>
+          <a:noFill/>
+        </p:spPr>
+        <p:txBody>
+          <a:bodyPr wrap="square">
+            <a:spAutoFit/>
+          </a:bodyPr>
+          <a:lstStyle/>
+          <a:p>
+            <a:pPr algn="l">
+              <a:defRPr sz="1800" b="1">
+                <a:solidFill>
+                  <a:srgbClr val="1E40AF"/>
+                </a:solidFill>
+              </a:defRPr>
+            </a:pPr>
+            <a:r>
+              <a:t>1. 사전 준비(최초 1회): Google 언어 → English (US)</a:t>
+            </a:r>
+          </a:p>
+        </p:txBody>
+      </p:sp>
+      <p:sp>
+        <p:nvSpPr>
+          <p:cNvPr id="8" name="Rectangle 7"/>
+          <p:cNvSpPr/>
+          <p:nvPr/>
+        </p:nvSpPr>
+        <p:spPr>
+          <a:xfrm>
+            <a:off x="4297679" y="1737360"/>
+            <a:ext cx="3474720" cy="822960"/>
+          </a:xfrm>
+          <a:prstGeom prst="rect">
+            <a:avLst/>
+          </a:prstGeom>
+          <a:solidFill>
+            <a:srgbClr val="DBEAFE"/>
+          </a:solidFill>
+          <a:ln>
+            <a:noFill/>
+          </a:ln>
+        </p:spPr>
+        <p:style>
+          <a:lnRef idx="1">
+            <a:schemeClr val="accent1"/>
+          </a:lnRef>
+          <a:fillRef idx="3">
+            <a:schemeClr val="accent1"/>
+          </a:fillRef>
+          <a:effectRef idx="2">
+            <a:schemeClr val="accent1"/>
+          </a:effectRef>
+          <a:fontRef idx="minor">
+            <a:schemeClr val="lt1"/>
+          </a:fontRef>
+        </p:style>
+        <p:txBody>
+          <a:bodyPr rtlCol="0" anchor="ctr"/>
+          <a:lstStyle/>
+          <a:p>
+            <a:pPr algn="ctr"/>
+          </a:p>
+        </p:txBody>
+      </p:sp>
+      <p:sp>
+        <p:nvSpPr>
+          <p:cNvPr id="9" name="TextBox 8"/>
+          <p:cNvSpPr txBox="1"/>
+          <p:nvPr/>
+        </p:nvSpPr>
+        <p:spPr>
+          <a:xfrm>
+            <a:off x="4434839" y="1874520"/>
+            <a:ext cx="3200400" cy="640080"/>
+          </a:xfrm>
+          <a:prstGeom prst="rect">
+            <a:avLst/>
+          </a:prstGeom>
+          <a:noFill/>
+        </p:spPr>
+        <p:txBody>
+          <a:bodyPr wrap="square">
+            <a:spAutoFit/>
+          </a:bodyPr>
+          <a:lstStyle/>
+          <a:p>
+            <a:pPr algn="l">
+              <a:defRPr sz="1800" b="1">
+                <a:solidFill>
+                  <a:srgbClr val="1E40AF"/>
+                </a:solidFill>
+              </a:defRPr>
+            </a:pPr>
+            <a:r>
+              <a:t>2. Workspace Labs 가입 (labs.google.com)</a:t>
+            </a:r>
+          </a:p>
+        </p:txBody>
+      </p:sp>
+      <p:sp>
+        <p:nvSpPr>
+          <p:cNvPr id="10" name="Rectangle 9"/>
+          <p:cNvSpPr/>
+          <p:nvPr/>
+        </p:nvSpPr>
+        <p:spPr>
+          <a:xfrm>
+            <a:off x="8046719" y="1737360"/>
+            <a:ext cx="3474720" cy="822960"/>
+          </a:xfrm>
+          <a:prstGeom prst="rect">
+            <a:avLst/>
+          </a:prstGeom>
+          <a:solidFill>
+            <a:srgbClr val="DBEAFE"/>
+          </a:solidFill>
+          <a:ln>
+            <a:noFill/>
+          </a:ln>
+        </p:spPr>
+        <p:style>
+          <a:lnRef idx="1">
+            <a:schemeClr val="accent1"/>
+          </a:lnRef>
+          <a:fillRef idx="3">
+            <a:schemeClr val="accent1"/>
+          </a:fillRef>
+          <a:effectRef idx="2">
+            <a:schemeClr val="accent1"/>
+          </a:effectRef>
+          <a:fontRef idx="minor">
+            <a:schemeClr val="lt1"/>
+          </a:fontRef>
+        </p:style>
+        <p:txBody>
+          <a:bodyPr rtlCol="0" anchor="ctr"/>
+          <a:lstStyle/>
+          <a:p>
+            <a:pPr algn="ctr"/>
+          </a:p>
+        </p:txBody>
+      </p:sp>
+      <p:sp>
+        <p:nvSpPr>
+          <p:cNvPr id="11" name="TextBox 10"/>
+          <p:cNvSpPr txBox="1"/>
+          <p:nvPr/>
+        </p:nvSpPr>
+        <p:spPr>
+          <a:xfrm>
+            <a:off x="8183879" y="1874520"/>
+            <a:ext cx="3200400" cy="640080"/>
+          </a:xfrm>
+          <a:prstGeom prst="rect">
+            <a:avLst/>
+          </a:prstGeom>
+          <a:noFill/>
+        </p:spPr>
+        <p:txBody>
+          <a:bodyPr wrap="square">
+            <a:spAutoFit/>
+          </a:bodyPr>
+          <a:lstStyle/>
+          <a:p>
+            <a:pPr algn="l">
+              <a:defRPr sz="1800" b="1">
+                <a:solidFill>
+                  <a:srgbClr val="1E40AF"/>
+                </a:solidFill>
+              </a:defRPr>
+            </a:pPr>
+            <a:r>
+              <a:t>3. Forms → 'Create form with Gemini' → 영어로 요청</a:t>
+            </a:r>
+          </a:p>
+        </p:txBody>
+      </p:sp>
+      <p:sp>
+        <p:nvSpPr>
+          <p:cNvPr id="12" name="Rectangle 11"/>
+          <p:cNvSpPr/>
+          <p:nvPr/>
+        </p:nvSpPr>
+        <p:spPr>
+          <a:xfrm>
+            <a:off x="548640" y="2743200"/>
+            <a:ext cx="10972800" cy="1828800"/>
+          </a:xfrm>
+          <a:prstGeom prst="rect">
+            <a:avLst/>
+          </a:prstGeom>
+          <a:solidFill>
+            <a:srgbClr val="1E293B"/>
+          </a:solidFill>
+          <a:ln>
+            <a:solidFill>
+              <a:srgbClr val="64748B"/>
+            </a:solidFill>
+          </a:ln>
+        </p:spPr>
+        <p:style>
+          <a:lnRef idx="1">
+            <a:schemeClr val="accent1"/>
+          </a:lnRef>
+          <a:fillRef idx="3">
+            <a:schemeClr val="accent1"/>
+          </a:fillRef>
+          <a:effectRef idx="2">
+            <a:schemeClr val="accent1"/>
+          </a:effectRef>
+          <a:fontRef idx="minor">
+            <a:schemeClr val="lt1"/>
+          </a:fontRef>
+        </p:style>
+        <p:txBody>
+          <a:bodyPr rtlCol="0" anchor="ctr" wrap="square" lIns="152400" tIns="127000"/>
+          <a:lstStyle/>
+          <a:p>
+            <a:pPr algn="ctr">
+              <a:defRPr sz="1600">
+                <a:solidFill>
+                  <a:srgbClr val="FFFFFF"/>
+                </a:solidFill>
+                <a:latin typeface="Courier New"/>
+              </a:defRPr>
+            </a:pPr>
+            <a:r>
+              <a:t>Create a survey for 2nd-grade middle school students about their preferred school trip destination. Include choices (Jeju, Gyeongju, Busan, Gangwon-do) and reasons. Please output all text in Korean.</a:t>
+            </a:r>
+          </a:p>
+        </p:txBody>
+      </p:sp>
+      <p:sp>
+        <p:nvSpPr>
+          <p:cNvPr id="13" name="TextBox 12"/>
+          <p:cNvSpPr txBox="1"/>
+          <p:nvPr/>
+        </p:nvSpPr>
+        <p:spPr>
+          <a:xfrm>
+            <a:off x="731520" y="5669280"/>
+            <a:ext cx="10515600" cy="548640"/>
+          </a:xfrm>
+          <a:prstGeom prst="rect">
+            <a:avLst/>
+          </a:prstGeom>
+          <a:noFill/>
+        </p:spPr>
+        <p:txBody>
+          <a:bodyPr wrap="square">
+            <a:spAutoFit/>
+          </a:bodyPr>
+          <a:lstStyle/>
+          <a:p>
+            <a:pPr algn="l">
+              <a:defRPr sz="2000" b="1">
+                <a:solidFill>
+                  <a:srgbClr val="D97706"/>
+                </a:solidFill>
+              </a:defRPr>
+            </a:pPr>
+            <a:r>
+              <a:t>💡 한글 결과물: 프롬프트 끝에 Please output all text in Korean. 추가</a:t>
+            </a:r>
+          </a:p>
+        </p:txBody>
+      </p:sp>
+      <p:sp>
+        <p:nvSpPr>
+          <p:cNvPr id="14" name="TextBox 13"/>
+          <p:cNvSpPr txBox="1"/>
+          <p:nvPr/>
+        </p:nvSpPr>
+        <p:spPr>
+          <a:xfrm>
+            <a:off x="11155680" y="6446520"/>
+            <a:ext cx="731520" cy="320040"/>
+          </a:xfrm>
+          <a:prstGeom prst="rect">
+            <a:avLst/>
+          </a:prstGeom>
+          <a:noFill/>
+        </p:spPr>
+        <p:txBody>
+          <a:bodyPr wrap="square">
+            <a:spAutoFit/>
+          </a:bodyPr>
+          <a:lstStyle/>
+          <a:p>
+            <a:pPr algn="r">
+              <a:defRPr sz="1400" b="0">
+                <a:solidFill>
+                  <a:srgbClr val="64748B"/>
+                </a:solidFill>
+              </a:defRPr>
+            </a:pPr>
+            <a:r>
+              <a:t>13</a:t>
+            </a:r>
+          </a:p>
+        </p:txBody>
+      </p:sp>
+    </p:spTree>
+  </p:cSld>
+  <p:clrMapOvr>
+    <a:masterClrMapping/>
+  </p:clrMapOvr>
+</p:sld>
+</file>
+
+<file path=ppt/slides/slide14.xml><?xml version="1.0" encoding="utf-8"?>
+<p:sld xmlns:a="http://schemas.openxmlformats.org/drawingml/2006/main" xmlns:p="http://schemas.openxmlformats.org/presentationml/2006/main" xmlns:r="http://schemas.openxmlformats.org/officeDocument/2006/relationships">
+  <p:cSld>
+    <p:bg>
+      <p:bgPr>
+        <a:solidFill>
+          <a:srgbClr val="FFFFFF"/>
+        </a:solidFill>
+        <a:effectLst/>
+      </p:bgPr>
+    </p:bg>
+    <p:spTree>
+      <p:nvGrpSpPr>
+        <p:cNvPr id="1" name=""/>
+        <p:cNvGrpSpPr/>
+        <p:nvPr/>
+      </p:nvGrpSpPr>
+      <p:grpSpPr/>
+      <p:sp>
+        <p:nvSpPr>
+          <p:cNvPr id="2" name="Rectangle 1"/>
+          <p:cNvSpPr/>
+          <p:nvPr/>
+        </p:nvSpPr>
+        <p:spPr>
+          <a:xfrm>
+            <a:off x="548640" y="320040"/>
+            <a:ext cx="1280160" cy="384048"/>
+          </a:xfrm>
+          <a:prstGeom prst="rect">
+            <a:avLst/>
+          </a:prstGeom>
+          <a:solidFill>
+            <a:srgbClr val="DBEAFE"/>
+          </a:solidFill>
+          <a:ln>
+            <a:noFill/>
+          </a:ln>
+        </p:spPr>
+        <p:style>
+          <a:lnRef idx="1">
+            <a:schemeClr val="accent1"/>
+          </a:lnRef>
+          <a:fillRef idx="3">
+            <a:schemeClr val="accent1"/>
+          </a:fillRef>
+          <a:effectRef idx="2">
+            <a:schemeClr val="accent1"/>
+          </a:effectRef>
+          <a:fontRef idx="minor">
+            <a:schemeClr val="lt1"/>
+          </a:fontRef>
+        </p:style>
+        <p:txBody>
+          <a:bodyPr rtlCol="0" anchor="ctr"/>
+          <a:lstStyle/>
+          <a:p>
+            <a:pPr algn="ctr"/>
+          </a:p>
+        </p:txBody>
+      </p:sp>
+      <p:sp>
+        <p:nvSpPr>
+          <p:cNvPr id="3" name="TextBox 2"/>
+          <p:cNvSpPr txBox="1"/>
+          <p:nvPr/>
+        </p:nvSpPr>
+        <p:spPr>
+          <a:xfrm>
+            <a:off x="548640" y="292608"/>
+            <a:ext cx="1280160" cy="411480"/>
+          </a:xfrm>
+          <a:prstGeom prst="rect">
+            <a:avLst/>
+          </a:prstGeom>
+          <a:noFill/>
+        </p:spPr>
+        <p:txBody>
+          <a:bodyPr wrap="square">
+            <a:spAutoFit/>
+          </a:bodyPr>
+          <a:lstStyle/>
+          <a:p>
+            <a:pPr algn="ctr">
+              <a:defRPr sz="1600" b="1">
+                <a:solidFill>
+                  <a:srgbClr val="1E40AF"/>
+                </a:solidFill>
+              </a:defRPr>
+            </a:pPr>
+            <a:r>
+              <a:t>[32~45분]</a:t>
+            </a:r>
+          </a:p>
+        </p:txBody>
+      </p:sp>
+      <p:sp>
+        <p:nvSpPr>
+          <p:cNvPr id="4" name="TextBox 3"/>
+          <p:cNvSpPr txBox="1"/>
+          <p:nvPr/>
+        </p:nvSpPr>
+        <p:spPr>
+          <a:xfrm>
+            <a:off x="548640" y="777240"/>
+            <a:ext cx="10972800" cy="731520"/>
+          </a:xfrm>
+          <a:prstGeom prst="rect">
+            <a:avLst/>
+          </a:prstGeom>
+          <a:noFill/>
+        </p:spPr>
+        <p:txBody>
+          <a:bodyPr wrap="square">
+            <a:spAutoFit/>
+          </a:bodyPr>
+          <a:lstStyle/>
+          <a:p>
+            <a:pPr algn="l">
+              <a:defRPr sz="3400" b="1">
+                <a:solidFill>
+                  <a:srgbClr val="1E40AF"/>
+                </a:solidFill>
+              </a:defRPr>
+            </a:pPr>
+            <a:r>
+              <a:t>Gemini — 수업 자료 제작 7단계</a:t>
+            </a:r>
+          </a:p>
+        </p:txBody>
+      </p:sp>
+      <p:sp>
+        <p:nvSpPr>
+          <p:cNvPr id="5" name="Rectangle 4"/>
+          <p:cNvSpPr/>
+          <p:nvPr/>
+        </p:nvSpPr>
+        <p:spPr>
+          <a:xfrm>
+            <a:off x="548640" y="1508760"/>
+            <a:ext cx="2560320" cy="64008"/>
+          </a:xfrm>
+          <a:prstGeom prst="rect">
+            <a:avLst/>
+          </a:prstGeom>
+          <a:solidFill>
+            <a:srgbClr val="F472B6"/>
+          </a:solidFill>
+          <a:ln>
+            <a:noFill/>
+          </a:ln>
+        </p:spPr>
+        <p:style>
+          <a:lnRef idx="1">
+            <a:schemeClr val="accent1"/>
+          </a:lnRef>
+          <a:fillRef idx="3">
+            <a:schemeClr val="accent1"/>
+          </a:fillRef>
+          <a:effectRef idx="2">
+            <a:schemeClr val="accent1"/>
+          </a:effectRef>
+          <a:fontRef idx="minor">
+            <a:schemeClr val="lt1"/>
+          </a:fontRef>
+        </p:style>
+        <p:txBody>
+          <a:bodyPr rtlCol="0" anchor="ctr"/>
+          <a:lstStyle/>
+          <a:p>
+            <a:pPr algn="ctr"/>
+          </a:p>
+        </p:txBody>
+      </p:sp>
+      <p:pic>
+        <p:nvPicPr>
+          <p:cNvPr id="6" name="Picture 5" descr="slides_7step.png"/>
+          <p:cNvPicPr>
+            <a:picLocks noChangeAspect="1"/>
+          </p:cNvPicPr>
+          <p:nvPr/>
+        </p:nvPicPr>
+        <p:blipFill>
+          <a:blip r:embed="rId2"/>
+          <a:stretch>
+            <a:fillRect/>
+          </a:stretch>
+        </p:blipFill>
+        <p:spPr>
+          <a:xfrm>
+            <a:off x="548640" y="1691640"/>
+            <a:ext cx="5669280" cy="2576945"/>
+          </a:xfrm>
+          <a:prstGeom prst="rect">
+            <a:avLst/>
+          </a:prstGeom>
+        </p:spPr>
+      </p:pic>
+      <p:sp>
+        <p:nvSpPr>
+          <p:cNvPr id="7" name="TextBox 6"/>
+          <p:cNvSpPr txBox="1"/>
+          <p:nvPr/>
+        </p:nvSpPr>
+        <p:spPr>
+          <a:xfrm>
+            <a:off x="6400800" y="1737360"/>
+            <a:ext cx="5303520" cy="3200400"/>
+          </a:xfrm>
+          <a:prstGeom prst="rect">
+            <a:avLst/>
+          </a:prstGeom>
+          <a:noFill/>
+        </p:spPr>
+        <p:txBody>
+          <a:bodyPr wrap="square">
+            <a:spAutoFit/>
+          </a:bodyPr>
+          <a:lstStyle/>
+          <a:p>
+            <a:pPr algn="l">
+              <a:defRPr sz="2200" b="0">
+                <a:solidFill>
+                  <a:srgbClr val="334155"/>
+                </a:solidFill>
+              </a:defRPr>
+            </a:pPr>
+          </a:p>
+        </p:txBody>
+      </p:sp>
+      <p:sp>
+        <p:nvSpPr>
+          <p:cNvPr id="8" name="Rectangle 7"/>
+          <p:cNvSpPr/>
+          <p:nvPr/>
+        </p:nvSpPr>
+        <p:spPr>
+          <a:xfrm>
+            <a:off x="6400800" y="4572000"/>
+            <a:ext cx="5303520" cy="1645920"/>
+          </a:xfrm>
+          <a:prstGeom prst="rect">
+            <a:avLst/>
+          </a:prstGeom>
+          <a:solidFill>
+            <a:srgbClr val="1E293B"/>
+          </a:solidFill>
+          <a:ln>
+            <a:solidFill>
+              <a:srgbClr val="64748B"/>
+            </a:solidFill>
+          </a:ln>
+        </p:spPr>
+        <p:style>
+          <a:lnRef idx="1">
+            <a:schemeClr val="accent1"/>
+          </a:lnRef>
+          <a:fillRef idx="3">
+            <a:schemeClr val="accent1"/>
+          </a:fillRef>
+          <a:effectRef idx="2">
+            <a:schemeClr val="accent1"/>
+          </a:effectRef>
+          <a:fontRef idx="minor">
+            <a:schemeClr val="lt1"/>
+          </a:fontRef>
+        </p:style>
+        <p:txBody>
+          <a:bodyPr rtlCol="0" anchor="ctr" wrap="square" lIns="152400" tIns="127000"/>
+          <a:lstStyle/>
+          <a:p>
+            <a:pPr algn="ctr">
+              <a:defRPr sz="1400">
+                <a:solidFill>
+                  <a:srgbClr val="FFFFFF"/>
+                </a:solidFill>
+                <a:latin typeface="Courier New"/>
+              </a:defRPr>
+            </a:pPr>
+            <a:r>
+              <a:t>[Step1] '조선 후기 사회의 변화' 주제로 중학생 대상 슬라이드 5장 구성해줘.</a:t>
+            </a:r>
+            <a:br/>
+            <a:r>
+              <a:t>[Step2] A vibrant market scene in late Joseon Dynasty, digital art, presentation background.</a:t>
+            </a:r>
+            <a:br/>
+            <a:r>
+              <a:t>[Step3] 생성한 슬라이드 바탕으로 쉽고 재미있는 발표 스크립트 작성해줘.</a:t>
+            </a:r>
+          </a:p>
+        </p:txBody>
+      </p:sp>
+      <p:sp>
+        <p:nvSpPr>
+          <p:cNvPr id="9" name="TextBox 8"/>
+          <p:cNvSpPr txBox="1"/>
+          <p:nvPr/>
+        </p:nvSpPr>
+        <p:spPr>
+          <a:xfrm>
+            <a:off x="11155680" y="6446520"/>
+            <a:ext cx="731520" cy="320040"/>
+          </a:xfrm>
+          <a:prstGeom prst="rect">
+            <a:avLst/>
+          </a:prstGeom>
+          <a:noFill/>
+        </p:spPr>
+        <p:txBody>
+          <a:bodyPr wrap="square">
+            <a:spAutoFit/>
+          </a:bodyPr>
+          <a:lstStyle/>
+          <a:p>
+            <a:pPr algn="r">
+              <a:defRPr sz="1400" b="0">
+                <a:solidFill>
+                  <a:srgbClr val="64748B"/>
+                </a:solidFill>
+              </a:defRPr>
+            </a:pPr>
+            <a:r>
+              <a:t>14</a:t>
+            </a:r>
+          </a:p>
+        </p:txBody>
+      </p:sp>
+    </p:spTree>
+  </p:cSld>
+  <p:clrMapOvr>
+    <a:masterClrMapping/>
+  </p:clrMapOvr>
+</p:sld>
+</file>
+
+<file path=ppt/slides/slide15.xml><?xml version="1.0" encoding="utf-8"?>
+<p:sld xmlns:a="http://schemas.openxmlformats.org/drawingml/2006/main" xmlns:p="http://schemas.openxmlformats.org/presentationml/2006/main" xmlns:r="http://schemas.openxmlformats.org/officeDocument/2006/relationships">
+  <p:cSld>
+    <p:bg>
+      <p:bgPr>
+        <a:solidFill>
+          <a:srgbClr val="F8FAFC"/>
+        </a:solidFill>
+        <a:effectLst/>
+      </p:bgPr>
+    </p:bg>
+    <p:spTree>
+      <p:nvGrpSpPr>
+        <p:cNvPr id="1" name=""/>
+        <p:cNvGrpSpPr/>
+        <p:nvPr/>
+      </p:nvGrpSpPr>
+      <p:grpSpPr/>
+      <p:sp>
+        <p:nvSpPr>
+          <p:cNvPr id="2" name="Rectangle 1"/>
+          <p:cNvSpPr/>
+          <p:nvPr/>
+        </p:nvSpPr>
+        <p:spPr>
+          <a:xfrm>
+            <a:off x="548640" y="320040"/>
+            <a:ext cx="1280160" cy="384048"/>
+          </a:xfrm>
+          <a:prstGeom prst="rect">
+            <a:avLst/>
+          </a:prstGeom>
+          <a:solidFill>
+            <a:srgbClr val="DBEAFE"/>
+          </a:solidFill>
+          <a:ln>
+            <a:noFill/>
+          </a:ln>
+        </p:spPr>
+        <p:style>
+          <a:lnRef idx="1">
+            <a:schemeClr val="accent1"/>
+          </a:lnRef>
+          <a:fillRef idx="3">
+            <a:schemeClr val="accent1"/>
+          </a:fillRef>
+          <a:effectRef idx="2">
+            <a:schemeClr val="accent1"/>
+          </a:effectRef>
+          <a:fontRef idx="minor">
+            <a:schemeClr val="lt1"/>
+          </a:fontRef>
+        </p:style>
+        <p:txBody>
+          <a:bodyPr rtlCol="0" anchor="ctr"/>
+          <a:lstStyle/>
+          <a:p>
+            <a:pPr algn="ctr"/>
+          </a:p>
+        </p:txBody>
+      </p:sp>
+      <p:sp>
+        <p:nvSpPr>
+          <p:cNvPr id="3" name="TextBox 2"/>
+          <p:cNvSpPr txBox="1"/>
+          <p:nvPr/>
+        </p:nvSpPr>
+        <p:spPr>
+          <a:xfrm>
+            <a:off x="548640" y="292608"/>
+            <a:ext cx="1280160" cy="411480"/>
+          </a:xfrm>
+          <a:prstGeom prst="rect">
+            <a:avLst/>
+          </a:prstGeom>
+          <a:noFill/>
+        </p:spPr>
+        <p:txBody>
+          <a:bodyPr wrap="square">
+            <a:spAutoFit/>
+          </a:bodyPr>
+          <a:lstStyle/>
+          <a:p>
+            <a:pPr algn="ctr">
+              <a:defRPr sz="1600" b="1">
+                <a:solidFill>
+                  <a:srgbClr val="1E40AF"/>
+                </a:solidFill>
+              </a:defRPr>
+            </a:pPr>
+            <a:r>
+              <a:t>[45~48분]</a:t>
+            </a:r>
+          </a:p>
+        </p:txBody>
+      </p:sp>
+      <p:sp>
+        <p:nvSpPr>
+          <p:cNvPr id="4" name="TextBox 3"/>
+          <p:cNvSpPr txBox="1"/>
+          <p:nvPr/>
+        </p:nvSpPr>
+        <p:spPr>
+          <a:xfrm>
+            <a:off x="548640" y="777240"/>
+            <a:ext cx="10972800" cy="731520"/>
+          </a:xfrm>
+          <a:prstGeom prst="rect">
+            <a:avLst/>
+          </a:prstGeom>
+          <a:noFill/>
+        </p:spPr>
+        <p:txBody>
+          <a:bodyPr wrap="square">
+            <a:spAutoFit/>
+          </a:bodyPr>
+          <a:lstStyle/>
+          <a:p>
+            <a:pPr algn="l">
+              <a:defRPr sz="3400" b="1">
+                <a:solidFill>
+                  <a:srgbClr val="1E40AF"/>
+                </a:solidFill>
+              </a:defRPr>
+            </a:pPr>
+            <a:r>
+              <a:t>워크스페이스+ 심화 팁</a:t>
+            </a:r>
+          </a:p>
+        </p:txBody>
+      </p:sp>
+      <p:sp>
+        <p:nvSpPr>
+          <p:cNvPr id="5" name="Rectangle 4"/>
+          <p:cNvSpPr/>
+          <p:nvPr/>
+        </p:nvSpPr>
+        <p:spPr>
+          <a:xfrm>
+            <a:off x="548640" y="1508760"/>
+            <a:ext cx="2560320" cy="64008"/>
+          </a:xfrm>
+          <a:prstGeom prst="rect">
+            <a:avLst/>
+          </a:prstGeom>
+          <a:solidFill>
+            <a:srgbClr val="F472B6"/>
+          </a:solidFill>
+          <a:ln>
+            <a:noFill/>
+          </a:ln>
+        </p:spPr>
+        <p:style>
+          <a:lnRef idx="1">
+            <a:schemeClr val="accent1"/>
+          </a:lnRef>
+          <a:fillRef idx="3">
+            <a:schemeClr val="accent1"/>
+          </a:fillRef>
+          <a:effectRef idx="2">
+            <a:schemeClr val="accent1"/>
+          </a:effectRef>
+          <a:fontRef idx="minor">
+            <a:schemeClr val="lt1"/>
+          </a:fontRef>
+        </p:style>
+        <p:txBody>
+          <a:bodyPr rtlCol="0" anchor="ctr"/>
+          <a:lstStyle/>
+          <a:p>
+            <a:pPr algn="ctr"/>
+          </a:p>
+        </p:txBody>
+      </p:sp>
+      <p:sp>
+        <p:nvSpPr>
+          <p:cNvPr id="6" name="Rectangle 5"/>
+          <p:cNvSpPr/>
+          <p:nvPr/>
+        </p:nvSpPr>
+        <p:spPr>
+          <a:xfrm>
+            <a:off x="548640" y="1737360"/>
+            <a:ext cx="5486400" cy="4572000"/>
+          </a:xfrm>
+          <a:prstGeom prst="rect">
+            <a:avLst/>
+          </a:prstGeom>
+          <a:solidFill>
+            <a:srgbClr val="FFFFFF"/>
+          </a:solidFill>
+          <a:ln>
+            <a:solidFill>
+              <a:srgbClr val="DBEAFE"/>
+            </a:solidFill>
+          </a:ln>
+        </p:spPr>
+        <p:style>
+          <a:lnRef idx="1">
+            <a:schemeClr val="accent1"/>
+          </a:lnRef>
+          <a:fillRef idx="3">
+            <a:schemeClr val="accent1"/>
+          </a:fillRef>
+          <a:effectRef idx="2">
+            <a:schemeClr val="accent1"/>
+          </a:effectRef>
+          <a:fontRef idx="minor">
+            <a:schemeClr val="lt1"/>
+          </a:fontRef>
+        </p:style>
+        <p:txBody>
+          <a:bodyPr rtlCol="0" anchor="ctr"/>
+          <a:lstStyle/>
+          <a:p>
+            <a:pPr algn="ctr"/>
+          </a:p>
+        </p:txBody>
+      </p:sp>
+      <p:sp>
+        <p:nvSpPr>
+          <p:cNvPr id="7" name="TextBox 6"/>
+          <p:cNvSpPr txBox="1"/>
+          <p:nvPr/>
+        </p:nvSpPr>
+        <p:spPr>
+          <a:xfrm>
+            <a:off x="731520" y="1874519"/>
+            <a:ext cx="5120640" cy="457200"/>
+          </a:xfrm>
+          <a:prstGeom prst="rect">
+            <a:avLst/>
+          </a:prstGeom>
+          <a:noFill/>
+        </p:spPr>
+        <p:txBody>
+          <a:bodyPr wrap="square">
+            <a:spAutoFit/>
+          </a:bodyPr>
+          <a:lstStyle/>
+          <a:p>
+            <a:pPr algn="l">
+              <a:defRPr sz="2400" b="1">
+                <a:solidFill>
+                  <a:srgbClr val="1E40AF"/>
+                </a:solidFill>
+              </a:defRPr>
+            </a:pPr>
+            <a:r>
+              <a:t>📊 스프레드시트 분석</a:t>
+            </a:r>
+          </a:p>
+        </p:txBody>
+      </p:sp>
+      <p:sp>
+        <p:nvSpPr>
+          <p:cNvPr id="8" name="Rectangle 7"/>
+          <p:cNvSpPr/>
+          <p:nvPr/>
+        </p:nvSpPr>
+        <p:spPr>
+          <a:xfrm>
+            <a:off x="731520" y="2468880"/>
+            <a:ext cx="5120640" cy="3566160"/>
+          </a:xfrm>
+          <a:prstGeom prst="rect">
+            <a:avLst/>
+          </a:prstGeom>
+          <a:solidFill>
+            <a:srgbClr val="1E293B"/>
+          </a:solidFill>
+          <a:ln>
+            <a:solidFill>
+              <a:srgbClr val="64748B"/>
+            </a:solidFill>
+          </a:ln>
+        </p:spPr>
+        <p:style>
+          <a:lnRef idx="1">
+            <a:schemeClr val="accent1"/>
+          </a:lnRef>
+          <a:fillRef idx="3">
+            <a:schemeClr val="accent1"/>
+          </a:fillRef>
+          <a:effectRef idx="2">
+            <a:schemeClr val="accent1"/>
+          </a:effectRef>
+          <a:fontRef idx="minor">
+            <a:schemeClr val="lt1"/>
+          </a:fontRef>
+        </p:style>
+        <p:txBody>
+          <a:bodyPr rtlCol="0" anchor="ctr" wrap="square" lIns="152400" tIns="127000"/>
+          <a:lstStyle/>
+          <a:p>
+            <a:pPr algn="ctr">
+              <a:defRPr sz="1500">
+                <a:solidFill>
+                  <a:srgbClr val="FFFFFF"/>
+                </a:solidFill>
+                <a:latin typeface="Courier New"/>
+              </a:defRPr>
+            </a:pPr>
+            <a:r>
+              <a:t>이 스프레드시트 데이터에서 [국어] 점수가 [80점] 이상인 학생들의 특징을 분석해주고, 보완 조언을 작성해줘.</a:t>
+            </a:r>
+          </a:p>
+        </p:txBody>
+      </p:sp>
+      <p:sp>
+        <p:nvSpPr>
+          <p:cNvPr id="9" name="Rectangle 8"/>
+          <p:cNvSpPr/>
+          <p:nvPr/>
+        </p:nvSpPr>
+        <p:spPr>
+          <a:xfrm>
+            <a:off x="6217920" y="1737360"/>
+            <a:ext cx="5486400" cy="4572000"/>
+          </a:xfrm>
+          <a:prstGeom prst="rect">
+            <a:avLst/>
+          </a:prstGeom>
+          <a:solidFill>
+            <a:srgbClr val="FFFFFF"/>
+          </a:solidFill>
+          <a:ln>
+            <a:solidFill>
+              <a:srgbClr val="F472B6"/>
+            </a:solidFill>
+          </a:ln>
+        </p:spPr>
+        <p:style>
+          <a:lnRef idx="1">
+            <a:schemeClr val="accent1"/>
+          </a:lnRef>
+          <a:fillRef idx="3">
+            <a:schemeClr val="accent1"/>
+          </a:fillRef>
+          <a:effectRef idx="2">
+            <a:schemeClr val="accent1"/>
+          </a:effectRef>
+          <a:fontRef idx="minor">
+            <a:schemeClr val="lt1"/>
+          </a:fontRef>
+        </p:style>
+        <p:txBody>
+          <a:bodyPr rtlCol="0" anchor="ctr"/>
+          <a:lstStyle/>
+          <a:p>
+            <a:pPr algn="ctr"/>
+          </a:p>
+        </p:txBody>
+      </p:sp>
+      <p:sp>
+        <p:nvSpPr>
+          <p:cNvPr id="10" name="TextBox 9"/>
+          <p:cNvSpPr txBox="1"/>
+          <p:nvPr/>
+        </p:nvSpPr>
+        <p:spPr>
+          <a:xfrm>
+            <a:off x="6400800" y="1874519"/>
+            <a:ext cx="5120640" cy="457200"/>
+          </a:xfrm>
+          <a:prstGeom prst="rect">
+            <a:avLst/>
+          </a:prstGeom>
+          <a:noFill/>
+        </p:spPr>
+        <p:txBody>
+          <a:bodyPr wrap="square">
+            <a:spAutoFit/>
+          </a:bodyPr>
+          <a:lstStyle/>
+          <a:p>
+            <a:pPr algn="l">
+              <a:defRPr sz="2400" b="1">
+                <a:solidFill>
+                  <a:srgbClr val="F472B6"/>
+                </a:solidFill>
+              </a:defRPr>
+            </a:pPr>
+            <a:r>
+              <a:t>🎓 클래스룸 피드백</a:t>
+            </a:r>
+          </a:p>
+        </p:txBody>
+      </p:sp>
+      <p:sp>
+        <p:nvSpPr>
+          <p:cNvPr id="11" name="Rectangle 10"/>
+          <p:cNvSpPr/>
+          <p:nvPr/>
+        </p:nvSpPr>
+        <p:spPr>
+          <a:xfrm>
+            <a:off x="6400800" y="2468880"/>
+            <a:ext cx="5120640" cy="3566160"/>
+          </a:xfrm>
+          <a:prstGeom prst="rect">
+            <a:avLst/>
+          </a:prstGeom>
+          <a:solidFill>
+            <a:srgbClr val="1E293B"/>
+          </a:solidFill>
+          <a:ln>
+            <a:solidFill>
+              <a:srgbClr val="64748B"/>
+            </a:solidFill>
+          </a:ln>
+        </p:spPr>
+        <p:style>
+          <a:lnRef idx="1">
+            <a:schemeClr val="accent1"/>
+          </a:lnRef>
+          <a:fillRef idx="3">
+            <a:schemeClr val="accent1"/>
+          </a:fillRef>
+          <a:effectRef idx="2">
+            <a:schemeClr val="accent1"/>
+          </a:effectRef>
+          <a:fontRef idx="minor">
+            <a:schemeClr val="lt1"/>
+          </a:fontRef>
+        </p:style>
+        <p:txBody>
+          <a:bodyPr rtlCol="0" anchor="ctr" wrap="square" lIns="152400" tIns="127000"/>
+          <a:lstStyle/>
+          <a:p>
+            <a:pPr algn="ctr">
+              <a:defRPr sz="1500">
+                <a:solidFill>
+                  <a:srgbClr val="FFFFFF"/>
+                </a:solidFill>
+                <a:latin typeface="Courier New"/>
+              </a:defRPr>
+            </a:pPr>
+            <a:r>
+              <a:t>업로드된 학생 과제 PDF를 읽고, [성취기준]에 비추어 잘한 점 2가지와 보완점 1가지를 따뜻하게 피드백해줘.</a:t>
+            </a:r>
+          </a:p>
+        </p:txBody>
+      </p:sp>
+      <p:sp>
+        <p:nvSpPr>
+          <p:cNvPr id="12" name="TextBox 11"/>
+          <p:cNvSpPr txBox="1"/>
+          <p:nvPr/>
+        </p:nvSpPr>
+        <p:spPr>
+          <a:xfrm>
+            <a:off x="11155680" y="6446520"/>
+            <a:ext cx="731520" cy="320040"/>
+          </a:xfrm>
+          <a:prstGeom prst="rect">
+            <a:avLst/>
+          </a:prstGeom>
+          <a:noFill/>
+        </p:spPr>
+        <p:txBody>
+          <a:bodyPr wrap="square">
+            <a:spAutoFit/>
+          </a:bodyPr>
+          <a:lstStyle/>
+          <a:p>
+            <a:pPr algn="r">
+              <a:defRPr sz="1400" b="0">
+                <a:solidFill>
+                  <a:srgbClr val="64748B"/>
+                </a:solidFill>
+              </a:defRPr>
+            </a:pPr>
+            <a:r>
+              <a:t>15</a:t>
+            </a:r>
+          </a:p>
+        </p:txBody>
+      </p:sp>
+    </p:spTree>
+  </p:cSld>
+  <p:clrMapOvr>
+    <a:masterClrMapping/>
+  </p:clrMapOvr>
+</p:sld>
+</file>
+
+<file path=ppt/slides/slide16.xml><?xml version="1.0" encoding="utf-8"?>
+<p:sld xmlns:a="http://schemas.openxmlformats.org/drawingml/2006/main" xmlns:p="http://schemas.openxmlformats.org/presentationml/2006/main" xmlns:r="http://schemas.openxmlformats.org/officeDocument/2006/relationships">
+  <p:cSld>
+    <p:bg>
+      <p:bgPr>
+        <a:solidFill>
+          <a:srgbClr val="FFFFFF"/>
+        </a:solidFill>
+        <a:effectLst/>
+      </p:bgPr>
+    </p:bg>
+    <p:spTree>
+      <p:nvGrpSpPr>
+        <p:cNvPr id="1" name=""/>
+        <p:cNvGrpSpPr/>
+        <p:nvPr/>
+      </p:nvGrpSpPr>
+      <p:grpSpPr/>
+      <p:sp>
+        <p:nvSpPr>
+          <p:cNvPr id="2" name="Rectangle 1"/>
+          <p:cNvSpPr/>
+          <p:nvPr/>
+        </p:nvSpPr>
+        <p:spPr>
+          <a:xfrm>
+            <a:off x="548640" y="320040"/>
+            <a:ext cx="1280160" cy="384048"/>
+          </a:xfrm>
+          <a:prstGeom prst="rect">
+            <a:avLst/>
+          </a:prstGeom>
+          <a:solidFill>
+            <a:srgbClr val="DBEAFE"/>
+          </a:solidFill>
+          <a:ln>
+            <a:noFill/>
+          </a:ln>
+        </p:spPr>
+        <p:style>
+          <a:lnRef idx="1">
+            <a:schemeClr val="accent1"/>
+          </a:lnRef>
+          <a:fillRef idx="3">
+            <a:schemeClr val="accent1"/>
+          </a:fillRef>
+          <a:effectRef idx="2">
+            <a:schemeClr val="accent1"/>
+          </a:effectRef>
+          <a:fontRef idx="minor">
+            <a:schemeClr val="lt1"/>
+          </a:fontRef>
+        </p:style>
+        <p:txBody>
+          <a:bodyPr rtlCol="0" anchor="ctr"/>
+          <a:lstStyle/>
+          <a:p>
+            <a:pPr algn="ctr"/>
+          </a:p>
+        </p:txBody>
+      </p:sp>
+      <p:sp>
+        <p:nvSpPr>
+          <p:cNvPr id="3" name="TextBox 2"/>
+          <p:cNvSpPr txBox="1"/>
+          <p:nvPr/>
+        </p:nvSpPr>
+        <p:spPr>
+          <a:xfrm>
+            <a:off x="548640" y="292608"/>
+            <a:ext cx="1280160" cy="411480"/>
+          </a:xfrm>
+          <a:prstGeom prst="rect">
+            <a:avLst/>
+          </a:prstGeom>
+          <a:noFill/>
+        </p:spPr>
+        <p:txBody>
+          <a:bodyPr wrap="square">
+            <a:spAutoFit/>
+          </a:bodyPr>
+          <a:lstStyle/>
+          <a:p>
+            <a:pPr algn="ctr">
+              <a:defRPr sz="1600" b="1">
+                <a:solidFill>
+                  <a:srgbClr val="1E40AF"/>
+                </a:solidFill>
+              </a:defRPr>
+            </a:pPr>
+            <a:r>
+              <a:t>[45~48분]</a:t>
+            </a:r>
+          </a:p>
+        </p:txBody>
+      </p:sp>
+      <p:sp>
+        <p:nvSpPr>
+          <p:cNvPr id="4" name="TextBox 3"/>
+          <p:cNvSpPr txBox="1"/>
+          <p:nvPr/>
+        </p:nvSpPr>
+        <p:spPr>
+          <a:xfrm>
+            <a:off x="548640" y="777240"/>
+            <a:ext cx="10972800" cy="731520"/>
+          </a:xfrm>
+          <a:prstGeom prst="rect">
+            <a:avLst/>
+          </a:prstGeom>
+          <a:noFill/>
+        </p:spPr>
+        <p:txBody>
+          <a:bodyPr wrap="square">
+            <a:spAutoFit/>
+          </a:bodyPr>
+          <a:lstStyle/>
+          <a:p>
+            <a:pPr algn="l">
+              <a:defRPr sz="3400" b="1">
+                <a:solidFill>
+                  <a:srgbClr val="1E40AF"/>
+                </a:solidFill>
+              </a:defRPr>
+            </a:pPr>
+            <a:r>
+              <a:t>[BONUS] 2022 개정 교육과정 수업 설계</a:t>
+            </a:r>
+          </a:p>
+        </p:txBody>
+      </p:sp>
+      <p:sp>
+        <p:nvSpPr>
+          <p:cNvPr id="5" name="Rectangle 4"/>
+          <p:cNvSpPr/>
+          <p:nvPr/>
+        </p:nvSpPr>
+        <p:spPr>
+          <a:xfrm>
+            <a:off x="548640" y="1508760"/>
+            <a:ext cx="2560320" cy="64008"/>
+          </a:xfrm>
+          <a:prstGeom prst="rect">
+            <a:avLst/>
+          </a:prstGeom>
+          <a:solidFill>
+            <a:srgbClr val="F472B6"/>
+          </a:solidFill>
+          <a:ln>
+            <a:noFill/>
+          </a:ln>
+        </p:spPr>
+        <p:style>
+          <a:lnRef idx="1">
+            <a:schemeClr val="accent1"/>
+          </a:lnRef>
+          <a:fillRef idx="3">
+            <a:schemeClr val="accent1"/>
+          </a:fillRef>
+          <a:effectRef idx="2">
+            <a:schemeClr val="accent1"/>
+          </a:effectRef>
+          <a:fontRef idx="minor">
+            <a:schemeClr val="lt1"/>
+          </a:fontRef>
+        </p:style>
+        <p:txBody>
+          <a:bodyPr rtlCol="0" anchor="ctr"/>
+          <a:lstStyle/>
+          <a:p>
+            <a:pPr algn="ctr"/>
+          </a:p>
+        </p:txBody>
+      </p:sp>
+      <p:sp>
+        <p:nvSpPr>
+          <p:cNvPr id="6" name="Rectangle 5"/>
+          <p:cNvSpPr/>
+          <p:nvPr/>
+        </p:nvSpPr>
+        <p:spPr>
+          <a:xfrm>
+            <a:off x="548640" y="1737360"/>
+            <a:ext cx="10972800" cy="1828800"/>
+          </a:xfrm>
+          <a:prstGeom prst="rect">
+            <a:avLst/>
+          </a:prstGeom>
+          <a:solidFill>
+            <a:srgbClr val="1E293B"/>
+          </a:solidFill>
+          <a:ln>
+            <a:solidFill>
+              <a:srgbClr val="64748B"/>
+            </a:solidFill>
+          </a:ln>
+        </p:spPr>
+        <p:style>
+          <a:lnRef idx="1">
+            <a:schemeClr val="accent1"/>
+          </a:lnRef>
+          <a:fillRef idx="3">
+            <a:schemeClr val="accent1"/>
+          </a:fillRef>
+          <a:effectRef idx="2">
+            <a:schemeClr val="accent1"/>
+          </a:effectRef>
+          <a:fontRef idx="minor">
+            <a:schemeClr val="lt1"/>
+          </a:fontRef>
+        </p:style>
+        <p:txBody>
+          <a:bodyPr rtlCol="0" anchor="ctr" wrap="square" lIns="152400" tIns="127000"/>
+          <a:lstStyle/>
+          <a:p>
+            <a:pPr algn="ctr">
+              <a:defRPr sz="1600">
+                <a:solidFill>
+                  <a:srgbClr val="FFFFFF"/>
+                </a:solidFill>
+                <a:latin typeface="Courier New"/>
+              </a:defRPr>
+            </a:pPr>
+            <a:r>
+              <a:t>2022 개정 교육과정 [과목명]의 성취기준을 반영하여, 학생들의 [비판적 사고 역량]을 끌어낼 수 있는 수업을 설계해줘. 매 차시 학생이 스스로 질문을 생성하는 활동을 포함해줘.</a:t>
+            </a:r>
+          </a:p>
+        </p:txBody>
+      </p:sp>
+      <p:sp>
+        <p:nvSpPr>
+          <p:cNvPr id="7" name="TextBox 6"/>
+          <p:cNvSpPr txBox="1"/>
+          <p:nvPr/>
+        </p:nvSpPr>
+        <p:spPr>
+          <a:xfrm>
+            <a:off x="731520" y="5669280"/>
+            <a:ext cx="10515600" cy="548640"/>
+          </a:xfrm>
+          <a:prstGeom prst="rect">
+            <a:avLst/>
+          </a:prstGeom>
+          <a:noFill/>
+        </p:spPr>
+        <p:txBody>
+          <a:bodyPr wrap="square">
+            <a:spAutoFit/>
+          </a:bodyPr>
+          <a:lstStyle/>
+          <a:p>
+            <a:pPr algn="l">
+              <a:defRPr sz="2000" b="1">
+                <a:solidFill>
+                  <a:srgbClr val="D97706"/>
+                </a:solidFill>
+              </a:defRPr>
+            </a:pPr>
+            <a:r>
+              <a:t>💡 역량 중심의 깊이 있는 학습을 AI와 함께 설계하세요!</a:t>
+            </a:r>
+          </a:p>
+        </p:txBody>
+      </p:sp>
+      <p:sp>
+        <p:nvSpPr>
+          <p:cNvPr id="8" name="TextBox 7"/>
+          <p:cNvSpPr txBox="1"/>
+          <p:nvPr/>
+        </p:nvSpPr>
+        <p:spPr>
+          <a:xfrm>
+            <a:off x="11155680" y="6446520"/>
+            <a:ext cx="731520" cy="320040"/>
+          </a:xfrm>
+          <a:prstGeom prst="rect">
+            <a:avLst/>
+          </a:prstGeom>
+          <a:noFill/>
+        </p:spPr>
+        <p:txBody>
+          <a:bodyPr wrap="square">
+            <a:spAutoFit/>
+          </a:bodyPr>
+          <a:lstStyle/>
+          <a:p>
+            <a:pPr algn="r">
+              <a:defRPr sz="1400" b="0">
+                <a:solidFill>
+                  <a:srgbClr val="64748B"/>
+                </a:solidFill>
+              </a:defRPr>
+            </a:pPr>
+            <a:r>
+              <a:t>16</a:t>
+            </a:r>
+          </a:p>
+        </p:txBody>
+      </p:sp>
+    </p:spTree>
+  </p:cSld>
+  <p:clrMapOvr>
+    <a:masterClrMapping/>
+  </p:clrMapOvr>
+</p:sld>
+</file>
+
+<file path=ppt/slides/slide17.xml><?xml version="1.0" encoding="utf-8"?>
+<p:sld xmlns:a="http://schemas.openxmlformats.org/drawingml/2006/main" xmlns:p="http://schemas.openxmlformats.org/presentationml/2006/main" xmlns:r="http://schemas.openxmlformats.org/officeDocument/2006/relationships">
+  <p:cSld>
+    <p:bg>
+      <p:bgPr>
+        <a:solidFill>
+          <a:srgbClr val="FFFFFF"/>
+        </a:solidFill>
+        <a:effectLst/>
+      </p:bgPr>
+    </p:bg>
+    <p:spTree>
+      <p:nvGrpSpPr>
+        <p:cNvPr id="1" name=""/>
+        <p:cNvGrpSpPr/>
+        <p:nvPr/>
+      </p:nvGrpSpPr>
+      <p:grpSpPr/>
+      <p:sp>
+        <p:nvSpPr>
+          <p:cNvPr id="2" name="TextBox 1"/>
+          <p:cNvSpPr txBox="1"/>
+          <p:nvPr/>
+        </p:nvSpPr>
+        <p:spPr>
+          <a:xfrm>
+            <a:off x="548640" y="777240"/>
+            <a:ext cx="10972800" cy="731520"/>
+          </a:xfrm>
+          <a:prstGeom prst="rect">
+            <a:avLst/>
+          </a:prstGeom>
+          <a:noFill/>
+        </p:spPr>
+        <p:txBody>
+          <a:bodyPr wrap="square">
+            <a:spAutoFit/>
+          </a:bodyPr>
+          <a:lstStyle/>
+          <a:p>
+            <a:pPr algn="l">
+              <a:defRPr sz="3400" b="1">
+                <a:solidFill>
+                  <a:srgbClr val="1E40AF"/>
+                </a:solidFill>
+              </a:defRPr>
+            </a:pPr>
+            <a:r>
+              <a:t>상황별 AI 활용 가이드 — 강의 후 참고</a:t>
+            </a:r>
+          </a:p>
+        </p:txBody>
+      </p:sp>
+      <p:sp>
+        <p:nvSpPr>
+          <p:cNvPr id="3" name="Rectangle 2"/>
+          <p:cNvSpPr/>
+          <p:nvPr/>
+        </p:nvSpPr>
+        <p:spPr>
+          <a:xfrm>
+            <a:off x="548640" y="1508760"/>
+            <a:ext cx="2560320" cy="64008"/>
+          </a:xfrm>
+          <a:prstGeom prst="rect">
+            <a:avLst/>
+          </a:prstGeom>
+          <a:solidFill>
+            <a:srgbClr val="F472B6"/>
+          </a:solidFill>
+          <a:ln>
+            <a:noFill/>
+          </a:ln>
+        </p:spPr>
+        <p:style>
+          <a:lnRef idx="1">
+            <a:schemeClr val="accent1"/>
+          </a:lnRef>
+          <a:fillRef idx="3">
+            <a:schemeClr val="accent1"/>
+          </a:fillRef>
+          <a:effectRef idx="2">
+            <a:schemeClr val="accent1"/>
+          </a:effectRef>
+          <a:fontRef idx="minor">
+            <a:schemeClr val="lt1"/>
+          </a:fontRef>
+        </p:style>
+        <p:txBody>
+          <a:bodyPr rtlCol="0" anchor="ctr"/>
+          <a:lstStyle/>
+          <a:p>
+            <a:pPr algn="ctr"/>
+          </a:p>
+        </p:txBody>
+      </p:sp>
+      <p:pic>
+        <p:nvPicPr>
+          <p:cNvPr id="4" name="Picture 3" descr="tool_choice.png"/>
+          <p:cNvPicPr>
+            <a:picLocks noChangeAspect="1"/>
+          </p:cNvPicPr>
+          <p:nvPr/>
+        </p:nvPicPr>
+        <p:blipFill>
+          <a:blip r:embed="rId2"/>
+          <a:stretch>
+            <a:fillRect/>
+          </a:stretch>
+        </p:blipFill>
+        <p:spPr>
+          <a:xfrm>
+            <a:off x="548640" y="1691640"/>
+            <a:ext cx="5669280" cy="2154326"/>
+          </a:xfrm>
+          <a:prstGeom prst="rect">
+            <a:avLst/>
+          </a:prstGeom>
+        </p:spPr>
+      </p:pic>
+      <p:sp>
+        <p:nvSpPr>
+          <p:cNvPr id="5" name="TextBox 4"/>
+          <p:cNvSpPr txBox="1"/>
+          <p:nvPr/>
+        </p:nvSpPr>
+        <p:spPr>
+          <a:xfrm>
+            <a:off x="6400800" y="1737360"/>
+            <a:ext cx="5303520" cy="3200400"/>
+          </a:xfrm>
+          <a:prstGeom prst="rect">
+            <a:avLst/>
+          </a:prstGeom>
+          <a:noFill/>
+        </p:spPr>
+        <p:txBody>
+          <a:bodyPr wrap="square">
+            <a:spAutoFit/>
+          </a:bodyPr>
+          <a:lstStyle/>
+          <a:p>
+            <a:pPr algn="l">
+              <a:spcAft>
+                <a:spcPts val="600"/>
+              </a:spcAft>
+              <a:defRPr sz="2200" b="0">
+                <a:solidFill>
+                  <a:srgbClr val="334155"/>
+                </a:solidFill>
+              </a:defRPr>
+            </a:pPr>
+            <a:r>
+              <a:t>규정·일정·세특·평가 → NotebookLM</a:t>
+            </a:r>
+          </a:p>
+          <a:p>
+            <a:pPr>
+              <a:spcAft>
+                <a:spcPts val="600"/>
+              </a:spcAft>
+              <a:defRPr sz="2200">
+                <a:solidFill>
+                  <a:srgbClr val="334155"/>
+                </a:solidFill>
+              </a:defRPr>
+            </a:pPr>
+            <a:r>
+              <a:t>가정통신문·슬라이드·설문·아이디어 → Gemini</a:t>
+            </a:r>
+          </a:p>
+          <a:p>
+            <a:pPr>
+              <a:spcAft>
+                <a:spcPts val="600"/>
+              </a:spcAft>
+              <a:defRPr sz="2200">
+                <a:solidFill>
+                  <a:srgbClr val="334155"/>
+                </a:solidFill>
+              </a:defRPr>
+            </a:pPr>
+            <a:r>
+              <a:t>가이드 [상황별 활용] + 검색창으로 프롬프트 바로 찾기</a:t>
+            </a:r>
+          </a:p>
+        </p:txBody>
+      </p:sp>
+      <p:pic>
+        <p:nvPicPr>
+          <p:cNvPr id="6" name="Picture 5" descr="situation_grid.png"/>
+          <p:cNvPicPr>
+            <a:picLocks noChangeAspect="1"/>
+          </p:cNvPicPr>
+          <p:nvPr/>
+        </p:nvPicPr>
+        <p:blipFill>
+          <a:blip r:embed="rId3"/>
+          <a:stretch>
+            <a:fillRect/>
+          </a:stretch>
+        </p:blipFill>
+        <p:spPr>
+          <a:xfrm>
+            <a:off x="548640" y="4389120"/>
+            <a:ext cx="5669280" cy="2319251"/>
+          </a:xfrm>
+          <a:prstGeom prst="rect">
+            <a:avLst/>
+          </a:prstGeom>
+        </p:spPr>
+      </p:pic>
+      <p:sp>
+        <p:nvSpPr>
+          <p:cNvPr id="7" name="TextBox 6"/>
+          <p:cNvSpPr txBox="1"/>
+          <p:nvPr/>
+        </p:nvSpPr>
+        <p:spPr>
+          <a:xfrm>
+            <a:off x="11155680" y="6446520"/>
+            <a:ext cx="731520" cy="320040"/>
+          </a:xfrm>
+          <a:prstGeom prst="rect">
+            <a:avLst/>
+          </a:prstGeom>
+          <a:noFill/>
+        </p:spPr>
+        <p:txBody>
+          <a:bodyPr wrap="square">
+            <a:spAutoFit/>
+          </a:bodyPr>
+          <a:lstStyle/>
+          <a:p>
+            <a:pPr algn="r">
+              <a:defRPr sz="1400" b="0">
+                <a:solidFill>
+                  <a:srgbClr val="64748B"/>
+                </a:solidFill>
+              </a:defRPr>
+            </a:pPr>
+            <a:r>
+              <a:t>17</a:t>
+            </a:r>
+          </a:p>
+        </p:txBody>
+      </p:sp>
+    </p:spTree>
+  </p:cSld>
+  <p:clrMapOvr>
+    <a:masterClrMapping/>
+  </p:clrMapOvr>
+</p:sld>
+</file>
+
+<file path=ppt/slides/slide18.xml><?xml version="1.0" encoding="utf-8"?>
+<p:sld xmlns:a="http://schemas.openxmlformats.org/drawingml/2006/main" xmlns:p="http://schemas.openxmlformats.org/presentationml/2006/main" xmlns:r="http://schemas.openxmlformats.org/officeDocument/2006/relationships">
+  <p:cSld>
+    <p:bg>
+      <p:bgPr>
+        <a:solidFill>
+          <a:srgbClr val="F0F9FF"/>
+        </a:solidFill>
+        <a:effectLst/>
+      </p:bgPr>
+    </p:bg>
+    <p:spTree>
+      <p:nvGrpSpPr>
+        <p:cNvPr id="1" name=""/>
+        <p:cNvGrpSpPr/>
+        <p:nvPr/>
+      </p:nvGrpSpPr>
+      <p:grpSpPr/>
+      <p:sp>
+        <p:nvSpPr>
+          <p:cNvPr id="2" name="Rectangle 1"/>
+          <p:cNvSpPr/>
+          <p:nvPr/>
+        </p:nvSpPr>
+        <p:spPr>
+          <a:xfrm>
+            <a:off x="0" y="0"/>
+            <a:ext cx="12191695" cy="91440"/>
+          </a:xfrm>
+          <a:prstGeom prst="rect">
+            <a:avLst/>
+          </a:prstGeom>
+          <a:solidFill>
+            <a:srgbClr val="F472B6"/>
+          </a:solidFill>
+          <a:ln>
+            <a:noFill/>
+          </a:ln>
+        </p:spPr>
+        <p:style>
+          <a:lnRef idx="1">
+            <a:schemeClr val="accent1"/>
+          </a:lnRef>
+          <a:fillRef idx="3">
+            <a:schemeClr val="accent1"/>
+          </a:fillRef>
+          <a:effectRef idx="2">
+            <a:schemeClr val="accent1"/>
+          </a:effectRef>
+          <a:fontRef idx="minor">
+            <a:schemeClr val="lt1"/>
+          </a:fontRef>
+        </p:style>
+        <p:txBody>
+          <a:bodyPr rtlCol="0" anchor="ctr"/>
+          <a:lstStyle/>
+          <a:p>
+            <a:pPr algn="ctr"/>
+          </a:p>
+        </p:txBody>
+      </p:sp>
+      <p:sp>
+        <p:nvSpPr>
+          <p:cNvPr id="3" name="TextBox 2"/>
+          <p:cNvSpPr txBox="1"/>
+          <p:nvPr/>
+        </p:nvSpPr>
+        <p:spPr>
+          <a:xfrm>
+            <a:off x="548640" y="777240"/>
+            <a:ext cx="10972800" cy="731520"/>
+          </a:xfrm>
+          <a:prstGeom prst="rect">
+            <a:avLst/>
+          </a:prstGeom>
+          <a:noFill/>
+        </p:spPr>
+        <p:txBody>
+          <a:bodyPr wrap="square">
+            <a:spAutoFit/>
+          </a:bodyPr>
+          <a:lstStyle/>
+          <a:p>
+            <a:pPr algn="l">
+              <a:defRPr sz="3400" b="1">
+                <a:solidFill>
+                  <a:srgbClr val="1E40AF"/>
+                </a:solidFill>
+              </a:defRPr>
+            </a:pPr>
+            <a:r>
+              <a:t>마무리 — AI는 선생님의 파트너</a:t>
+            </a:r>
+          </a:p>
+        </p:txBody>
+      </p:sp>
+      <p:sp>
+        <p:nvSpPr>
+          <p:cNvPr id="4" name="Rectangle 3"/>
+          <p:cNvSpPr/>
+          <p:nvPr/>
+        </p:nvSpPr>
+        <p:spPr>
+          <a:xfrm>
+            <a:off x="548640" y="1508760"/>
+            <a:ext cx="2560320" cy="64008"/>
+          </a:xfrm>
+          <a:prstGeom prst="rect">
+            <a:avLst/>
+          </a:prstGeom>
+          <a:solidFill>
+            <a:srgbClr val="F472B6"/>
+          </a:solidFill>
+          <a:ln>
+            <a:noFill/>
+          </a:ln>
+        </p:spPr>
+        <p:style>
+          <a:lnRef idx="1">
+            <a:schemeClr val="accent1"/>
+          </a:lnRef>
+          <a:fillRef idx="3">
+            <a:schemeClr val="accent1"/>
+          </a:fillRef>
+          <a:effectRef idx="2">
+            <a:schemeClr val="accent1"/>
+          </a:effectRef>
+          <a:fontRef idx="minor">
+            <a:schemeClr val="lt1"/>
+          </a:fontRef>
+        </p:style>
+        <p:txBody>
+          <a:bodyPr rtlCol="0" anchor="ctr"/>
+          <a:lstStyle/>
+          <a:p>
+            <a:pPr algn="ctr"/>
+          </a:p>
+        </p:txBody>
+      </p:sp>
+      <p:sp>
+        <p:nvSpPr>
+          <p:cNvPr id="5" name="Rectangle 4"/>
+          <p:cNvSpPr/>
+          <p:nvPr/>
+        </p:nvSpPr>
+        <p:spPr>
+          <a:xfrm>
+            <a:off x="548640" y="1828800"/>
+            <a:ext cx="3566160" cy="2560320"/>
+          </a:xfrm>
+          <a:prstGeom prst="rect">
+            <a:avLst/>
+          </a:prstGeom>
+          <a:solidFill>
+            <a:srgbClr val="FFFFFF"/>
+          </a:solidFill>
+          <a:ln>
+            <a:solidFill>
+              <a:srgbClr val="DBEAFE"/>
+            </a:solidFill>
+          </a:ln>
+        </p:spPr>
+        <p:style>
+          <a:lnRef idx="1">
+            <a:schemeClr val="accent1"/>
+          </a:lnRef>
+          <a:fillRef idx="3">
+            <a:schemeClr val="accent1"/>
+          </a:fillRef>
+          <a:effectRef idx="2">
+            <a:schemeClr val="accent1"/>
+          </a:effectRef>
+          <a:fontRef idx="minor">
+            <a:schemeClr val="lt1"/>
+          </a:fontRef>
+        </p:style>
+        <p:txBody>
+          <a:bodyPr rtlCol="0" anchor="ctr"/>
+          <a:lstStyle/>
+          <a:p>
+            <a:pPr algn="ctr"/>
+          </a:p>
+        </p:txBody>
+      </p:sp>
+      <p:sp>
+        <p:nvSpPr>
+          <p:cNvPr id="6" name="TextBox 5"/>
+          <p:cNvSpPr txBox="1"/>
+          <p:nvPr/>
+        </p:nvSpPr>
+        <p:spPr>
+          <a:xfrm>
+            <a:off x="731520" y="2011680"/>
+            <a:ext cx="3200400" cy="548640"/>
+          </a:xfrm>
+          <a:prstGeom prst="rect">
+            <a:avLst/>
+          </a:prstGeom>
+          <a:noFill/>
+        </p:spPr>
+        <p:txBody>
+          <a:bodyPr wrap="square">
+            <a:spAutoFit/>
+          </a:bodyPr>
+          <a:lstStyle/>
+          <a:p>
+            <a:pPr algn="l">
+              <a:defRPr sz="2400" b="1">
+                <a:solidFill>
+                  <a:srgbClr val="1E40AF"/>
+                </a:solidFill>
+              </a:defRPr>
+            </a:pPr>
+            <a:r>
+              <a:t>🔒 개인정보 보호</a:t>
+            </a:r>
+          </a:p>
+        </p:txBody>
+      </p:sp>
+      <p:sp>
+        <p:nvSpPr>
+          <p:cNvPr id="7" name="TextBox 6"/>
+          <p:cNvSpPr txBox="1"/>
+          <p:nvPr/>
+        </p:nvSpPr>
+        <p:spPr>
+          <a:xfrm>
+            <a:off x="731520" y="2743200"/>
+            <a:ext cx="3200400" cy="1371600"/>
+          </a:xfrm>
+          <a:prstGeom prst="rect">
+            <a:avLst/>
+          </a:prstGeom>
+          <a:noFill/>
+        </p:spPr>
+        <p:txBody>
+          <a:bodyPr wrap="square">
+            <a:spAutoFit/>
+          </a:bodyPr>
+          <a:lstStyle/>
+          <a:p>
+            <a:pPr algn="l">
+              <a:defRPr sz="2000" b="0">
+                <a:solidFill>
+                  <a:srgbClr val="334155"/>
+                </a:solidFill>
+              </a:defRPr>
+            </a:pPr>
+            <a:r>
+              <a:t>학생 실명·연락처 등 민감 정보는 AI에 입력 금지</a:t>
+            </a:r>
+          </a:p>
+        </p:txBody>
+      </p:sp>
+      <p:sp>
+        <p:nvSpPr>
+          <p:cNvPr id="8" name="Rectangle 7"/>
+          <p:cNvSpPr/>
+          <p:nvPr/>
+        </p:nvSpPr>
+        <p:spPr>
+          <a:xfrm>
+            <a:off x="4389120" y="1828800"/>
+            <a:ext cx="3566160" cy="2560320"/>
+          </a:xfrm>
+          <a:prstGeom prst="rect">
+            <a:avLst/>
+          </a:prstGeom>
+          <a:solidFill>
+            <a:srgbClr val="FFFFFF"/>
+          </a:solidFill>
+          <a:ln>
+            <a:solidFill>
+              <a:srgbClr val="DBEAFE"/>
+            </a:solidFill>
+          </a:ln>
+        </p:spPr>
+        <p:style>
+          <a:lnRef idx="1">
+            <a:schemeClr val="accent1"/>
+          </a:lnRef>
+          <a:fillRef idx="3">
+            <a:schemeClr val="accent1"/>
+          </a:fillRef>
+          <a:effectRef idx="2">
+            <a:schemeClr val="accent1"/>
+          </a:effectRef>
+          <a:fontRef idx="minor">
+            <a:schemeClr val="lt1"/>
+          </a:fontRef>
+        </p:style>
+        <p:txBody>
+          <a:bodyPr rtlCol="0" anchor="ctr"/>
+          <a:lstStyle/>
+          <a:p>
+            <a:pPr algn="ctr"/>
+          </a:p>
+        </p:txBody>
+      </p:sp>
+      <p:sp>
+        <p:nvSpPr>
+          <p:cNvPr id="9" name="TextBox 8"/>
+          <p:cNvSpPr txBox="1"/>
+          <p:nvPr/>
+        </p:nvSpPr>
+        <p:spPr>
+          <a:xfrm>
+            <a:off x="4572000" y="2011680"/>
+            <a:ext cx="3200400" cy="548640"/>
+          </a:xfrm>
+          <a:prstGeom prst="rect">
+            <a:avLst/>
+          </a:prstGeom>
+          <a:noFill/>
+        </p:spPr>
+        <p:txBody>
+          <a:bodyPr wrap="square">
+            <a:spAutoFit/>
+          </a:bodyPr>
+          <a:lstStyle/>
+          <a:p>
+            <a:pPr algn="l">
+              <a:defRPr sz="2400" b="1">
+                <a:solidFill>
+                  <a:srgbClr val="1E40AF"/>
+                </a:solidFill>
+              </a:defRPr>
+            </a:pPr>
+            <a:r>
+              <a:t>🔍 사실 확인</a:t>
+            </a:r>
+          </a:p>
+        </p:txBody>
+      </p:sp>
+      <p:sp>
+        <p:nvSpPr>
+          <p:cNvPr id="10" name="TextBox 9"/>
+          <p:cNvSpPr txBox="1"/>
+          <p:nvPr/>
+        </p:nvSpPr>
+        <p:spPr>
+          <a:xfrm>
+            <a:off x="4572000" y="2743200"/>
+            <a:ext cx="3200400" cy="1371600"/>
+          </a:xfrm>
+          <a:prstGeom prst="rect">
+            <a:avLst/>
+          </a:prstGeom>
+          <a:noFill/>
+        </p:spPr>
+        <p:txBody>
+          <a:bodyPr wrap="square">
+            <a:spAutoFit/>
+          </a:bodyPr>
+          <a:lstStyle/>
+          <a:p>
+            <a:pPr algn="l">
+              <a:defRPr sz="2000" b="0">
+                <a:solidFill>
+                  <a:srgbClr val="334155"/>
+                </a:solidFill>
+              </a:defRPr>
+            </a:pPr>
+            <a:r>
+              <a:t>AI 생성 정보는 공신력 있는 자료로 재확인</a:t>
+            </a:r>
+          </a:p>
+        </p:txBody>
+      </p:sp>
+      <p:sp>
+        <p:nvSpPr>
+          <p:cNvPr id="11" name="Rectangle 10"/>
+          <p:cNvSpPr/>
+          <p:nvPr/>
+        </p:nvSpPr>
+        <p:spPr>
+          <a:xfrm>
+            <a:off x="8229600" y="1828800"/>
+            <a:ext cx="3566160" cy="2560320"/>
+          </a:xfrm>
+          <a:prstGeom prst="rect">
+            <a:avLst/>
+          </a:prstGeom>
+          <a:solidFill>
+            <a:srgbClr val="FFFFFF"/>
+          </a:solidFill>
+          <a:ln>
+            <a:solidFill>
+              <a:srgbClr val="DBEAFE"/>
+            </a:solidFill>
+          </a:ln>
+        </p:spPr>
+        <p:style>
+          <a:lnRef idx="1">
+            <a:schemeClr val="accent1"/>
+          </a:lnRef>
+          <a:fillRef idx="3">
+            <a:schemeClr val="accent1"/>
+          </a:fillRef>
+          <a:effectRef idx="2">
+            <a:schemeClr val="accent1"/>
+          </a:effectRef>
+          <a:fontRef idx="minor">
+            <a:schemeClr val="lt1"/>
+          </a:fontRef>
+        </p:style>
+        <p:txBody>
+          <a:bodyPr rtlCol="0" anchor="ctr"/>
+          <a:lstStyle/>
+          <a:p>
+            <a:pPr algn="ctr"/>
+          </a:p>
+        </p:txBody>
+      </p:sp>
+      <p:sp>
+        <p:nvSpPr>
+          <p:cNvPr id="12" name="TextBox 11"/>
+          <p:cNvSpPr txBox="1"/>
+          <p:nvPr/>
+        </p:nvSpPr>
+        <p:spPr>
+          <a:xfrm>
+            <a:off x="8412480" y="2011680"/>
+            <a:ext cx="3200400" cy="548640"/>
+          </a:xfrm>
+          <a:prstGeom prst="rect">
+            <a:avLst/>
+          </a:prstGeom>
+          <a:noFill/>
+        </p:spPr>
+        <p:txBody>
+          <a:bodyPr wrap="square">
+            <a:spAutoFit/>
+          </a:bodyPr>
+          <a:lstStyle/>
+          <a:p>
+            <a:pPr algn="l">
+              <a:defRPr sz="2400" b="1">
+                <a:solidFill>
+                  <a:srgbClr val="1E40AF"/>
+                </a:solidFill>
+              </a:defRPr>
+            </a:pPr>
+            <a:r>
+              <a:t>✅ 최종 판단</a:t>
+            </a:r>
+          </a:p>
+        </p:txBody>
+      </p:sp>
+      <p:sp>
+        <p:nvSpPr>
+          <p:cNvPr id="13" name="TextBox 12"/>
+          <p:cNvSpPr txBox="1"/>
+          <p:nvPr/>
+        </p:nvSpPr>
+        <p:spPr>
+          <a:xfrm>
+            <a:off x="8412480" y="2743200"/>
+            <a:ext cx="3200400" cy="1371600"/>
+          </a:xfrm>
+          <a:prstGeom prst="rect">
+            <a:avLst/>
+          </a:prstGeom>
+          <a:noFill/>
+        </p:spPr>
+        <p:txBody>
+          <a:bodyPr wrap="square">
+            <a:spAutoFit/>
+          </a:bodyPr>
+          <a:lstStyle/>
+          <a:p>
+            <a:pPr algn="l">
+              <a:defRPr sz="2000" b="0">
+                <a:solidFill>
+                  <a:srgbClr val="334155"/>
+                </a:solidFill>
+              </a:defRPr>
+            </a:pPr>
+            <a:r>
+              <a:t>모든 교육적 판단의 책임은 선생님에게</a:t>
+            </a:r>
+          </a:p>
+        </p:txBody>
+      </p:sp>
+      <p:sp>
+        <p:nvSpPr>
+          <p:cNvPr id="14" name="TextBox 13"/>
+          <p:cNvSpPr txBox="1"/>
+          <p:nvPr/>
+        </p:nvSpPr>
+        <p:spPr>
+          <a:xfrm>
+            <a:off x="731520" y="4754880"/>
+            <a:ext cx="10515600" cy="731520"/>
+          </a:xfrm>
+          <a:prstGeom prst="rect">
+            <a:avLst/>
+          </a:prstGeom>
+          <a:noFill/>
+        </p:spPr>
+        <p:txBody>
+          <a:bodyPr wrap="square">
+            <a:spAutoFit/>
+          </a:bodyPr>
+          <a:lstStyle/>
+          <a:p>
+            <a:pPr algn="ctr">
+              <a:defRPr sz="2200" b="1">
+                <a:solidFill>
+                  <a:srgbClr val="1E40AF"/>
+                </a:solidFill>
+              </a:defRPr>
+            </a:pPr>
+            <a:r>
+              <a:t>AI는 선생님을 대체하지 않고, 아이들과의 정서적 교감에 더 집중하도록 돕습니다.</a:t>
+            </a:r>
+          </a:p>
+        </p:txBody>
+      </p:sp>
+      <p:sp>
+        <p:nvSpPr>
+          <p:cNvPr id="15" name="TextBox 14"/>
+          <p:cNvSpPr txBox="1"/>
+          <p:nvPr/>
+        </p:nvSpPr>
+        <p:spPr>
+          <a:xfrm>
+            <a:off x="731520" y="5669280"/>
+            <a:ext cx="10515600" cy="457200"/>
+          </a:xfrm>
+          <a:prstGeom prst="rect">
+            <a:avLst/>
+          </a:prstGeom>
+          <a:noFill/>
+        </p:spPr>
+        <p:txBody>
+          <a:bodyPr wrap="square">
+            <a:spAutoFit/>
+          </a:bodyPr>
+          <a:lstStyle/>
+          <a:p>
+            <a:pPr algn="ctr">
+              <a:defRPr sz="2400" b="0">
+                <a:solidFill>
+                  <a:srgbClr val="F472B6"/>
+                </a:solidFill>
+              </a:defRPr>
+            </a:pPr>
+            <a:r>
+              <a:t>실습 가이드 링크 공유  →  Q&amp;A</a:t>
+            </a:r>
+          </a:p>
+        </p:txBody>
+      </p:sp>
+      <p:sp>
+        <p:nvSpPr>
+          <p:cNvPr id="16" name="TextBox 15"/>
+          <p:cNvSpPr txBox="1"/>
+          <p:nvPr/>
+        </p:nvSpPr>
+        <p:spPr>
+          <a:xfrm>
+            <a:off x="11155680" y="6446520"/>
+            <a:ext cx="731520" cy="320040"/>
+          </a:xfrm>
+          <a:prstGeom prst="rect">
+            <a:avLst/>
+          </a:prstGeom>
+          <a:noFill/>
+        </p:spPr>
+        <p:txBody>
+          <a:bodyPr wrap="square">
+            <a:spAutoFit/>
+          </a:bodyPr>
+          <a:lstStyle/>
+          <a:p>
+            <a:pPr algn="r">
+              <a:defRPr sz="1400" b="0">
+                <a:solidFill>
+                  <a:srgbClr val="64748B"/>
+                </a:solidFill>
+              </a:defRPr>
+            </a:pPr>
+            <a:r>
+              <a:t>18</a:t>
             </a:r>
           </a:p>
         </p:txBody>
@@ -4621,57 +8841,14 @@
       <p:grpSpPr/>
       <p:sp>
         <p:nvSpPr>
-          <p:cNvPr id="2" name="Rectangle 1"/>
-          <p:cNvSpPr/>
-          <p:nvPr/>
-        </p:nvSpPr>
-        <p:spPr>
-          <a:xfrm>
-            <a:off x="0" y="0"/>
-            <a:ext cx="12191695" cy="109728"/>
-          </a:xfrm>
-          <a:prstGeom prst="rect">
-            <a:avLst/>
-          </a:prstGeom>
-          <a:solidFill>
-            <a:srgbClr val="3B82F6"/>
-          </a:solidFill>
-          <a:ln>
-            <a:noFill/>
-          </a:ln>
-        </p:spPr>
-        <p:style>
-          <a:lnRef idx="1">
-            <a:schemeClr val="accent1"/>
-          </a:lnRef>
-          <a:fillRef idx="3">
-            <a:schemeClr val="accent1"/>
-          </a:fillRef>
-          <a:effectRef idx="2">
-            <a:schemeClr val="accent1"/>
-          </a:effectRef>
-          <a:fontRef idx="minor">
-            <a:schemeClr val="lt1"/>
-          </a:fontRef>
-        </p:style>
-        <p:txBody>
-          <a:bodyPr rtlCol="0" anchor="ctr"/>
-          <a:lstStyle/>
-          <a:p>
-            <a:pPr algn="ctr"/>
-          </a:p>
-        </p:txBody>
-      </p:sp>
-      <p:sp>
-        <p:nvSpPr>
-          <p:cNvPr id="3" name="TextBox 2"/>
+          <p:cNvPr id="2" name="TextBox 1"/>
           <p:cNvSpPr txBox="1"/>
           <p:nvPr/>
         </p:nvSpPr>
         <p:spPr>
           <a:xfrm>
-            <a:off x="640080" y="868680"/>
-            <a:ext cx="10515600" cy="822960"/>
+            <a:off x="548640" y="777240"/>
+            <a:ext cx="10972800" cy="731520"/>
           </a:xfrm>
           <a:prstGeom prst="rect">
             <a:avLst/>
@@ -4685,7 +8862,7 @@
           <a:lstStyle/>
           <a:p>
             <a:pPr algn="l">
-              <a:defRPr sz="3000" b="1">
+              <a:defRPr sz="3400" b="1">
                 <a:solidFill>
                   <a:srgbClr val="1E40AF"/>
                 </a:solidFill>
@@ -4699,14 +8876,14 @@
       </p:sp>
       <p:sp>
         <p:nvSpPr>
-          <p:cNvPr id="4" name="Rectangle 3"/>
+          <p:cNvPr id="3" name="Rectangle 2"/>
           <p:cNvSpPr/>
           <p:nvPr/>
         </p:nvSpPr>
         <p:spPr>
           <a:xfrm>
-            <a:off x="640080" y="1691640"/>
-            <a:ext cx="2286000" cy="54864"/>
+            <a:off x="548640" y="1508760"/>
+            <a:ext cx="2560320" cy="64008"/>
           </a:xfrm>
           <a:prstGeom prst="rect">
             <a:avLst/>
@@ -4740,6 +8917,30 @@
           </a:p>
         </p:txBody>
       </p:sp>
+      <p:pic>
+        <p:nvPicPr>
+          <p:cNvPr id="4" name="Picture 3" descr="roadmap.png"/>
+          <p:cNvPicPr>
+            <a:picLocks noChangeAspect="1"/>
+          </p:cNvPicPr>
+          <p:nvPr/>
+        </p:nvPicPr>
+        <p:blipFill>
+          <a:blip r:embed="rId2"/>
+          <a:stretch>
+            <a:fillRect/>
+          </a:stretch>
+        </p:blipFill>
+        <p:spPr>
+          <a:xfrm>
+            <a:off x="548640" y="1737360"/>
+            <a:ext cx="10972800" cy="3657600"/>
+          </a:xfrm>
+          <a:prstGeom prst="rect">
+            <a:avLst/>
+          </a:prstGeom>
+        </p:spPr>
+      </p:pic>
       <p:sp>
         <p:nvSpPr>
           <p:cNvPr id="5" name="TextBox 4"/>
@@ -4748,8 +8949,8 @@
         </p:nvSpPr>
         <p:spPr>
           <a:xfrm>
-            <a:off x="822960" y="1920240"/>
-            <a:ext cx="10241280" cy="4389120"/>
+            <a:off x="731520" y="5029200"/>
+            <a:ext cx="10515600" cy="1371600"/>
           </a:xfrm>
           <a:prstGeom prst="rect">
             <a:avLst/>
@@ -4764,76 +8965,46 @@
           <a:p>
             <a:pPr algn="l">
               <a:spcAft>
-                <a:spcPts val="1000"/>
+                <a:spcPts val="600"/>
               </a:spcAft>
-              <a:defRPr sz="1700" b="0">
+              <a:defRPr sz="2200" b="0">
                 <a:solidFill>
                   <a:srgbClr val="334155"/>
                 </a:solidFill>
               </a:defRPr>
             </a:pPr>
             <a:r>
-              <a:t>목표 ① 광주아이온 접속과 Gemini·NotebookLM 기본 사용법 익히기</a:t>
+              <a:t>목표 ① 광주아이온 접속 · Gemini · NotebookLM 기본 익히기</a:t>
             </a:r>
           </a:p>
           <a:p>
             <a:pPr>
               <a:spcAft>
-                <a:spcPts val="1000"/>
+                <a:spcPts val="600"/>
               </a:spcAft>
-              <a:defRPr sz="1700">
+              <a:defRPr sz="2200">
                 <a:solidFill>
                   <a:srgbClr val="334155"/>
                 </a:solidFill>
               </a:defRPr>
             </a:pPr>
             <a:r>
-              <a:t>목표 ② 수업·업무에 바로 쓸 수 있는 프롬프트 실습하기</a:t>
+              <a:t>목표 ② 수업·업무에 바로 쓸 프롬프트 실습</a:t>
             </a:r>
           </a:p>
           <a:p>
             <a:pPr>
               <a:spcAft>
-                <a:spcPts val="1000"/>
+                <a:spcPts val="600"/>
               </a:spcAft>
-              <a:defRPr sz="1700">
+              <a:defRPr sz="2200">
                 <a:solidFill>
                   <a:srgbClr val="334155"/>
                 </a:solidFill>
               </a:defRPr>
             </a:pPr>
             <a:r>
-              <a:t>목표 ③ 강의 후 스스로 활용할 수 있는 가이드 확보하기</a:t>
-            </a:r>
-          </a:p>
-          <a:p>
-            <a:pPr>
-              <a:spcAft>
-                <a:spcPts val="1000"/>
-              </a:spcAft>
-              <a:defRPr sz="1700">
-                <a:solidFill>
-                  <a:srgbClr val="334155"/>
-                </a:solidFill>
-              </a:defRPr>
-            </a:pPr>
-            <a:r>
-              <a:t>0~5분 아이온 → 5~20분 NotebookLM → 20~32분 업무 활용</a:t>
-            </a:r>
-          </a:p>
-          <a:p>
-            <a:pPr>
-              <a:spcAft>
-                <a:spcPts val="1000"/>
-              </a:spcAft>
-              <a:defRPr sz="1700">
-                <a:solidFill>
-                  <a:srgbClr val="334155"/>
-                </a:solidFill>
-              </a:defRPr>
-            </a:pPr>
-            <a:r>
-              <a:t>32~45분 Gemini → 45~50분 마무리 &amp; Q&amp;A</a:t>
+              <a:t>목표 ③ 강의 후 스스로 활용할 가이드 확보</a:t>
             </a:r>
           </a:p>
         </p:txBody>
@@ -4846,7 +9017,7 @@
         </p:nvSpPr>
         <p:spPr>
           <a:xfrm>
-            <a:off x="11247120" y="6446520"/>
+            <a:off x="11155680" y="6446520"/>
             <a:ext cx="731520" cy="320040"/>
           </a:xfrm>
           <a:prstGeom prst="rect">
@@ -4861,7 +9032,7 @@
           <a:lstStyle/>
           <a:p>
             <a:pPr algn="r">
-              <a:defRPr sz="1100" b="0">
+              <a:defRPr sz="1400" b="0">
                 <a:solidFill>
                   <a:srgbClr val="64748B"/>
                 </a:solidFill>
@@ -4901,57 +9072,14 @@
       <p:grpSpPr/>
       <p:sp>
         <p:nvSpPr>
-          <p:cNvPr id="2" name="Rectangle 1"/>
-          <p:cNvSpPr/>
-          <p:nvPr/>
-        </p:nvSpPr>
-        <p:spPr>
-          <a:xfrm>
-            <a:off x="0" y="0"/>
-            <a:ext cx="12191695" cy="109728"/>
-          </a:xfrm>
-          <a:prstGeom prst="rect">
-            <a:avLst/>
-          </a:prstGeom>
-          <a:solidFill>
-            <a:srgbClr val="3B82F6"/>
-          </a:solidFill>
-          <a:ln>
-            <a:noFill/>
-          </a:ln>
-        </p:spPr>
-        <p:style>
-          <a:lnRef idx="1">
-            <a:schemeClr val="accent1"/>
-          </a:lnRef>
-          <a:fillRef idx="3">
-            <a:schemeClr val="accent1"/>
-          </a:fillRef>
-          <a:effectRef idx="2">
-            <a:schemeClr val="accent1"/>
-          </a:effectRef>
-          <a:fontRef idx="minor">
-            <a:schemeClr val="lt1"/>
-          </a:fontRef>
-        </p:style>
-        <p:txBody>
-          <a:bodyPr rtlCol="0" anchor="ctr"/>
-          <a:lstStyle/>
-          <a:p>
-            <a:pPr algn="ctr"/>
-          </a:p>
-        </p:txBody>
-      </p:sp>
-      <p:sp>
-        <p:nvSpPr>
-          <p:cNvPr id="3" name="TextBox 2"/>
+          <p:cNvPr id="2" name="TextBox 1"/>
           <p:cNvSpPr txBox="1"/>
           <p:nvPr/>
         </p:nvSpPr>
         <p:spPr>
           <a:xfrm>
-            <a:off x="640080" y="868680"/>
-            <a:ext cx="10515600" cy="822960"/>
+            <a:off x="548640" y="777240"/>
+            <a:ext cx="10972800" cy="731520"/>
           </a:xfrm>
           <a:prstGeom prst="rect">
             <a:avLst/>
@@ -4965,7 +9093,7 @@
           <a:lstStyle/>
           <a:p>
             <a:pPr algn="l">
-              <a:defRPr sz="3000" b="1">
+              <a:defRPr sz="3400" b="1">
                 <a:solidFill>
                   <a:srgbClr val="1E40AF"/>
                 </a:solidFill>
@@ -4979,14 +9107,14 @@
       </p:sp>
       <p:sp>
         <p:nvSpPr>
-          <p:cNvPr id="4" name="Rectangle 3"/>
+          <p:cNvPr id="3" name="Rectangle 2"/>
           <p:cNvSpPr/>
           <p:nvPr/>
         </p:nvSpPr>
         <p:spPr>
           <a:xfrm>
-            <a:off x="640080" y="1691640"/>
-            <a:ext cx="2286000" cy="54864"/>
+            <a:off x="548640" y="1508760"/>
+            <a:ext cx="2560320" cy="64008"/>
           </a:xfrm>
           <a:prstGeom prst="rect">
             <a:avLst/>
@@ -5020,6 +9148,30 @@
           </a:p>
         </p:txBody>
       </p:sp>
+      <p:pic>
+        <p:nvPicPr>
+          <p:cNvPr id="4" name="Picture 3" descr="quick_start.png"/>
+          <p:cNvPicPr>
+            <a:picLocks noChangeAspect="1"/>
+          </p:cNvPicPr>
+          <p:nvPr/>
+        </p:nvPicPr>
+        <p:blipFill>
+          <a:blip r:embed="rId2"/>
+          <a:stretch>
+            <a:fillRect/>
+          </a:stretch>
+        </p:blipFill>
+        <p:spPr>
+          <a:xfrm>
+            <a:off x="548640" y="1737360"/>
+            <a:ext cx="10972800" cy="3790604"/>
+          </a:xfrm>
+          <a:prstGeom prst="rect">
+            <a:avLst/>
+          </a:prstGeom>
+        </p:spPr>
+      </p:pic>
       <p:sp>
         <p:nvSpPr>
           <p:cNvPr id="5" name="TextBox 4"/>
@@ -5028,8 +9180,8 @@
         </p:nvSpPr>
         <p:spPr>
           <a:xfrm>
-            <a:off x="822960" y="1920240"/>
-            <a:ext cx="10241280" cy="4389120"/>
+            <a:off x="731520" y="5029200"/>
+            <a:ext cx="10515600" cy="1371600"/>
           </a:xfrm>
           <a:prstGeom prst="rect">
             <a:avLst/>
@@ -5044,76 +9196,31 @@
           <a:p>
             <a:pPr algn="l">
               <a:spcAft>
-                <a:spcPts val="1000"/>
+                <a:spcPts val="600"/>
               </a:spcAft>
-              <a:defRPr sz="1700" b="0">
+              <a:defRPr sz="2200" b="0">
                 <a:solidFill>
                   <a:srgbClr val="334155"/>
                 </a:solidFill>
               </a:defRPr>
             </a:pPr>
             <a:r>
-              <a:t>STEP 1  광주아이온(aion.gen.go.kr) 접속 → teacher@genedu.kr 로그인</a:t>
+              <a:t>글자가 작으면 가이드 [가+] 버튼  |  용어는 [AI 기초 도움말]</a:t>
             </a:r>
           </a:p>
           <a:p>
             <a:pPr>
               <a:spcAft>
-                <a:spcPts val="1000"/>
+                <a:spcPts val="600"/>
               </a:spcAft>
-              <a:defRPr sz="1700">
+              <a:defRPr sz="2200">
                 <a:solidFill>
                   <a:srgbClr val="334155"/>
                 </a:solidFill>
               </a:defRPr>
             </a:pPr>
             <a:r>
-              <a:t>STEP 2  가이드 페이지의 [복사] 버튼으로 프롬프트 복사 → AI에 붙여넣기</a:t>
-            </a:r>
-          </a:p>
-          <a:p>
-            <a:pPr>
-              <a:spcAft>
-                <a:spcPts val="1000"/>
-              </a:spcAft>
-              <a:defRPr sz="1700">
-                <a:solidFill>
-                  <a:srgbClr val="334155"/>
-                </a:solidFill>
-              </a:defRPr>
-            </a:pPr>
-            <a:r>
-              <a:t>STEP 3  AI 결과는 '초안' — 선생님이 꼭 확인하고 수정 후 사용</a:t>
-            </a:r>
-          </a:p>
-          <a:p>
-            <a:pPr>
-              <a:spcAft>
-                <a:spcPts val="1000"/>
-              </a:spcAft>
-              <a:defRPr sz="1700">
-                <a:solidFill>
-                  <a:srgbClr val="334155"/>
-                </a:solidFill>
-              </a:defRPr>
-            </a:pPr>
-            <a:r>
-              <a:t>💡 글자가 작으면 가이드 상단 [가+] 버튼  |  용어는 [AI 기초 도움말] 참고</a:t>
-            </a:r>
-          </a:p>
-          <a:p>
-            <a:pPr>
-              <a:spcAft>
-                <a:spcPts val="1000"/>
-              </a:spcAft>
-              <a:defRPr sz="1700">
-                <a:solidFill>
-                  <a:srgbClr val="334155"/>
-                </a:solidFill>
-              </a:defRPr>
-            </a:pPr>
-            <a:r>
-              <a:t>📌 강의 후에도 이 링크만 있으면 언제든 따라하실 수 있습니다</a:t>
+              <a:t>📌 이 페이지 링크를 저장하면 강의 후에도 언제든 따라할 수 있습니다</a:t>
             </a:r>
           </a:p>
         </p:txBody>
@@ -5126,7 +9233,7 @@
         </p:nvSpPr>
         <p:spPr>
           <a:xfrm>
-            <a:off x="11247120" y="6446520"/>
+            <a:off x="11155680" y="6446520"/>
             <a:ext cx="731520" cy="320040"/>
           </a:xfrm>
           <a:prstGeom prst="rect">
@@ -5141,7 +9248,7 @@
           <a:lstStyle/>
           <a:p>
             <a:pPr algn="r">
-              <a:defRPr sz="1100" b="0">
+              <a:defRPr sz="1400" b="0">
                 <a:solidFill>
                   <a:srgbClr val="64748B"/>
                 </a:solidFill>
@@ -5187,51 +9294,8 @@
         </p:nvSpPr>
         <p:spPr>
           <a:xfrm>
-            <a:off x="0" y="0"/>
-            <a:ext cx="12191695" cy="109728"/>
-          </a:xfrm>
-          <a:prstGeom prst="rect">
-            <a:avLst/>
-          </a:prstGeom>
-          <a:solidFill>
-            <a:srgbClr val="3B82F6"/>
-          </a:solidFill>
-          <a:ln>
-            <a:noFill/>
-          </a:ln>
-        </p:spPr>
-        <p:style>
-          <a:lnRef idx="1">
-            <a:schemeClr val="accent1"/>
-          </a:lnRef>
-          <a:fillRef idx="3">
-            <a:schemeClr val="accent1"/>
-          </a:fillRef>
-          <a:effectRef idx="2">
-            <a:schemeClr val="accent1"/>
-          </a:effectRef>
-          <a:fontRef idx="minor">
-            <a:schemeClr val="lt1"/>
-          </a:fontRef>
-        </p:style>
-        <p:txBody>
-          <a:bodyPr rtlCol="0" anchor="ctr"/>
-          <a:lstStyle/>
-          <a:p>
-            <a:pPr algn="ctr"/>
-          </a:p>
-        </p:txBody>
-      </p:sp>
-      <p:sp>
-        <p:nvSpPr>
-          <p:cNvPr id="3" name="Rectangle 2"/>
-          <p:cNvSpPr/>
-          <p:nvPr/>
-        </p:nvSpPr>
-        <p:spPr>
-          <a:xfrm>
-            <a:off x="640080" y="411480"/>
-            <a:ext cx="1463040" cy="411480"/>
+            <a:off x="548640" y="320040"/>
+            <a:ext cx="1280160" cy="384048"/>
           </a:xfrm>
           <a:prstGeom prst="rect">
             <a:avLst/>
@@ -5267,14 +9331,14 @@
       </p:sp>
       <p:sp>
         <p:nvSpPr>
-          <p:cNvPr id="4" name="TextBox 3"/>
+          <p:cNvPr id="3" name="TextBox 2"/>
           <p:cNvSpPr txBox="1"/>
           <p:nvPr/>
         </p:nvSpPr>
         <p:spPr>
           <a:xfrm>
-            <a:off x="640080" y="384048"/>
-            <a:ext cx="1463040" cy="457200"/>
+            <a:off x="548640" y="292608"/>
+            <a:ext cx="1280160" cy="411480"/>
           </a:xfrm>
           <a:prstGeom prst="rect">
             <a:avLst/>
@@ -5288,7 +9352,7 @@
           <a:lstStyle/>
           <a:p>
             <a:pPr algn="ctr">
-              <a:defRPr sz="1300" b="1">
+              <a:defRPr sz="1600" b="1">
                 <a:solidFill>
                   <a:srgbClr val="1E40AF"/>
                 </a:solidFill>
@@ -5302,14 +9366,14 @@
       </p:sp>
       <p:sp>
         <p:nvSpPr>
-          <p:cNvPr id="5" name="TextBox 4"/>
+          <p:cNvPr id="4" name="TextBox 3"/>
           <p:cNvSpPr txBox="1"/>
           <p:nvPr/>
         </p:nvSpPr>
         <p:spPr>
           <a:xfrm>
-            <a:off x="640080" y="868680"/>
-            <a:ext cx="10515600" cy="822960"/>
+            <a:off x="548640" y="777240"/>
+            <a:ext cx="10972800" cy="731520"/>
           </a:xfrm>
           <a:prstGeom prst="rect">
             <a:avLst/>
@@ -5323,28 +9387,28 @@
           <a:lstStyle/>
           <a:p>
             <a:pPr algn="l">
-              <a:defRPr sz="3000" b="1">
+              <a:defRPr sz="3400" b="1">
                 <a:solidFill>
                   <a:srgbClr val="1E40AF"/>
                 </a:solidFill>
               </a:defRPr>
             </a:pPr>
             <a:r>
-              <a:t>광주아이온(AI-ON) 마스터하기</a:t>
-            </a:r>
-          </a:p>
-        </p:txBody>
-      </p:sp>
-      <p:sp>
-        <p:nvSpPr>
-          <p:cNvPr id="6" name="Rectangle 5"/>
+              <a:t>광주아이온(AI-ON) — 통합 인증 &amp; 접속</a:t>
+            </a:r>
+          </a:p>
+        </p:txBody>
+      </p:sp>
+      <p:sp>
+        <p:nvSpPr>
+          <p:cNvPr id="5" name="Rectangle 4"/>
           <p:cNvSpPr/>
           <p:nvPr/>
         </p:nvSpPr>
         <p:spPr>
           <a:xfrm>
-            <a:off x="640080" y="1691640"/>
-            <a:ext cx="2286000" cy="54864"/>
+            <a:off x="548640" y="1508760"/>
+            <a:ext cx="2560320" cy="64008"/>
           </a:xfrm>
           <a:prstGeom prst="rect">
             <a:avLst/>
@@ -5378,6 +9442,30 @@
           </a:p>
         </p:txBody>
       </p:sp>
+      <p:pic>
+        <p:nvPicPr>
+          <p:cNvPr id="6" name="Picture 5" descr="aion_flow.png"/>
+          <p:cNvPicPr>
+            <a:picLocks noChangeAspect="1"/>
+          </p:cNvPicPr>
+          <p:nvPr/>
+        </p:nvPicPr>
+        <p:blipFill>
+          <a:blip r:embed="rId2"/>
+          <a:stretch>
+            <a:fillRect/>
+          </a:stretch>
+        </p:blipFill>
+        <p:spPr>
+          <a:xfrm>
+            <a:off x="548640" y="1691640"/>
+            <a:ext cx="5669280" cy="2164634"/>
+          </a:xfrm>
+          <a:prstGeom prst="rect">
+            <a:avLst/>
+          </a:prstGeom>
+        </p:spPr>
+      </p:pic>
       <p:sp>
         <p:nvSpPr>
           <p:cNvPr id="7" name="TextBox 6"/>
@@ -5386,8 +9474,8 @@
         </p:nvSpPr>
         <p:spPr>
           <a:xfrm>
-            <a:off x="822960" y="1920240"/>
-            <a:ext cx="10241280" cy="4389120"/>
+            <a:off x="6400800" y="1737360"/>
+            <a:ext cx="5303520" cy="3200400"/>
           </a:xfrm>
           <a:prstGeom prst="rect">
             <a:avLst/>
@@ -5402,61 +9490,61 @@
           <a:p>
             <a:pPr algn="l">
               <a:spcAft>
-                <a:spcPts val="1000"/>
+                <a:spcPts val="600"/>
               </a:spcAft>
-              <a:defRPr sz="1700" b="0">
+              <a:defRPr sz="2200" b="0">
                 <a:solidFill>
                   <a:srgbClr val="334155"/>
                 </a:solidFill>
               </a:defRPr>
             </a:pPr>
             <a:r>
-              <a:t>통합 ID 하나로 Gemini, NotebookLM, 클래스룸, 드라이브 자동 연결 (SSO)</a:t>
+              <a:t>아이디: teacher@genedu.kr  →  통합 ID 하나로 전 서비스 연결</a:t>
             </a:r>
           </a:p>
           <a:p>
             <a:pPr>
               <a:spcAft>
-                <a:spcPts val="1000"/>
+                <a:spcPts val="600"/>
               </a:spcAft>
-              <a:defRPr sz="1700">
+              <a:defRPr sz="2200">
                 <a:solidFill>
                   <a:srgbClr val="334155"/>
                 </a:solidFill>
               </a:defRPr>
             </a:pPr>
             <a:r>
-              <a:t>메인 화면 위젯 클릭 → Gemini / NotebookLM 바로 이동</a:t>
+              <a:t>메인 화면 위젯 클릭 → Gemini, NotebookLM 이동</a:t>
             </a:r>
           </a:p>
           <a:p>
             <a:pPr>
               <a:spcAft>
-                <a:spcPts val="1000"/>
+                <a:spcPts val="600"/>
               </a:spcAft>
-              <a:defRPr sz="1700">
+              <a:defRPr sz="2200">
                 <a:solidFill>
                   <a:srgbClr val="334155"/>
                 </a:solidFill>
               </a:defRPr>
             </a:pPr>
             <a:r>
-              <a:t>[나의 화면 구성하기]로 자주 쓰는 위젯 배치 조절</a:t>
+              <a:t>[나의 화면 구성하기]로 위젯 배치 조절</a:t>
             </a:r>
           </a:p>
           <a:p>
             <a:pPr>
               <a:spcAft>
-                <a:spcPts val="1000"/>
+                <a:spcPts val="600"/>
               </a:spcAft>
-              <a:defRPr sz="1700">
+              <a:defRPr sz="2200">
                 <a:solidFill>
                   <a:srgbClr val="334155"/>
                 </a:solidFill>
               </a:defRPr>
             </a:pPr>
             <a:r>
-              <a:t>학습 분석 대시보드: 학생 활동·퀴즈 리포트·학습 패턴 확인</a:t>
+              <a:t>나의 강의실 · 학사일정 · 교육 자료실 자동 연동</a:t>
             </a:r>
           </a:p>
         </p:txBody>
@@ -5469,7 +9557,7 @@
         </p:nvSpPr>
         <p:spPr>
           <a:xfrm>
-            <a:off x="11247120" y="6446520"/>
+            <a:off x="11155680" y="6446520"/>
             <a:ext cx="731520" cy="320040"/>
           </a:xfrm>
           <a:prstGeom prst="rect">
@@ -5484,7 +9572,7 @@
           <a:lstStyle/>
           <a:p>
             <a:pPr algn="r">
-              <a:defRPr sz="1100" b="0">
+              <a:defRPr sz="1400" b="0">
                 <a:solidFill>
                   <a:srgbClr val="64748B"/>
                 </a:solidFill>
@@ -5510,7 +9598,7 @@
     <p:bg>
       <p:bgPr>
         <a:solidFill>
-          <a:srgbClr val="FFFFFF"/>
+          <a:srgbClr val="F8FAFC"/>
         </a:solidFill>
         <a:effectLst/>
       </p:bgPr>
@@ -5530,51 +9618,8 @@
         </p:nvSpPr>
         <p:spPr>
           <a:xfrm>
-            <a:off x="0" y="0"/>
-            <a:ext cx="12191695" cy="109728"/>
-          </a:xfrm>
-          <a:prstGeom prst="rect">
-            <a:avLst/>
-          </a:prstGeom>
-          <a:solidFill>
-            <a:srgbClr val="3B82F6"/>
-          </a:solidFill>
-          <a:ln>
-            <a:noFill/>
-          </a:ln>
-        </p:spPr>
-        <p:style>
-          <a:lnRef idx="1">
-            <a:schemeClr val="accent1"/>
-          </a:lnRef>
-          <a:fillRef idx="3">
-            <a:schemeClr val="accent1"/>
-          </a:fillRef>
-          <a:effectRef idx="2">
-            <a:schemeClr val="accent1"/>
-          </a:effectRef>
-          <a:fontRef idx="minor">
-            <a:schemeClr val="lt1"/>
-          </a:fontRef>
-        </p:style>
-        <p:txBody>
-          <a:bodyPr rtlCol="0" anchor="ctr"/>
-          <a:lstStyle/>
-          <a:p>
-            <a:pPr algn="ctr"/>
-          </a:p>
-        </p:txBody>
-      </p:sp>
-      <p:sp>
-        <p:nvSpPr>
-          <p:cNvPr id="3" name="Rectangle 2"/>
-          <p:cNvSpPr/>
-          <p:nvPr/>
-        </p:nvSpPr>
-        <p:spPr>
-          <a:xfrm>
-            <a:off x="640080" y="411480"/>
-            <a:ext cx="1463040" cy="411480"/>
+            <a:off x="548640" y="320040"/>
+            <a:ext cx="1280160" cy="384048"/>
           </a:xfrm>
           <a:prstGeom prst="rect">
             <a:avLst/>
@@ -5610,14 +9655,14 @@
       </p:sp>
       <p:sp>
         <p:nvSpPr>
-          <p:cNvPr id="4" name="TextBox 3"/>
+          <p:cNvPr id="3" name="TextBox 2"/>
           <p:cNvSpPr txBox="1"/>
           <p:nvPr/>
         </p:nvSpPr>
         <p:spPr>
           <a:xfrm>
-            <a:off x="640080" y="384048"/>
-            <a:ext cx="1463040" cy="457200"/>
+            <a:off x="548640" y="292608"/>
+            <a:ext cx="1280160" cy="411480"/>
           </a:xfrm>
           <a:prstGeom prst="rect">
             <a:avLst/>
@@ -5631,28 +9676,28 @@
           <a:lstStyle/>
           <a:p>
             <a:pPr algn="ctr">
-              <a:defRPr sz="1300" b="1">
+              <a:defRPr sz="1600" b="1">
                 <a:solidFill>
                   <a:srgbClr val="1E40AF"/>
                 </a:solidFill>
               </a:defRPr>
             </a:pPr>
             <a:r>
-              <a:t>[5~20분]</a:t>
-            </a:r>
-          </a:p>
-        </p:txBody>
-      </p:sp>
-      <p:sp>
-        <p:nvSpPr>
-          <p:cNvPr id="5" name="TextBox 4"/>
+              <a:t>[0~5분]</a:t>
+            </a:r>
+          </a:p>
+        </p:txBody>
+      </p:sp>
+      <p:sp>
+        <p:nvSpPr>
+          <p:cNvPr id="4" name="TextBox 3"/>
           <p:cNvSpPr txBox="1"/>
           <p:nvPr/>
         </p:nvSpPr>
         <p:spPr>
           <a:xfrm>
-            <a:off x="640080" y="868680"/>
-            <a:ext cx="10515600" cy="822960"/>
+            <a:off x="548640" y="777240"/>
+            <a:ext cx="10972800" cy="731520"/>
           </a:xfrm>
           <a:prstGeom prst="rect">
             <a:avLst/>
@@ -5666,28 +9711,28 @@
           <a:lstStyle/>
           <a:p>
             <a:pPr algn="l">
-              <a:defRPr sz="3000" b="1">
+              <a:defRPr sz="3400" b="1">
                 <a:solidFill>
                   <a:srgbClr val="1E40AF"/>
                 </a:solidFill>
               </a:defRPr>
             </a:pPr>
             <a:r>
-              <a:t>NotebookLM — 나만의 학교 비서</a:t>
-            </a:r>
-          </a:p>
-        </p:txBody>
-      </p:sp>
-      <p:sp>
-        <p:nvSpPr>
-          <p:cNvPr id="6" name="Rectangle 5"/>
+              <a:t>광주아이온 — 학습 분석 대시보드</a:t>
+            </a:r>
+          </a:p>
+        </p:txBody>
+      </p:sp>
+      <p:sp>
+        <p:nvSpPr>
+          <p:cNvPr id="5" name="Rectangle 4"/>
           <p:cNvSpPr/>
           <p:nvPr/>
         </p:nvSpPr>
         <p:spPr>
           <a:xfrm>
-            <a:off x="640080" y="1691640"/>
-            <a:ext cx="2286000" cy="54864"/>
+            <a:off x="548640" y="1508760"/>
+            <a:ext cx="2560320" cy="64008"/>
           </a:xfrm>
           <a:prstGeom prst="rect">
             <a:avLst/>
@@ -5723,14 +9768,14 @@
       </p:sp>
       <p:sp>
         <p:nvSpPr>
-          <p:cNvPr id="7" name="TextBox 6"/>
+          <p:cNvPr id="6" name="TextBox 5"/>
           <p:cNvSpPr txBox="1"/>
           <p:nvPr/>
         </p:nvSpPr>
         <p:spPr>
           <a:xfrm>
-            <a:off x="822960" y="1920240"/>
-            <a:ext cx="10241280" cy="4389120"/>
+            <a:off x="822960" y="1828800"/>
+            <a:ext cx="10515600" cy="3657600"/>
           </a:xfrm>
           <a:prstGeom prst="rect">
             <a:avLst/>
@@ -5745,77 +9790,90 @@
           <a:p>
             <a:pPr algn="l">
               <a:spcAft>
-                <a:spcPts val="1000"/>
+                <a:spcPts val="600"/>
               </a:spcAft>
-              <a:defRPr sz="1700" b="0">
+              <a:defRPr sz="2400" b="0">
                 <a:solidFill>
                   <a:srgbClr val="334155"/>
                 </a:solidFill>
               </a:defRPr>
             </a:pPr>
             <a:r>
-              <a:t>1-1. 학교 규정·학사일정·공문 업로드 → 학교 전문 챗봇</a:t>
+              <a:t>활동 분석: 학생 에듀테크 접속 시간·학습 패턴 시각화</a:t>
             </a:r>
           </a:p>
           <a:p>
             <a:pPr>
               <a:spcAft>
-                <a:spcPts val="1000"/>
+                <a:spcPts val="600"/>
               </a:spcAft>
-              <a:defRPr sz="1700">
+              <a:defRPr sz="2400">
                 <a:solidFill>
                   <a:srgbClr val="334155"/>
                 </a:solidFill>
               </a:defRPr>
             </a:pPr>
             <a:r>
-              <a:t>1-2. 학생 보고서 업로드 → 세특(생기부) 초안 작성</a:t>
+              <a:t>퀴즈 리포트: 구글 폼 퀴즈 정답률 분석 → 맞춤 피드백 지원</a:t>
             </a:r>
           </a:p>
           <a:p>
             <a:pPr>
               <a:spcAft>
-                <a:spcPts val="1000"/>
+                <a:spcPts val="600"/>
               </a:spcAft>
-              <a:defRPr sz="1700">
+              <a:defRPr sz="2400">
                 <a:solidFill>
                   <a:srgbClr val="334155"/>
                 </a:solidFill>
               </a:defRPr>
             </a:pPr>
             <a:r>
-              <a:t>1-3. 성취기준·작년 평가계획 → 새 평가계획 초안</a:t>
-            </a:r>
-          </a:p>
-          <a:p>
-            <a:pPr>
-              <a:spcAft>
-                <a:spcPts val="1000"/>
-              </a:spcAft>
-              <a:defRPr sz="1700">
-                <a:solidFill>
-                  <a:srgbClr val="334155"/>
-                </a:solidFill>
-              </a:defRPr>
-            </a:pPr>
-            <a:r>
-              <a:t>1-4. 교과서 PDF → 평가 문항·루브릭(채점기준표) 제작</a:t>
-            </a:r>
-          </a:p>
-          <a:p>
-            <a:pPr>
-              <a:spcAft>
-                <a:spcPts val="1000"/>
-              </a:spcAft>
-              <a:defRPr sz="1700">
-                <a:solidFill>
-                  <a:srgbClr val="334155"/>
-                </a:solidFill>
-              </a:defRPr>
-            </a:pPr>
-            <a:r>
-              <a:t>실습: + 새 노트 → + 소스 추가 → 하단에서 질문하기</a:t>
-            </a:r>
+              <a:t>학습 분포: 주도적 학습 시간 파악 → 수행평가 설계 데이터</a:t>
+            </a:r>
+          </a:p>
+        </p:txBody>
+      </p:sp>
+      <p:sp>
+        <p:nvSpPr>
+          <p:cNvPr id="7" name="Rectangle 6"/>
+          <p:cNvSpPr/>
+          <p:nvPr/>
+        </p:nvSpPr>
+        <p:spPr>
+          <a:xfrm>
+            <a:off x="731520" y="5029200"/>
+            <a:ext cx="10515600" cy="914400"/>
+          </a:xfrm>
+          <a:prstGeom prst="rect">
+            <a:avLst/>
+          </a:prstGeom>
+          <a:solidFill>
+            <a:srgbClr val="FEF3C7"/>
+          </a:solidFill>
+          <a:ln>
+            <a:noFill/>
+          </a:ln>
+        </p:spPr>
+        <p:style>
+          <a:lnRef idx="1">
+            <a:schemeClr val="accent1"/>
+          </a:lnRef>
+          <a:fillRef idx="3">
+            <a:schemeClr val="accent1"/>
+          </a:fillRef>
+          <a:effectRef idx="2">
+            <a:schemeClr val="accent1"/>
+          </a:effectRef>
+          <a:fontRef idx="minor">
+            <a:schemeClr val="lt1"/>
+          </a:fontRef>
+        </p:style>
+        <p:txBody>
+          <a:bodyPr rtlCol="0" anchor="ctr"/>
+          <a:lstStyle/>
+          <a:p>
+            <a:pPr algn="ctr"/>
           </a:p>
         </p:txBody>
       </p:sp>
@@ -5827,8 +9885,8 @@
         </p:nvSpPr>
         <p:spPr>
           <a:xfrm>
-            <a:off x="11247120" y="6446520"/>
-            <a:ext cx="731520" cy="320040"/>
+            <a:off x="914400" y="5120640"/>
+            <a:ext cx="10058400" cy="731520"/>
           </a:xfrm>
           <a:prstGeom prst="rect">
             <a:avLst/>
@@ -5841,8 +9899,43 @@
           </a:bodyPr>
           <a:lstStyle/>
           <a:p>
+            <a:pPr algn="l">
+              <a:defRPr sz="2000" b="0">
+                <a:solidFill>
+                  <a:srgbClr val="D97706"/>
+                </a:solidFill>
+              </a:defRPr>
+            </a:pPr>
+            <a:r>
+              <a:t>💡 매뉴얼 24p 참고 — 학생 학습 데이터를 수업 설계에 활용하세요.</a:t>
+            </a:r>
+          </a:p>
+        </p:txBody>
+      </p:sp>
+      <p:sp>
+        <p:nvSpPr>
+          <p:cNvPr id="9" name="TextBox 8"/>
+          <p:cNvSpPr txBox="1"/>
+          <p:nvPr/>
+        </p:nvSpPr>
+        <p:spPr>
+          <a:xfrm>
+            <a:off x="11155680" y="6446520"/>
+            <a:ext cx="731520" cy="320040"/>
+          </a:xfrm>
+          <a:prstGeom prst="rect">
+            <a:avLst/>
+          </a:prstGeom>
+          <a:noFill/>
+        </p:spPr>
+        <p:txBody>
+          <a:bodyPr wrap="square">
+            <a:spAutoFit/>
+          </a:bodyPr>
+          <a:lstStyle/>
+          <a:p>
             <a:pPr algn="r">
-              <a:defRPr sz="1100" b="0">
+              <a:defRPr sz="1400" b="0">
                 <a:solidFill>
                   <a:srgbClr val="64748B"/>
                 </a:solidFill>
@@ -5888,51 +9981,8 @@
         </p:nvSpPr>
         <p:spPr>
           <a:xfrm>
-            <a:off x="0" y="0"/>
-            <a:ext cx="12191695" cy="109728"/>
-          </a:xfrm>
-          <a:prstGeom prst="rect">
-            <a:avLst/>
-          </a:prstGeom>
-          <a:solidFill>
-            <a:srgbClr val="3B82F6"/>
-          </a:solidFill>
-          <a:ln>
-            <a:noFill/>
-          </a:ln>
-        </p:spPr>
-        <p:style>
-          <a:lnRef idx="1">
-            <a:schemeClr val="accent1"/>
-          </a:lnRef>
-          <a:fillRef idx="3">
-            <a:schemeClr val="accent1"/>
-          </a:fillRef>
-          <a:effectRef idx="2">
-            <a:schemeClr val="accent1"/>
-          </a:effectRef>
-          <a:fontRef idx="minor">
-            <a:schemeClr val="lt1"/>
-          </a:fontRef>
-        </p:style>
-        <p:txBody>
-          <a:bodyPr rtlCol="0" anchor="ctr"/>
-          <a:lstStyle/>
-          <a:p>
-            <a:pPr algn="ctr"/>
-          </a:p>
-        </p:txBody>
-      </p:sp>
-      <p:sp>
-        <p:nvSpPr>
-          <p:cNvPr id="3" name="Rectangle 2"/>
-          <p:cNvSpPr/>
-          <p:nvPr/>
-        </p:nvSpPr>
-        <p:spPr>
-          <a:xfrm>
-            <a:off x="640080" y="411480"/>
-            <a:ext cx="1463040" cy="411480"/>
+            <a:off x="548640" y="320040"/>
+            <a:ext cx="1280160" cy="384048"/>
           </a:xfrm>
           <a:prstGeom prst="rect">
             <a:avLst/>
@@ -5968,14 +10018,14 @@
       </p:sp>
       <p:sp>
         <p:nvSpPr>
-          <p:cNvPr id="4" name="TextBox 3"/>
+          <p:cNvPr id="3" name="TextBox 2"/>
           <p:cNvSpPr txBox="1"/>
           <p:nvPr/>
         </p:nvSpPr>
         <p:spPr>
           <a:xfrm>
-            <a:off x="640080" y="384048"/>
-            <a:ext cx="1463040" cy="457200"/>
+            <a:off x="548640" y="292608"/>
+            <a:ext cx="1280160" cy="411480"/>
           </a:xfrm>
           <a:prstGeom prst="rect">
             <a:avLst/>
@@ -5989,28 +10039,28 @@
           <a:lstStyle/>
           <a:p>
             <a:pPr algn="ctr">
-              <a:defRPr sz="1300" b="1">
+              <a:defRPr sz="1600" b="1">
                 <a:solidFill>
                   <a:srgbClr val="1E40AF"/>
                 </a:solidFill>
               </a:defRPr>
             </a:pPr>
             <a:r>
-              <a:t>[20~32분]</a:t>
-            </a:r>
-          </a:p>
-        </p:txBody>
-      </p:sp>
-      <p:sp>
-        <p:nvSpPr>
-          <p:cNvPr id="5" name="TextBox 4"/>
+              <a:t>[5~20분]</a:t>
+            </a:r>
+          </a:p>
+        </p:txBody>
+      </p:sp>
+      <p:sp>
+        <p:nvSpPr>
+          <p:cNvPr id="4" name="TextBox 3"/>
           <p:cNvSpPr txBox="1"/>
           <p:nvPr/>
         </p:nvSpPr>
         <p:spPr>
           <a:xfrm>
-            <a:off x="640080" y="868680"/>
-            <a:ext cx="10515600" cy="822960"/>
+            <a:off x="548640" y="777240"/>
+            <a:ext cx="10972800" cy="731520"/>
           </a:xfrm>
           <a:prstGeom prst="rect">
             <a:avLst/>
@@ -6024,28 +10074,28 @@
           <a:lstStyle/>
           <a:p>
             <a:pPr algn="l">
-              <a:defRPr sz="3000" b="1">
+              <a:defRPr sz="3400" b="1">
                 <a:solidFill>
                   <a:srgbClr val="1E40AF"/>
                 </a:solidFill>
               </a:defRPr>
             </a:pPr>
             <a:r>
-              <a:t>부서별 · 담임 업무 맞춤 활용</a:t>
-            </a:r>
-          </a:p>
-        </p:txBody>
-      </p:sp>
-      <p:sp>
-        <p:nvSpPr>
-          <p:cNvPr id="6" name="Rectangle 5"/>
+              <a:t>NotebookLM — 나만의 학교 비서</a:t>
+            </a:r>
+          </a:p>
+        </p:txBody>
+      </p:sp>
+      <p:sp>
+        <p:nvSpPr>
+          <p:cNvPr id="5" name="Rectangle 4"/>
           <p:cNvSpPr/>
           <p:nvPr/>
         </p:nvSpPr>
         <p:spPr>
           <a:xfrm>
-            <a:off x="640080" y="1691640"/>
-            <a:ext cx="2286000" cy="54864"/>
+            <a:off x="548640" y="1508760"/>
+            <a:ext cx="2560320" cy="64008"/>
           </a:xfrm>
           <a:prstGeom prst="rect">
             <a:avLst/>
@@ -6079,6 +10129,30 @@
           </a:p>
         </p:txBody>
       </p:sp>
+      <p:pic>
+        <p:nvPicPr>
+          <p:cNvPr id="6" name="Picture 5" descr="notebooklm_flow.png"/>
+          <p:cNvPicPr>
+            <a:picLocks noChangeAspect="1"/>
+          </p:cNvPicPr>
+          <p:nvPr/>
+        </p:nvPicPr>
+        <p:blipFill>
+          <a:blip r:embed="rId2"/>
+          <a:stretch>
+            <a:fillRect/>
+          </a:stretch>
+        </p:blipFill>
+        <p:spPr>
+          <a:xfrm>
+            <a:off x="548640" y="1691640"/>
+            <a:ext cx="5669280" cy="1984248"/>
+          </a:xfrm>
+          <a:prstGeom prst="rect">
+            <a:avLst/>
+          </a:prstGeom>
+        </p:spPr>
+      </p:pic>
       <p:sp>
         <p:nvSpPr>
           <p:cNvPr id="7" name="TextBox 6"/>
@@ -6087,8 +10161,8 @@
         </p:nvSpPr>
         <p:spPr>
           <a:xfrm>
-            <a:off x="822960" y="1920240"/>
-            <a:ext cx="10241280" cy="4389120"/>
+            <a:off x="6400800" y="1737360"/>
+            <a:ext cx="5303520" cy="3200400"/>
           </a:xfrm>
           <a:prstGeom prst="rect">
             <a:avLst/>
@@ -6103,76 +10177,46 @@
           <a:p>
             <a:pPr algn="l">
               <a:spcAft>
-                <a:spcPts val="1000"/>
+                <a:spcPts val="600"/>
               </a:spcAft>
-              <a:defRPr sz="1700" b="0">
+              <a:defRPr sz="2200" b="0">
                 <a:solidFill>
                   <a:srgbClr val="334155"/>
                 </a:solidFill>
               </a:defRPr>
             </a:pPr>
             <a:r>
-              <a:t>교무기획부: 학사일정 정리, 회의록 요약, 연간 계획 시사점 도출</a:t>
+              <a:t>1-1 학교 맞춤 챗봇  |  1-2 세특 초안  |  1-3 평가계획  |  1-4 문항·루브릭</a:t>
             </a:r>
           </a:p>
           <a:p>
             <a:pPr>
               <a:spcAft>
-                <a:spcPts val="1000"/>
+                <a:spcPts val="600"/>
               </a:spcAft>
-              <a:defRPr sz="1700">
+              <a:defRPr sz="2200">
                 <a:solidFill>
                   <a:srgbClr val="334155"/>
                 </a:solidFill>
               </a:defRPr>
             </a:pPr>
             <a:r>
-              <a:t>교육연구부: 수행평가 루브릭, 학교평가 보고서 개요 작성</a:t>
+              <a:t>학교 규정·학사일정·공문·보고서를 소스로 업로드</a:t>
             </a:r>
           </a:p>
           <a:p>
             <a:pPr>
               <a:spcAft>
-                <a:spcPts val="1000"/>
+                <a:spcPts val="600"/>
               </a:spcAft>
-              <a:defRPr sz="1700">
+              <a:defRPr sz="2200">
                 <a:solidFill>
                   <a:srgbClr val="334155"/>
                 </a:solidFill>
               </a:defRPr>
             </a:pPr>
             <a:r>
-              <a:t>담임 — 학부모 소통: 가정통신문·상담일지 요약 초안</a:t>
-            </a:r>
-          </a:p>
-          <a:p>
-            <a:pPr>
-              <a:spcAft>
-                <a:spcPts val="1000"/>
-              </a:spcAft>
-              <a:defRPr sz="1700">
-                <a:solidFill>
-                  <a:srgbClr val="334155"/>
-                </a:solidFill>
-              </a:defRPr>
-            </a:pPr>
-            <a:r>
-              <a:t>담임 — 학급 활동: 협동 프로젝트·중1 적응 프로그램 아이디어</a:t>
-            </a:r>
-          </a:p>
-          <a:p>
-            <a:pPr>
-              <a:spcAft>
-                <a:spcPts val="1000"/>
-              </a:spcAft>
-              <a:defRPr sz="1700">
-                <a:solidFill>
-                  <a:srgbClr val="334155"/>
-                </a:solidFill>
-              </a:defRPr>
-            </a:pPr>
-            <a:r>
-              <a:t>💡 가이드 페이지에서 내 업무에 맞는 프롬프트를 [복사]해 바로 시도</a:t>
+              <a:t>업로드된 자료만 근거로 답변 → 학교 맞춤형!</a:t>
             </a:r>
           </a:p>
         </p:txBody>
@@ -6185,7 +10229,7 @@
         </p:nvSpPr>
         <p:spPr>
           <a:xfrm>
-            <a:off x="11247120" y="6446520"/>
+            <a:off x="11155680" y="6446520"/>
             <a:ext cx="731520" cy="320040"/>
           </a:xfrm>
           <a:prstGeom prst="rect">
@@ -6200,7 +10244,7 @@
           <a:lstStyle/>
           <a:p>
             <a:pPr algn="r">
-              <a:defRPr sz="1100" b="0">
+              <a:defRPr sz="1400" b="0">
                 <a:solidFill>
                   <a:srgbClr val="64748B"/>
                 </a:solidFill>
@@ -6246,51 +10290,8 @@
         </p:nvSpPr>
         <p:spPr>
           <a:xfrm>
-            <a:off x="0" y="0"/>
-            <a:ext cx="12191695" cy="109728"/>
-          </a:xfrm>
-          <a:prstGeom prst="rect">
-            <a:avLst/>
-          </a:prstGeom>
-          <a:solidFill>
-            <a:srgbClr val="3B82F6"/>
-          </a:solidFill>
-          <a:ln>
-            <a:noFill/>
-          </a:ln>
-        </p:spPr>
-        <p:style>
-          <a:lnRef idx="1">
-            <a:schemeClr val="accent1"/>
-          </a:lnRef>
-          <a:fillRef idx="3">
-            <a:schemeClr val="accent1"/>
-          </a:fillRef>
-          <a:effectRef idx="2">
-            <a:schemeClr val="accent1"/>
-          </a:effectRef>
-          <a:fontRef idx="minor">
-            <a:schemeClr val="lt1"/>
-          </a:fontRef>
-        </p:style>
-        <p:txBody>
-          <a:bodyPr rtlCol="0" anchor="ctr"/>
-          <a:lstStyle/>
-          <a:p>
-            <a:pPr algn="ctr"/>
-          </a:p>
-        </p:txBody>
-      </p:sp>
-      <p:sp>
-        <p:nvSpPr>
-          <p:cNvPr id="3" name="Rectangle 2"/>
-          <p:cNvSpPr/>
-          <p:nvPr/>
-        </p:nvSpPr>
-        <p:spPr>
-          <a:xfrm>
-            <a:off x="640080" y="411480"/>
-            <a:ext cx="1463040" cy="411480"/>
+            <a:off x="548640" y="320040"/>
+            <a:ext cx="1280160" cy="384048"/>
           </a:xfrm>
           <a:prstGeom prst="rect">
             <a:avLst/>
@@ -6326,14 +10327,14 @@
       </p:sp>
       <p:sp>
         <p:nvSpPr>
-          <p:cNvPr id="4" name="TextBox 3"/>
+          <p:cNvPr id="3" name="TextBox 2"/>
           <p:cNvSpPr txBox="1"/>
           <p:nvPr/>
         </p:nvSpPr>
         <p:spPr>
           <a:xfrm>
-            <a:off x="640080" y="384048"/>
-            <a:ext cx="1463040" cy="457200"/>
+            <a:off x="548640" y="292608"/>
+            <a:ext cx="1280160" cy="411480"/>
           </a:xfrm>
           <a:prstGeom prst="rect">
             <a:avLst/>
@@ -6347,28 +10348,28 @@
           <a:lstStyle/>
           <a:p>
             <a:pPr algn="ctr">
-              <a:defRPr sz="1300" b="1">
+              <a:defRPr sz="1600" b="1">
                 <a:solidFill>
                   <a:srgbClr val="1E40AF"/>
                 </a:solidFill>
               </a:defRPr>
             </a:pPr>
             <a:r>
-              <a:t>[32~45분]</a:t>
-            </a:r>
-          </a:p>
-        </p:txBody>
-      </p:sp>
-      <p:sp>
-        <p:nvSpPr>
-          <p:cNvPr id="5" name="TextBox 4"/>
+              <a:t>[5~20분]</a:t>
+            </a:r>
+          </a:p>
+        </p:txBody>
+      </p:sp>
+      <p:sp>
+        <p:nvSpPr>
+          <p:cNvPr id="4" name="TextBox 3"/>
           <p:cNvSpPr txBox="1"/>
           <p:nvPr/>
         </p:nvSpPr>
         <p:spPr>
           <a:xfrm>
-            <a:off x="640080" y="868680"/>
-            <a:ext cx="10515600" cy="822960"/>
+            <a:off x="548640" y="777240"/>
+            <a:ext cx="10972800" cy="731520"/>
           </a:xfrm>
           <a:prstGeom prst="rect">
             <a:avLst/>
@@ -6382,28 +10383,28 @@
           <a:lstStyle/>
           <a:p>
             <a:pPr algn="l">
-              <a:defRPr sz="3000" b="1">
+              <a:defRPr sz="3400" b="1">
                 <a:solidFill>
                   <a:srgbClr val="1E40AF"/>
                 </a:solidFill>
               </a:defRPr>
             </a:pPr>
             <a:r>
-              <a:t>Gemini 심화 — 만능 조수</a:t>
-            </a:r>
-          </a:p>
-        </p:txBody>
-      </p:sp>
-      <p:sp>
-        <p:nvSpPr>
-          <p:cNvPr id="6" name="Rectangle 5"/>
+              <a:t>1-1. 우리 학교 맞춤형 챗봇</a:t>
+            </a:r>
+          </a:p>
+        </p:txBody>
+      </p:sp>
+      <p:sp>
+        <p:nvSpPr>
+          <p:cNvPr id="5" name="Rectangle 4"/>
           <p:cNvSpPr/>
           <p:nvPr/>
         </p:nvSpPr>
         <p:spPr>
           <a:xfrm>
-            <a:off x="640080" y="1691640"/>
-            <a:ext cx="2286000" cy="54864"/>
+            <a:off x="548640" y="1508760"/>
+            <a:ext cx="2560320" cy="64008"/>
           </a:xfrm>
           <a:prstGeom prst="rect">
             <a:avLst/>
@@ -6439,14 +10440,57 @@
       </p:sp>
       <p:sp>
         <p:nvSpPr>
+          <p:cNvPr id="6" name="Rectangle 5"/>
+          <p:cNvSpPr/>
+          <p:nvPr/>
+        </p:nvSpPr>
+        <p:spPr>
+          <a:xfrm>
+            <a:off x="548640" y="1737360"/>
+            <a:ext cx="3474720" cy="822960"/>
+          </a:xfrm>
+          <a:prstGeom prst="rect">
+            <a:avLst/>
+          </a:prstGeom>
+          <a:solidFill>
+            <a:srgbClr val="DBEAFE"/>
+          </a:solidFill>
+          <a:ln>
+            <a:noFill/>
+          </a:ln>
+        </p:spPr>
+        <p:style>
+          <a:lnRef idx="1">
+            <a:schemeClr val="accent1"/>
+          </a:lnRef>
+          <a:fillRef idx="3">
+            <a:schemeClr val="accent1"/>
+          </a:fillRef>
+          <a:effectRef idx="2">
+            <a:schemeClr val="accent1"/>
+          </a:effectRef>
+          <a:fontRef idx="minor">
+            <a:schemeClr val="lt1"/>
+          </a:fontRef>
+        </p:style>
+        <p:txBody>
+          <a:bodyPr rtlCol="0" anchor="ctr"/>
+          <a:lstStyle/>
+          <a:p>
+            <a:pPr algn="ctr"/>
+          </a:p>
+        </p:txBody>
+      </p:sp>
+      <p:sp>
+        <p:nvSpPr>
           <p:cNvPr id="7" name="TextBox 6"/>
           <p:cNvSpPr txBox="1"/>
           <p:nvPr/>
         </p:nvSpPr>
         <p:spPr>
           <a:xfrm>
-            <a:off x="822960" y="1920240"/>
-            <a:ext cx="10241280" cy="4389120"/>
+            <a:off x="685800" y="1874520"/>
+            <a:ext cx="3200400" cy="640080"/>
           </a:xfrm>
           <a:prstGeom prst="rect">
             <a:avLst/>
@@ -6460,91 +10504,71 @@
           <a:lstStyle/>
           <a:p>
             <a:pPr algn="l">
-              <a:spcAft>
-                <a:spcPts val="1000"/>
-              </a:spcAft>
-              <a:defRPr sz="1700" b="0">
-                <a:solidFill>
-                  <a:srgbClr val="334155"/>
+              <a:defRPr sz="1800" b="1">
+                <a:solidFill>
+                  <a:srgbClr val="1E40AF"/>
                 </a:solidFill>
               </a:defRPr>
             </a:pPr>
             <a:r>
-              <a:t>2-1. @기능: @Google 지도, @Drive, @YouTube 실시간 연동</a:t>
-            </a:r>
-          </a:p>
-          <a:p>
-            <a:pPr>
-              <a:spcAft>
-                <a:spcPts val="1000"/>
-              </a:spcAft>
-              <a:defRPr sz="1700">
-                <a:solidFill>
-                  <a:srgbClr val="334155"/>
-                </a:solidFill>
-              </a:defRPr>
-            </a:pPr>
-            <a:r>
-              <a:t>2-2. Gems: 자주 쓰는 AI 역할 저장 (프롬프트·양식 생성기)</a:t>
-            </a:r>
-          </a:p>
-          <a:p>
-            <a:pPr>
-              <a:spcAft>
-                <a:spcPts val="1000"/>
-              </a:spcAft>
-              <a:defRPr sz="1700">
-                <a:solidFill>
-                  <a:srgbClr val="334155"/>
-                </a:solidFill>
-              </a:defRPr>
-            </a:pPr>
-            <a:r>
-              <a:t>2-3. Google Forms: 'Create form with Gemini'로 설문 자동 생성</a:t>
-            </a:r>
-          </a:p>
-          <a:p>
-            <a:pPr>
-              <a:spcAft>
-                <a:spcPts val="1000"/>
-              </a:spcAft>
-              <a:defRPr sz="1700">
-                <a:solidFill>
-                  <a:srgbClr val="334155"/>
-                </a:solidFill>
-              </a:defRPr>
-            </a:pPr>
-            <a:r>
-              <a:t>2-4. 슬라이드 7단계: 내용 구성 → 이미지 → 슬라이드 → 발표 스크립트</a:t>
-            </a:r>
-          </a:p>
-          <a:p>
-            <a:pPr>
-              <a:spcAft>
-                <a:spcPts val="1000"/>
-              </a:spcAft>
-              <a:defRPr sz="1700">
-                <a:solidFill>
-                  <a:srgbClr val="334155"/>
-                </a:solidFill>
-              </a:defRPr>
-            </a:pPr>
-            <a:r>
-              <a:t>⚠️ Forms 사용 시: 언어 English 설정 + Workspace Labs 가입 (최초 1회)</a:t>
-            </a:r>
-          </a:p>
-        </p:txBody>
-      </p:sp>
-      <p:sp>
-        <p:nvSpPr>
-          <p:cNvPr id="8" name="TextBox 7"/>
+              <a:t>1. NotebookLM → + 새 노트</a:t>
+            </a:r>
+          </a:p>
+        </p:txBody>
+      </p:sp>
+      <p:sp>
+        <p:nvSpPr>
+          <p:cNvPr id="8" name="Rectangle 7"/>
+          <p:cNvSpPr/>
+          <p:nvPr/>
+        </p:nvSpPr>
+        <p:spPr>
+          <a:xfrm>
+            <a:off x="4297679" y="1737360"/>
+            <a:ext cx="3474720" cy="822960"/>
+          </a:xfrm>
+          <a:prstGeom prst="rect">
+            <a:avLst/>
+          </a:prstGeom>
+          <a:solidFill>
+            <a:srgbClr val="DBEAFE"/>
+          </a:solidFill>
+          <a:ln>
+            <a:noFill/>
+          </a:ln>
+        </p:spPr>
+        <p:style>
+          <a:lnRef idx="1">
+            <a:schemeClr val="accent1"/>
+          </a:lnRef>
+          <a:fillRef idx="3">
+            <a:schemeClr val="accent1"/>
+          </a:fillRef>
+          <a:effectRef idx="2">
+            <a:schemeClr val="accent1"/>
+          </a:effectRef>
+          <a:fontRef idx="minor">
+            <a:schemeClr val="lt1"/>
+          </a:fontRef>
+        </p:style>
+        <p:txBody>
+          <a:bodyPr rtlCol="0" anchor="ctr"/>
+          <a:lstStyle/>
+          <a:p>
+            <a:pPr algn="ctr"/>
+          </a:p>
+        </p:txBody>
+      </p:sp>
+      <p:sp>
+        <p:nvSpPr>
+          <p:cNvPr id="9" name="TextBox 8"/>
           <p:cNvSpPr txBox="1"/>
           <p:nvPr/>
         </p:nvSpPr>
         <p:spPr>
           <a:xfrm>
-            <a:off x="11247120" y="6446520"/>
-            <a:ext cx="731520" cy="320040"/>
+            <a:off x="4434839" y="1874520"/>
+            <a:ext cx="3200400" cy="640080"/>
           </a:xfrm>
           <a:prstGeom prst="rect">
             <a:avLst/>
@@ -6557,8 +10581,219 @@
           </a:bodyPr>
           <a:lstStyle/>
           <a:p>
+            <a:pPr algn="l">
+              <a:defRPr sz="1800" b="1">
+                <a:solidFill>
+                  <a:srgbClr val="1E40AF"/>
+                </a:solidFill>
+              </a:defRPr>
+            </a:pPr>
+            <a:r>
+              <a:t>2. + 소스 추가 (규정·일정)</a:t>
+            </a:r>
+          </a:p>
+        </p:txBody>
+      </p:sp>
+      <p:sp>
+        <p:nvSpPr>
+          <p:cNvPr id="10" name="Rectangle 9"/>
+          <p:cNvSpPr/>
+          <p:nvPr/>
+        </p:nvSpPr>
+        <p:spPr>
+          <a:xfrm>
+            <a:off x="8046719" y="1737360"/>
+            <a:ext cx="3474720" cy="822960"/>
+          </a:xfrm>
+          <a:prstGeom prst="rect">
+            <a:avLst/>
+          </a:prstGeom>
+          <a:solidFill>
+            <a:srgbClr val="DBEAFE"/>
+          </a:solidFill>
+          <a:ln>
+            <a:noFill/>
+          </a:ln>
+        </p:spPr>
+        <p:style>
+          <a:lnRef idx="1">
+            <a:schemeClr val="accent1"/>
+          </a:lnRef>
+          <a:fillRef idx="3">
+            <a:schemeClr val="accent1"/>
+          </a:fillRef>
+          <a:effectRef idx="2">
+            <a:schemeClr val="accent1"/>
+          </a:effectRef>
+          <a:fontRef idx="minor">
+            <a:schemeClr val="lt1"/>
+          </a:fontRef>
+        </p:style>
+        <p:txBody>
+          <a:bodyPr rtlCol="0" anchor="ctr"/>
+          <a:lstStyle/>
+          <a:p>
+            <a:pPr algn="ctr"/>
+          </a:p>
+        </p:txBody>
+      </p:sp>
+      <p:sp>
+        <p:nvSpPr>
+          <p:cNvPr id="11" name="TextBox 10"/>
+          <p:cNvSpPr txBox="1"/>
+          <p:nvPr/>
+        </p:nvSpPr>
+        <p:spPr>
+          <a:xfrm>
+            <a:off x="8183879" y="1874520"/>
+            <a:ext cx="3200400" cy="640080"/>
+          </a:xfrm>
+          <a:prstGeom prst="rect">
+            <a:avLst/>
+          </a:prstGeom>
+          <a:noFill/>
+        </p:spPr>
+        <p:txBody>
+          <a:bodyPr wrap="square">
+            <a:spAutoFit/>
+          </a:bodyPr>
+          <a:lstStyle/>
+          <a:p>
+            <a:pPr algn="l">
+              <a:defRPr sz="1800" b="1">
+                <a:solidFill>
+                  <a:srgbClr val="1E40AF"/>
+                </a:solidFill>
+              </a:defRPr>
+            </a:pPr>
+            <a:r>
+              <a:t>3. 하단 대화창에 질문</a:t>
+            </a:r>
+          </a:p>
+        </p:txBody>
+      </p:sp>
+      <p:sp>
+        <p:nvSpPr>
+          <p:cNvPr id="12" name="Rectangle 11"/>
+          <p:cNvSpPr/>
+          <p:nvPr/>
+        </p:nvSpPr>
+        <p:spPr>
+          <a:xfrm>
+            <a:off x="548640" y="2743200"/>
+            <a:ext cx="10972800" cy="1828800"/>
+          </a:xfrm>
+          <a:prstGeom prst="rect">
+            <a:avLst/>
+          </a:prstGeom>
+          <a:solidFill>
+            <a:srgbClr val="1E293B"/>
+          </a:solidFill>
+          <a:ln>
+            <a:solidFill>
+              <a:srgbClr val="64748B"/>
+            </a:solidFill>
+          </a:ln>
+        </p:spPr>
+        <p:style>
+          <a:lnRef idx="1">
+            <a:schemeClr val="accent1"/>
+          </a:lnRef>
+          <a:fillRef idx="3">
+            <a:schemeClr val="accent1"/>
+          </a:fillRef>
+          <a:effectRef idx="2">
+            <a:schemeClr val="accent1"/>
+          </a:effectRef>
+          <a:fontRef idx="minor">
+            <a:schemeClr val="lt1"/>
+          </a:fontRef>
+        </p:style>
+        <p:txBody>
+          <a:bodyPr rtlCol="0" anchor="ctr" wrap="square" lIns="152400" tIns="127000"/>
+          <a:lstStyle/>
+          <a:p>
+            <a:pPr algn="ctr">
+              <a:defRPr sz="1600">
+                <a:solidFill>
+                  <a:srgbClr val="FFFFFF"/>
+                </a:solidFill>
+                <a:latin typeface="Courier New"/>
+              </a:defRPr>
+            </a:pPr>
+            <a:r>
+              <a:t>- 2학년 현장체험학습 신청 마감일이 언제야?</a:t>
+            </a:r>
+            <a:br/>
+            <a:r>
+              <a:t>- 스마트폰 사용 적발 시 징계 규정을 알려줘.</a:t>
+            </a:r>
+            <a:br/>
+            <a:r>
+              <a:t>- 올해 여름방학 시작일과 개학일은?</a:t>
+            </a:r>
+          </a:p>
+        </p:txBody>
+      </p:sp>
+      <p:sp>
+        <p:nvSpPr>
+          <p:cNvPr id="13" name="TextBox 12"/>
+          <p:cNvSpPr txBox="1"/>
+          <p:nvPr/>
+        </p:nvSpPr>
+        <p:spPr>
+          <a:xfrm>
+            <a:off x="731520" y="5669280"/>
+            <a:ext cx="10515600" cy="548640"/>
+          </a:xfrm>
+          <a:prstGeom prst="rect">
+            <a:avLst/>
+          </a:prstGeom>
+          <a:noFill/>
+        </p:spPr>
+        <p:txBody>
+          <a:bodyPr wrap="square">
+            <a:spAutoFit/>
+          </a:bodyPr>
+          <a:lstStyle/>
+          <a:p>
+            <a:pPr algn="l">
+              <a:defRPr sz="2000" b="1">
+                <a:solidFill>
+                  <a:srgbClr val="D97706"/>
+                </a:solidFill>
+              </a:defRPr>
+            </a:pPr>
+            <a:r>
+              <a:t>💡 새 공문이 생길 때마다 소스를 추가하면 챗봇이 계속 똑똑해집니다.</a:t>
+            </a:r>
+          </a:p>
+        </p:txBody>
+      </p:sp>
+      <p:sp>
+        <p:nvSpPr>
+          <p:cNvPr id="14" name="TextBox 13"/>
+          <p:cNvSpPr txBox="1"/>
+          <p:nvPr/>
+        </p:nvSpPr>
+        <p:spPr>
+          <a:xfrm>
+            <a:off x="11155680" y="6446520"/>
+            <a:ext cx="731520" cy="320040"/>
+          </a:xfrm>
+          <a:prstGeom prst="rect">
+            <a:avLst/>
+          </a:prstGeom>
+          <a:noFill/>
+        </p:spPr>
+        <p:txBody>
+          <a:bodyPr wrap="square">
+            <a:spAutoFit/>
+          </a:bodyPr>
+          <a:lstStyle/>
+          <a:p>
             <a:pPr algn="r">
-              <a:defRPr sz="1100" b="0">
+              <a:defRPr sz="1400" b="0">
                 <a:solidFill>
                   <a:srgbClr val="64748B"/>
                 </a:solidFill>
@@ -6604,51 +10839,8 @@
         </p:nvSpPr>
         <p:spPr>
           <a:xfrm>
-            <a:off x="0" y="0"/>
-            <a:ext cx="12191695" cy="109728"/>
-          </a:xfrm>
-          <a:prstGeom prst="rect">
-            <a:avLst/>
-          </a:prstGeom>
-          <a:solidFill>
-            <a:srgbClr val="3B82F6"/>
-          </a:solidFill>
-          <a:ln>
-            <a:noFill/>
-          </a:ln>
-        </p:spPr>
-        <p:style>
-          <a:lnRef idx="1">
-            <a:schemeClr val="accent1"/>
-          </a:lnRef>
-          <a:fillRef idx="3">
-            <a:schemeClr val="accent1"/>
-          </a:fillRef>
-          <a:effectRef idx="2">
-            <a:schemeClr val="accent1"/>
-          </a:effectRef>
-          <a:fontRef idx="minor">
-            <a:schemeClr val="lt1"/>
-          </a:fontRef>
-        </p:style>
-        <p:txBody>
-          <a:bodyPr rtlCol="0" anchor="ctr"/>
-          <a:lstStyle/>
-          <a:p>
-            <a:pPr algn="ctr"/>
-          </a:p>
-        </p:txBody>
-      </p:sp>
-      <p:sp>
-        <p:nvSpPr>
-          <p:cNvPr id="3" name="Rectangle 2"/>
-          <p:cNvSpPr/>
-          <p:nvPr/>
-        </p:nvSpPr>
-        <p:spPr>
-          <a:xfrm>
-            <a:off x="640080" y="411480"/>
-            <a:ext cx="1463040" cy="411480"/>
+            <a:off x="548640" y="320040"/>
+            <a:ext cx="1280160" cy="384048"/>
           </a:xfrm>
           <a:prstGeom prst="rect">
             <a:avLst/>
@@ -6684,14 +10876,14 @@
       </p:sp>
       <p:sp>
         <p:nvSpPr>
-          <p:cNvPr id="4" name="TextBox 3"/>
+          <p:cNvPr id="3" name="TextBox 2"/>
           <p:cNvSpPr txBox="1"/>
           <p:nvPr/>
         </p:nvSpPr>
         <p:spPr>
           <a:xfrm>
-            <a:off x="640080" y="384048"/>
-            <a:ext cx="1463040" cy="457200"/>
+            <a:off x="548640" y="292608"/>
+            <a:ext cx="1280160" cy="411480"/>
           </a:xfrm>
           <a:prstGeom prst="rect">
             <a:avLst/>
@@ -6705,28 +10897,28 @@
           <a:lstStyle/>
           <a:p>
             <a:pPr algn="ctr">
-              <a:defRPr sz="1300" b="1">
+              <a:defRPr sz="1600" b="1">
                 <a:solidFill>
                   <a:srgbClr val="1E40AF"/>
                 </a:solidFill>
               </a:defRPr>
             </a:pPr>
             <a:r>
-              <a:t>[45~48분]</a:t>
-            </a:r>
-          </a:p>
-        </p:txBody>
-      </p:sp>
-      <p:sp>
-        <p:nvSpPr>
-          <p:cNvPr id="5" name="TextBox 4"/>
+              <a:t>[5~20분]</a:t>
+            </a:r>
+          </a:p>
+        </p:txBody>
+      </p:sp>
+      <p:sp>
+        <p:nvSpPr>
+          <p:cNvPr id="4" name="TextBox 3"/>
           <p:cNvSpPr txBox="1"/>
           <p:nvPr/>
         </p:nvSpPr>
         <p:spPr>
           <a:xfrm>
-            <a:off x="640080" y="868680"/>
-            <a:ext cx="10515600" cy="822960"/>
+            <a:off x="548640" y="777240"/>
+            <a:ext cx="10972800" cy="731520"/>
           </a:xfrm>
           <a:prstGeom prst="rect">
             <a:avLst/>
@@ -6740,28 +10932,28 @@
           <a:lstStyle/>
           <a:p>
             <a:pPr algn="l">
-              <a:defRPr sz="3000" b="1">
+              <a:defRPr sz="3400" b="1">
                 <a:solidFill>
                   <a:srgbClr val="1E40AF"/>
                 </a:solidFill>
               </a:defRPr>
             </a:pPr>
             <a:r>
-              <a:t>워크스페이스+ 심화 팁</a:t>
-            </a:r>
-          </a:p>
-        </p:txBody>
-      </p:sp>
-      <p:sp>
-        <p:nvSpPr>
-          <p:cNvPr id="6" name="Rectangle 5"/>
+              <a:t>1-2. 학생부 기록(세특) 시간 단축</a:t>
+            </a:r>
+          </a:p>
+        </p:txBody>
+      </p:sp>
+      <p:sp>
+        <p:nvSpPr>
+          <p:cNvPr id="5" name="Rectangle 4"/>
           <p:cNvSpPr/>
           <p:nvPr/>
         </p:nvSpPr>
         <p:spPr>
           <a:xfrm>
-            <a:off x="640080" y="1691640"/>
-            <a:ext cx="2286000" cy="54864"/>
+            <a:off x="548640" y="1508760"/>
+            <a:ext cx="2560320" cy="64008"/>
           </a:xfrm>
           <a:prstGeom prst="rect">
             <a:avLst/>
@@ -6797,14 +10989,57 @@
       </p:sp>
       <p:sp>
         <p:nvSpPr>
+          <p:cNvPr id="6" name="Rectangle 5"/>
+          <p:cNvSpPr/>
+          <p:nvPr/>
+        </p:nvSpPr>
+        <p:spPr>
+          <a:xfrm>
+            <a:off x="548640" y="1737360"/>
+            <a:ext cx="3474720" cy="822960"/>
+          </a:xfrm>
+          <a:prstGeom prst="rect">
+            <a:avLst/>
+          </a:prstGeom>
+          <a:solidFill>
+            <a:srgbClr val="DBEAFE"/>
+          </a:solidFill>
+          <a:ln>
+            <a:noFill/>
+          </a:ln>
+        </p:spPr>
+        <p:style>
+          <a:lnRef idx="1">
+            <a:schemeClr val="accent1"/>
+          </a:lnRef>
+          <a:fillRef idx="3">
+            <a:schemeClr val="accent1"/>
+          </a:fillRef>
+          <a:effectRef idx="2">
+            <a:schemeClr val="accent1"/>
+          </a:effectRef>
+          <a:fontRef idx="minor">
+            <a:schemeClr val="lt1"/>
+          </a:fontRef>
+        </p:style>
+        <p:txBody>
+          <a:bodyPr rtlCol="0" anchor="ctr"/>
+          <a:lstStyle/>
+          <a:p>
+            <a:pPr algn="ctr"/>
+          </a:p>
+        </p:txBody>
+      </p:sp>
+      <p:sp>
+        <p:nvSpPr>
           <p:cNvPr id="7" name="TextBox 6"/>
           <p:cNvSpPr txBox="1"/>
           <p:nvPr/>
         </p:nvSpPr>
         <p:spPr>
           <a:xfrm>
-            <a:off x="822960" y="1920240"/>
-            <a:ext cx="10241280" cy="4389120"/>
+            <a:off x="685800" y="1874520"/>
+            <a:ext cx="3200400" cy="640080"/>
           </a:xfrm>
           <a:prstGeom prst="rect">
             <a:avLst/>
@@ -6818,76 +11053,71 @@
           <a:lstStyle/>
           <a:p>
             <a:pPr algn="l">
-              <a:spcAft>
-                <a:spcPts val="1000"/>
-              </a:spcAft>
-              <a:defRPr sz="1700" b="0">
-                <a:solidFill>
-                  <a:srgbClr val="334155"/>
+              <a:defRPr sz="1800" b="1">
+                <a:solidFill>
+                  <a:srgbClr val="1E40AF"/>
                 </a:solidFill>
               </a:defRPr>
             </a:pPr>
             <a:r>
-              <a:t>스프레드시트: '국어 80점 이상 학생 특징 분석해줘' — 함수 없이 자연어 분석</a:t>
-            </a:r>
-          </a:p>
-          <a:p>
-            <a:pPr>
-              <a:spcAft>
-                <a:spcPts val="1000"/>
-              </a:spcAft>
-              <a:defRPr sz="1700">
-                <a:solidFill>
-                  <a:srgbClr val="334155"/>
-                </a:solidFill>
-              </a:defRPr>
-            </a:pPr>
-            <a:r>
-              <a:t>클래스룸: 학생 과제 PDF 업로드 → 성취기준 기반 맞춤 피드백 초안</a:t>
-            </a:r>
-          </a:p>
-          <a:p>
-            <a:pPr>
-              <a:spcAft>
-                <a:spcPts val="1000"/>
-              </a:spcAft>
-              <a:defRPr sz="1700">
-                <a:solidFill>
-                  <a:srgbClr val="334155"/>
-                </a:solidFill>
-              </a:defRPr>
-            </a:pPr>
-            <a:r>
-              <a:t>[BONUS] 2022 개정 교육과정 반영 수업 설계 프롬프트</a:t>
-            </a:r>
-          </a:p>
-          <a:p>
-            <a:pPr>
-              <a:spcAft>
-                <a:spcPts val="1000"/>
-              </a:spcAft>
-              <a:defRPr sz="1700">
-                <a:solidFill>
-                  <a:srgbClr val="334155"/>
-                </a:solidFill>
-              </a:defRPr>
-            </a:pPr>
-            <a:r>
-              <a:t>역량 중심 수업에서 '학생이 스스로 질문 생성' 활동 포함 요청</a:t>
-            </a:r>
-          </a:p>
-        </p:txBody>
-      </p:sp>
-      <p:sp>
-        <p:nvSpPr>
-          <p:cNvPr id="8" name="TextBox 7"/>
+              <a:t>1. 학생별 노트 생성 (예: 30101 김민준)</a:t>
+            </a:r>
+          </a:p>
+        </p:txBody>
+      </p:sp>
+      <p:sp>
+        <p:nvSpPr>
+          <p:cNvPr id="8" name="Rectangle 7"/>
+          <p:cNvSpPr/>
+          <p:nvPr/>
+        </p:nvSpPr>
+        <p:spPr>
+          <a:xfrm>
+            <a:off x="4297679" y="1737360"/>
+            <a:ext cx="3474720" cy="822960"/>
+          </a:xfrm>
+          <a:prstGeom prst="rect">
+            <a:avLst/>
+          </a:prstGeom>
+          <a:solidFill>
+            <a:srgbClr val="DBEAFE"/>
+          </a:solidFill>
+          <a:ln>
+            <a:noFill/>
+          </a:ln>
+        </p:spPr>
+        <p:style>
+          <a:lnRef idx="1">
+            <a:schemeClr val="accent1"/>
+          </a:lnRef>
+          <a:fillRef idx="3">
+            <a:schemeClr val="accent1"/>
+          </a:fillRef>
+          <a:effectRef idx="2">
+            <a:schemeClr val="accent1"/>
+          </a:effectRef>
+          <a:fontRef idx="minor">
+            <a:schemeClr val="lt1"/>
+          </a:fontRef>
+        </p:style>
+        <p:txBody>
+          <a:bodyPr rtlCol="0" anchor="ctr"/>
+          <a:lstStyle/>
+          <a:p>
+            <a:pPr algn="ctr"/>
+          </a:p>
+        </p:txBody>
+      </p:sp>
+      <p:sp>
+        <p:nvSpPr>
+          <p:cNvPr id="9" name="TextBox 8"/>
           <p:cNvSpPr txBox="1"/>
           <p:nvPr/>
         </p:nvSpPr>
         <p:spPr>
           <a:xfrm>
-            <a:off x="11247120" y="6446520"/>
-            <a:ext cx="731520" cy="320040"/>
+            <a:off x="4434839" y="1874520"/>
+            <a:ext cx="3200400" cy="640080"/>
           </a:xfrm>
           <a:prstGeom prst="rect">
             <a:avLst/>
@@ -6900,8 +11130,211 @@
           </a:bodyPr>
           <a:lstStyle/>
           <a:p>
+            <a:pPr algn="l">
+              <a:defRPr sz="1800" b="1">
+                <a:solidFill>
+                  <a:srgbClr val="1E40AF"/>
+                </a:solidFill>
+              </a:defRPr>
+            </a:pPr>
+            <a:r>
+              <a:t>2. 과제·보고서·활동기록 업로드</a:t>
+            </a:r>
+          </a:p>
+        </p:txBody>
+      </p:sp>
+      <p:sp>
+        <p:nvSpPr>
+          <p:cNvPr id="10" name="Rectangle 9"/>
+          <p:cNvSpPr/>
+          <p:nvPr/>
+        </p:nvSpPr>
+        <p:spPr>
+          <a:xfrm>
+            <a:off x="8046719" y="1737360"/>
+            <a:ext cx="3474720" cy="822960"/>
+          </a:xfrm>
+          <a:prstGeom prst="rect">
+            <a:avLst/>
+          </a:prstGeom>
+          <a:solidFill>
+            <a:srgbClr val="DBEAFE"/>
+          </a:solidFill>
+          <a:ln>
+            <a:noFill/>
+          </a:ln>
+        </p:spPr>
+        <p:style>
+          <a:lnRef idx="1">
+            <a:schemeClr val="accent1"/>
+          </a:lnRef>
+          <a:fillRef idx="3">
+            <a:schemeClr val="accent1"/>
+          </a:fillRef>
+          <a:effectRef idx="2">
+            <a:schemeClr val="accent1"/>
+          </a:effectRef>
+          <a:fontRef idx="minor">
+            <a:schemeClr val="lt1"/>
+          </a:fontRef>
+        </p:style>
+        <p:txBody>
+          <a:bodyPr rtlCol="0" anchor="ctr"/>
+          <a:lstStyle/>
+          <a:p>
+            <a:pPr algn="ctr"/>
+          </a:p>
+        </p:txBody>
+      </p:sp>
+      <p:sp>
+        <p:nvSpPr>
+          <p:cNvPr id="11" name="TextBox 10"/>
+          <p:cNvSpPr txBox="1"/>
+          <p:nvPr/>
+        </p:nvSpPr>
+        <p:spPr>
+          <a:xfrm>
+            <a:off x="8183879" y="1874520"/>
+            <a:ext cx="3200400" cy="640080"/>
+          </a:xfrm>
+          <a:prstGeom prst="rect">
+            <a:avLst/>
+          </a:prstGeom>
+          <a:noFill/>
+        </p:spPr>
+        <p:txBody>
+          <a:bodyPr wrap="square">
+            <a:spAutoFit/>
+          </a:bodyPr>
+          <a:lstStyle/>
+          <a:p>
+            <a:pPr algn="l">
+              <a:defRPr sz="1800" b="1">
+                <a:solidFill>
+                  <a:srgbClr val="1E40AF"/>
+                </a:solidFill>
+              </a:defRPr>
+            </a:pPr>
+            <a:r>
+              <a:t>3. 세특 초안 요청</a:t>
+            </a:r>
+          </a:p>
+        </p:txBody>
+      </p:sp>
+      <p:sp>
+        <p:nvSpPr>
+          <p:cNvPr id="12" name="Rectangle 11"/>
+          <p:cNvSpPr/>
+          <p:nvPr/>
+        </p:nvSpPr>
+        <p:spPr>
+          <a:xfrm>
+            <a:off x="548640" y="2743200"/>
+            <a:ext cx="10972800" cy="1828800"/>
+          </a:xfrm>
+          <a:prstGeom prst="rect">
+            <a:avLst/>
+          </a:prstGeom>
+          <a:solidFill>
+            <a:srgbClr val="1E293B"/>
+          </a:solidFill>
+          <a:ln>
+            <a:solidFill>
+              <a:srgbClr val="64748B"/>
+            </a:solidFill>
+          </a:ln>
+        </p:spPr>
+        <p:style>
+          <a:lnRef idx="1">
+            <a:schemeClr val="accent1"/>
+          </a:lnRef>
+          <a:fillRef idx="3">
+            <a:schemeClr val="accent1"/>
+          </a:fillRef>
+          <a:effectRef idx="2">
+            <a:schemeClr val="accent1"/>
+          </a:effectRef>
+          <a:fontRef idx="minor">
+            <a:schemeClr val="lt1"/>
+          </a:fontRef>
+        </p:style>
+        <p:txBody>
+          <a:bodyPr rtlCol="0" anchor="ctr" wrap="square" lIns="152400" tIns="127000"/>
+          <a:lstStyle/>
+          <a:p>
+            <a:pPr algn="ctr">
+              <a:defRPr sz="1600">
+                <a:solidFill>
+                  <a:srgbClr val="FFFFFF"/>
+                </a:solidFill>
+                <a:latin typeface="Courier New"/>
+              </a:defRPr>
+            </a:pPr>
+            <a:r>
+              <a:t>이 학생의 탐구 보고서를 바탕으로, 과학적 탐구 역량과 심화 학습 태도가 드러나는 세특 초안을 1~2문장으로 작성해 줘. 데이터 분석 능력이 돋보이도록.</a:t>
+            </a:r>
+          </a:p>
+        </p:txBody>
+      </p:sp>
+      <p:sp>
+        <p:nvSpPr>
+          <p:cNvPr id="13" name="TextBox 12"/>
+          <p:cNvSpPr txBox="1"/>
+          <p:nvPr/>
+        </p:nvSpPr>
+        <p:spPr>
+          <a:xfrm>
+            <a:off x="731520" y="5669280"/>
+            <a:ext cx="10515600" cy="548640"/>
+          </a:xfrm>
+          <a:prstGeom prst="rect">
+            <a:avLst/>
+          </a:prstGeom>
+          <a:noFill/>
+        </p:spPr>
+        <p:txBody>
+          <a:bodyPr wrap="square">
+            <a:spAutoFit/>
+          </a:bodyPr>
+          <a:lstStyle/>
+          <a:p>
+            <a:pPr algn="l">
+              <a:defRPr sz="2000" b="1">
+                <a:solidFill>
+                  <a:srgbClr val="D97706"/>
+                </a:solidFill>
+              </a:defRPr>
+            </a:pPr>
+            <a:r>
+              <a:t>💡 AI 초안은 참고 자료입니다. 선생님의 관찰을 더해 완성하세요.</a:t>
+            </a:r>
+          </a:p>
+        </p:txBody>
+      </p:sp>
+      <p:sp>
+        <p:nvSpPr>
+          <p:cNvPr id="14" name="TextBox 13"/>
+          <p:cNvSpPr txBox="1"/>
+          <p:nvPr/>
+        </p:nvSpPr>
+        <p:spPr>
+          <a:xfrm>
+            <a:off x="11155680" y="6446520"/>
+            <a:ext cx="731520" cy="320040"/>
+          </a:xfrm>
+          <a:prstGeom prst="rect">
+            <a:avLst/>
+          </a:prstGeom>
+          <a:noFill/>
+        </p:spPr>
+        <p:txBody>
+          <a:bodyPr wrap="square">
+            <a:spAutoFit/>
+          </a:bodyPr>
+          <a:lstStyle/>
+          <a:p>
             <a:pPr algn="r">
-              <a:defRPr sz="1100" b="0">
+              <a:defRPr sz="1400" b="0">
                 <a:solidFill>
                   <a:srgbClr val="64748B"/>
                 </a:solidFill>
@@ -6927,7 +11360,7 @@
     <p:bg>
       <p:bgPr>
         <a:solidFill>
-          <a:srgbClr val="FFFFFF"/>
+          <a:srgbClr val="F8FAFC"/>
         </a:solidFill>
         <a:effectLst/>
       </p:bgPr>
@@ -6947,14 +11380,14 @@
         </p:nvSpPr>
         <p:spPr>
           <a:xfrm>
-            <a:off x="0" y="0"/>
-            <a:ext cx="12191695" cy="109728"/>
+            <a:off x="548640" y="320040"/>
+            <a:ext cx="1280160" cy="384048"/>
           </a:xfrm>
           <a:prstGeom prst="rect">
             <a:avLst/>
           </a:prstGeom>
           <a:solidFill>
-            <a:srgbClr val="3B82F6"/>
+            <a:srgbClr val="DBEAFE"/>
           </a:solidFill>
           <a:ln>
             <a:noFill/>
@@ -6990,8 +11423,8 @@
         </p:nvSpPr>
         <p:spPr>
           <a:xfrm>
-            <a:off x="640080" y="868680"/>
-            <a:ext cx="10515600" cy="822960"/>
+            <a:off x="548640" y="292608"/>
+            <a:ext cx="1280160" cy="411480"/>
           </a:xfrm>
           <a:prstGeom prst="rect">
             <a:avLst/>
@@ -7004,29 +11437,64 @@
           </a:bodyPr>
           <a:lstStyle/>
           <a:p>
+            <a:pPr algn="ctr">
+              <a:defRPr sz="1600" b="1">
+                <a:solidFill>
+                  <a:srgbClr val="1E40AF"/>
+                </a:solidFill>
+              </a:defRPr>
+            </a:pPr>
+            <a:r>
+              <a:t>[5~20분]</a:t>
+            </a:r>
+          </a:p>
+        </p:txBody>
+      </p:sp>
+      <p:sp>
+        <p:nvSpPr>
+          <p:cNvPr id="4" name="TextBox 3"/>
+          <p:cNvSpPr txBox="1"/>
+          <p:nvPr/>
+        </p:nvSpPr>
+        <p:spPr>
+          <a:xfrm>
+            <a:off x="548640" y="777240"/>
+            <a:ext cx="10972800" cy="731520"/>
+          </a:xfrm>
+          <a:prstGeom prst="rect">
+            <a:avLst/>
+          </a:prstGeom>
+          <a:noFill/>
+        </p:spPr>
+        <p:txBody>
+          <a:bodyPr wrap="square">
+            <a:spAutoFit/>
+          </a:bodyPr>
+          <a:lstStyle/>
+          <a:p>
             <a:pPr algn="l">
-              <a:defRPr sz="3000" b="1">
+              <a:defRPr sz="3400" b="1">
                 <a:solidFill>
                   <a:srgbClr val="1E40AF"/>
                 </a:solidFill>
               </a:defRPr>
             </a:pPr>
             <a:r>
-              <a:t>상황별 활용 가이드 — 강의 후 참고</a:t>
-            </a:r>
-          </a:p>
-        </p:txBody>
-      </p:sp>
-      <p:sp>
-        <p:nvSpPr>
-          <p:cNvPr id="4" name="Rectangle 3"/>
+              <a:t>1-3·1-4. 평가 계획 &amp; 문항·루브릭</a:t>
+            </a:r>
+          </a:p>
+        </p:txBody>
+      </p:sp>
+      <p:sp>
+        <p:nvSpPr>
+          <p:cNvPr id="5" name="Rectangle 4"/>
           <p:cNvSpPr/>
           <p:nvPr/>
         </p:nvSpPr>
         <p:spPr>
           <a:xfrm>
-            <a:off x="640080" y="1691640"/>
-            <a:ext cx="2286000" cy="54864"/>
+            <a:off x="548640" y="1508760"/>
+            <a:ext cx="2560320" cy="64008"/>
           </a:xfrm>
           <a:prstGeom prst="rect">
             <a:avLst/>
@@ -7062,14 +11530,59 @@
       </p:sp>
       <p:sp>
         <p:nvSpPr>
-          <p:cNvPr id="5" name="TextBox 4"/>
+          <p:cNvPr id="6" name="Rectangle 5"/>
+          <p:cNvSpPr/>
+          <p:nvPr/>
+        </p:nvSpPr>
+        <p:spPr>
+          <a:xfrm>
+            <a:off x="548640" y="1737360"/>
+            <a:ext cx="5486400" cy="4572000"/>
+          </a:xfrm>
+          <a:prstGeom prst="rect">
+            <a:avLst/>
+          </a:prstGeom>
+          <a:solidFill>
+            <a:srgbClr val="FFFFFF"/>
+          </a:solidFill>
+          <a:ln>
+            <a:solidFill>
+              <a:srgbClr val="DBEAFE"/>
+            </a:solidFill>
+          </a:ln>
+        </p:spPr>
+        <p:style>
+          <a:lnRef idx="1">
+            <a:schemeClr val="accent1"/>
+          </a:lnRef>
+          <a:fillRef idx="3">
+            <a:schemeClr val="accent1"/>
+          </a:fillRef>
+          <a:effectRef idx="2">
+            <a:schemeClr val="accent1"/>
+          </a:effectRef>
+          <a:fontRef idx="minor">
+            <a:schemeClr val="lt1"/>
+          </a:fontRef>
+        </p:style>
+        <p:txBody>
+          <a:bodyPr rtlCol="0" anchor="ctr"/>
+          <a:lstStyle/>
+          <a:p>
+            <a:pPr algn="ctr"/>
+          </a:p>
+        </p:txBody>
+      </p:sp>
+      <p:sp>
+        <p:nvSpPr>
+          <p:cNvPr id="7" name="TextBox 6"/>
           <p:cNvSpPr txBox="1"/>
           <p:nvPr/>
         </p:nvSpPr>
         <p:spPr>
           <a:xfrm>
-            <a:off x="822960" y="1920240"/>
-            <a:ext cx="10241280" cy="4389120"/>
+            <a:off x="731520" y="1874519"/>
+            <a:ext cx="5120640" cy="457200"/>
           </a:xfrm>
           <a:prstGeom prst="rect">
             <a:avLst/>
@@ -7083,91 +11596,128 @@
           <a:lstStyle/>
           <a:p>
             <a:pPr algn="l">
-              <a:spcAft>
-                <a:spcPts val="1000"/>
-              </a:spcAft>
-              <a:defRPr sz="1700" b="0">
-                <a:solidFill>
-                  <a:srgbClr val="334155"/>
+              <a:defRPr sz="2400" b="1">
+                <a:solidFill>
+                  <a:srgbClr val="1E40AF"/>
                 </a:solidFill>
               </a:defRPr>
             </a:pPr>
             <a:r>
-              <a:t>📄 참고 문서가 있으면 → NotebookLM  |  ✨ 새로 만들 일이면 → Gemini</a:t>
-            </a:r>
-          </a:p>
-          <a:p>
-            <a:pPr>
-              <a:spcAft>
-                <a:spcPts val="1000"/>
-              </a:spcAft>
-              <a:defRPr sz="1700">
-                <a:solidFill>
-                  <a:srgbClr val="334155"/>
-                </a:solidFill>
+              <a:t>1-3 평가 계획 초안</a:t>
+            </a:r>
+          </a:p>
+        </p:txBody>
+      </p:sp>
+      <p:sp>
+        <p:nvSpPr>
+          <p:cNvPr id="8" name="Rectangle 7"/>
+          <p:cNvSpPr/>
+          <p:nvPr/>
+        </p:nvSpPr>
+        <p:spPr>
+          <a:xfrm>
+            <a:off x="731520" y="2468880"/>
+            <a:ext cx="5120640" cy="3566160"/>
+          </a:xfrm>
+          <a:prstGeom prst="rect">
+            <a:avLst/>
+          </a:prstGeom>
+          <a:solidFill>
+            <a:srgbClr val="1E293B"/>
+          </a:solidFill>
+          <a:ln>
+            <a:solidFill>
+              <a:srgbClr val="64748B"/>
+            </a:solidFill>
+          </a:ln>
+        </p:spPr>
+        <p:style>
+          <a:lnRef idx="1">
+            <a:schemeClr val="accent1"/>
+          </a:lnRef>
+          <a:fillRef idx="3">
+            <a:schemeClr val="accent1"/>
+          </a:fillRef>
+          <a:effectRef idx="2">
+            <a:schemeClr val="accent1"/>
+          </a:effectRef>
+          <a:fontRef idx="minor">
+            <a:schemeClr val="lt1"/>
+          </a:fontRef>
+        </p:style>
+        <p:txBody>
+          <a:bodyPr rtlCol="0" anchor="ctr" wrap="square" lIns="152400" tIns="127000"/>
+          <a:lstStyle/>
+          <a:p>
+            <a:pPr algn="ctr">
+              <a:defRPr sz="1500">
+                <a:solidFill>
+                  <a:srgbClr val="FFFFFF"/>
+                </a:solidFill>
+                <a:latin typeface="Courier New"/>
               </a:defRPr>
             </a:pPr>
             <a:r>
-              <a:t>규정·일정·세특·평가 → NotebookLM  |  가정통신문·슬라이드·설문 → Gemini</a:t>
-            </a:r>
-          </a:p>
-          <a:p>
-            <a:pPr>
-              <a:spcAft>
-                <a:spcPts val="1000"/>
-              </a:spcAft>
-              <a:defRPr sz="1700">
-                <a:solidFill>
-                  <a:srgbClr val="334155"/>
-                </a:solidFill>
-              </a:defRPr>
-            </a:pPr>
-            <a:r>
-              <a:t>3월 학기 초: 학부모 안내  |  4~6월: 평가 준비  |  7월: 세특 기록</a:t>
-            </a:r>
-          </a:p>
-          <a:p>
-            <a:pPr>
-              <a:spcAft>
-                <a:spcPts val="1000"/>
-              </a:spcAft>
-              <a:defRPr sz="1700">
-                <a:solidFill>
-                  <a:srgbClr val="334155"/>
-                </a:solidFill>
-              </a:defRPr>
-            </a:pPr>
-            <a:r>
-              <a:t>가이드 페이지 [상황별 활용] 섹션 + 상단 검색창으로 프롬프트 바로 찾기</a:t>
-            </a:r>
-          </a:p>
-          <a:p>
-            <a:pPr>
-              <a:spcAft>
-                <a:spcPts val="1000"/>
-              </a:spcAft>
-              <a:defRPr sz="1700">
-                <a:solidFill>
-                  <a:srgbClr val="334155"/>
-                </a:solidFill>
-              </a:defRPr>
-            </a:pPr>
-            <a:r>
-              <a:t>📌 페이지 링크 북마크 → 강의 후에도 체크리스트와 함께 자기주도 실습</a:t>
-            </a:r>
-          </a:p>
-        </p:txBody>
-      </p:sp>
-      <p:sp>
-        <p:nvSpPr>
-          <p:cNvPr id="6" name="TextBox 5"/>
+              <a:t>업로드된 '성취기준'과 '2024 평가계획'을 바탕으로, 2025학년도 '확률과 통계' 1학기 평가 계획 초안을 표 형식으로 작성해 줘. (지필 1회, 수행 2회)</a:t>
+            </a:r>
+          </a:p>
+        </p:txBody>
+      </p:sp>
+      <p:sp>
+        <p:nvSpPr>
+          <p:cNvPr id="9" name="Rectangle 8"/>
+          <p:cNvSpPr/>
+          <p:nvPr/>
+        </p:nvSpPr>
+        <p:spPr>
+          <a:xfrm>
+            <a:off x="6217920" y="1737360"/>
+            <a:ext cx="5486400" cy="4572000"/>
+          </a:xfrm>
+          <a:prstGeom prst="rect">
+            <a:avLst/>
+          </a:prstGeom>
+          <a:solidFill>
+            <a:srgbClr val="FFFFFF"/>
+          </a:solidFill>
+          <a:ln>
+            <a:solidFill>
+              <a:srgbClr val="F472B6"/>
+            </a:solidFill>
+          </a:ln>
+        </p:spPr>
+        <p:style>
+          <a:lnRef idx="1">
+            <a:schemeClr val="accent1"/>
+          </a:lnRef>
+          <a:fillRef idx="3">
+            <a:schemeClr val="accent1"/>
+          </a:fillRef>
+          <a:effectRef idx="2">
+            <a:schemeClr val="accent1"/>
+          </a:effectRef>
+          <a:fontRef idx="minor">
+            <a:schemeClr val="lt1"/>
+          </a:fontRef>
+        </p:style>
+        <p:txBody>
+          <a:bodyPr rtlCol="0" anchor="ctr"/>
+          <a:lstStyle/>
+          <a:p>
+            <a:pPr algn="ctr"/>
+          </a:p>
+        </p:txBody>
+      </p:sp>
+      <p:sp>
+        <p:nvSpPr>
+          <p:cNvPr id="10" name="TextBox 9"/>
           <p:cNvSpPr txBox="1"/>
           <p:nvPr/>
         </p:nvSpPr>
         <p:spPr>
           <a:xfrm>
-            <a:off x="11247120" y="6446520"/>
-            <a:ext cx="731520" cy="320040"/>
+            <a:off x="6400800" y="1874519"/>
+            <a:ext cx="5120640" cy="457200"/>
           </a:xfrm>
           <a:prstGeom prst="rect">
             <a:avLst/>
@@ -7180,8 +11730,102 @@
           </a:bodyPr>
           <a:lstStyle/>
           <a:p>
+            <a:pPr algn="l">
+              <a:defRPr sz="2400" b="1">
+                <a:solidFill>
+                  <a:srgbClr val="F472B6"/>
+                </a:solidFill>
+              </a:defRPr>
+            </a:pPr>
+            <a:r>
+              <a:t>1-4 문항 &amp; 루브릭</a:t>
+            </a:r>
+          </a:p>
+        </p:txBody>
+      </p:sp>
+      <p:sp>
+        <p:nvSpPr>
+          <p:cNvPr id="11" name="Rectangle 10"/>
+          <p:cNvSpPr/>
+          <p:nvPr/>
+        </p:nvSpPr>
+        <p:spPr>
+          <a:xfrm>
+            <a:off x="6400800" y="2468880"/>
+            <a:ext cx="5120640" cy="3566160"/>
+          </a:xfrm>
+          <a:prstGeom prst="rect">
+            <a:avLst/>
+          </a:prstGeom>
+          <a:solidFill>
+            <a:srgbClr val="1E293B"/>
+          </a:solidFill>
+          <a:ln>
+            <a:solidFill>
+              <a:srgbClr val="64748B"/>
+            </a:solidFill>
+          </a:ln>
+        </p:spPr>
+        <p:style>
+          <a:lnRef idx="1">
+            <a:schemeClr val="accent1"/>
+          </a:lnRef>
+          <a:fillRef idx="3">
+            <a:schemeClr val="accent1"/>
+          </a:fillRef>
+          <a:effectRef idx="2">
+            <a:schemeClr val="accent1"/>
+          </a:effectRef>
+          <a:fontRef idx="minor">
+            <a:schemeClr val="lt1"/>
+          </a:fontRef>
+        </p:style>
+        <p:txBody>
+          <a:bodyPr rtlCol="0" anchor="ctr" wrap="square" lIns="152400" tIns="127000"/>
+          <a:lstStyle/>
+          <a:p>
+            <a:pPr algn="ctr">
+              <a:defRPr sz="1500">
+                <a:solidFill>
+                  <a:srgbClr val="FFFFFF"/>
+                </a:solidFill>
+                <a:latin typeface="Courier New"/>
+              </a:defRPr>
+            </a:pPr>
+            <a:r>
+              <a:t>(문항) '통합사회 5단' 내용으로 비판적 사고력 평가용 서술형 문항 3개 만들어 줘.</a:t>
+            </a:r>
+            <a:br/>
+            <a:r>
+              <a:t>(기준표) 2번 문항의 채점 기준표를 '문제 이해도', '논리적 근거', '창의적 대안' 항목으로 표로 만들어 줘.</a:t>
+            </a:r>
+          </a:p>
+        </p:txBody>
+      </p:sp>
+      <p:sp>
+        <p:nvSpPr>
+          <p:cNvPr id="12" name="TextBox 11"/>
+          <p:cNvSpPr txBox="1"/>
+          <p:nvPr/>
+        </p:nvSpPr>
+        <p:spPr>
+          <a:xfrm>
+            <a:off x="11155680" y="6446520"/>
+            <a:ext cx="731520" cy="320040"/>
+          </a:xfrm>
+          <a:prstGeom prst="rect">
+            <a:avLst/>
+          </a:prstGeom>
+          <a:noFill/>
+        </p:spPr>
+        <p:txBody>
+          <a:bodyPr wrap="square">
+            <a:spAutoFit/>
+          </a:bodyPr>
+          <a:lstStyle/>
+          <a:p>
             <a:pPr algn="r">
-              <a:defRPr sz="1100" b="0">
+              <a:defRPr sz="1400" b="0">
                 <a:solidFill>
                   <a:srgbClr val="64748B"/>
                 </a:solidFill>
